--- a/lectures/lecture2_3/lecture2.pptx
+++ b/lectures/lecture2_3/lecture2.pptx
@@ -9,8 +9,12 @@
     <p:sldId id="257" r:id="rId3"/>
     <p:sldId id="264" r:id="rId4"/>
     <p:sldId id="265" r:id="rId5"/>
-    <p:sldId id="266" r:id="rId6"/>
-    <p:sldId id="267" r:id="rId7"/>
+    <p:sldId id="270" r:id="rId6"/>
+    <p:sldId id="271" r:id="rId7"/>
+    <p:sldId id="272" r:id="rId8"/>
+    <p:sldId id="273" r:id="rId9"/>
+    <p:sldId id="266" r:id="rId10"/>
+    <p:sldId id="267" r:id="rId11"/>
   </p:sldIdLst>
   <p:sldSz cx="12192000" cy="6858000"/>
   <p:notesSz cx="6858000" cy="9144000"/>
@@ -120,7 +124,7 @@
 <file path=ppt/revisionInfo.xml><?xml version="1.0" encoding="utf-8"?>
 <p1510:revInfo xmlns:a="http://schemas.openxmlformats.org/drawingml/2006/main" xmlns:r="http://schemas.openxmlformats.org/officeDocument/2006/relationships" xmlns:p1510="http://schemas.microsoft.com/office/powerpoint/2015/10/main">
   <p1510:revLst>
-    <p1510:client id="{E5AD1E4E-F8E9-F748-91E8-E76205C06773}" v="7" dt="2026-05-12T04:23:42.416"/>
+    <p1510:client id="{E5AD1E4E-F8E9-F748-91E8-E76205C06773}" v="25" dt="2026-05-14T19:45:40.669"/>
   </p1510:revLst>
 </p1510:revInfo>
 </file>
@@ -130,7 +134,7 @@
   <pc:docChgLst>
     <pc:chgData name="Toby Donaldson" userId="2e6e5431-bb17-4c41-9985-d39c50d83c73" providerId="ADAL" clId="{F31BC264-820E-54C4-A6D1-F92AF9CC222E}"/>
     <pc:docChg chg="undo custSel addSld delSld modSld">
-      <pc:chgData name="Toby Donaldson" userId="2e6e5431-bb17-4c41-9985-d39c50d83c73" providerId="ADAL" clId="{F31BC264-820E-54C4-A6D1-F92AF9CC222E}" dt="2026-05-12T04:25:55.058" v="1143" actId="20577"/>
+      <pc:chgData name="Toby Donaldson" userId="2e6e5431-bb17-4c41-9985-d39c50d83c73" providerId="ADAL" clId="{F31BC264-820E-54C4-A6D1-F92AF9CC222E}" dt="2026-05-14T19:45:40.666" v="1492"/>
       <pc:docMkLst>
         <pc:docMk/>
       </pc:docMkLst>
@@ -150,13 +154,13 @@
         </pc:spChg>
       </pc:sldChg>
       <pc:sldChg chg="addSp modSp mod">
-        <pc:chgData name="Toby Donaldson" userId="2e6e5431-bb17-4c41-9985-d39c50d83c73" providerId="ADAL" clId="{F31BC264-820E-54C4-A6D1-F92AF9CC222E}" dt="2026-05-12T04:16:14.061" v="772" actId="1076"/>
+        <pc:chgData name="Toby Donaldson" userId="2e6e5431-bb17-4c41-9985-d39c50d83c73" providerId="ADAL" clId="{F31BC264-820E-54C4-A6D1-F92AF9CC222E}" dt="2026-05-14T19:45:40.666" v="1492"/>
         <pc:sldMkLst>
           <pc:docMk/>
           <pc:sldMk cId="3882066604" sldId="257"/>
         </pc:sldMkLst>
         <pc:spChg chg="mod">
-          <ac:chgData name="Toby Donaldson" userId="2e6e5431-bb17-4c41-9985-d39c50d83c73" providerId="ADAL" clId="{F31BC264-820E-54C4-A6D1-F92AF9CC222E}" dt="2026-05-12T04:16:05.362" v="769" actId="5793"/>
+          <ac:chgData name="Toby Donaldson" userId="2e6e5431-bb17-4c41-9985-d39c50d83c73" providerId="ADAL" clId="{F31BC264-820E-54C4-A6D1-F92AF9CC222E}" dt="2026-05-14T17:12:22.686" v="1208" actId="20577"/>
           <ac:spMkLst>
             <pc:docMk/>
             <pc:sldMk cId="3882066604" sldId="257"/>
@@ -171,72 +175,23 @@
             <ac:picMk id="4" creationId="{A0A8AE06-75AA-D205-F724-3C61C2173114}"/>
           </ac:picMkLst>
         </pc:picChg>
-      </pc:sldChg>
-      <pc:sldChg chg="del">
-        <pc:chgData name="Toby Donaldson" userId="2e6e5431-bb17-4c41-9985-d39c50d83c73" providerId="ADAL" clId="{F31BC264-820E-54C4-A6D1-F92AF9CC222E}" dt="2026-05-12T04:11:14.066" v="46" actId="2696"/>
-        <pc:sldMkLst>
-          <pc:docMk/>
-          <pc:sldMk cId="2285235809" sldId="258"/>
-        </pc:sldMkLst>
-      </pc:sldChg>
-      <pc:sldChg chg="del">
-        <pc:chgData name="Toby Donaldson" userId="2e6e5431-bb17-4c41-9985-d39c50d83c73" providerId="ADAL" clId="{F31BC264-820E-54C4-A6D1-F92AF9CC222E}" dt="2026-05-12T04:11:14.066" v="46" actId="2696"/>
-        <pc:sldMkLst>
-          <pc:docMk/>
-          <pc:sldMk cId="2983885050" sldId="259"/>
-        </pc:sldMkLst>
-      </pc:sldChg>
-      <pc:sldChg chg="del">
-        <pc:chgData name="Toby Donaldson" userId="2e6e5431-bb17-4c41-9985-d39c50d83c73" providerId="ADAL" clId="{F31BC264-820E-54C4-A6D1-F92AF9CC222E}" dt="2026-05-12T04:11:14.066" v="46" actId="2696"/>
-        <pc:sldMkLst>
-          <pc:docMk/>
-          <pc:sldMk cId="3378692664" sldId="260"/>
-        </pc:sldMkLst>
-      </pc:sldChg>
-      <pc:sldChg chg="del">
-        <pc:chgData name="Toby Donaldson" userId="2e6e5431-bb17-4c41-9985-d39c50d83c73" providerId="ADAL" clId="{F31BC264-820E-54C4-A6D1-F92AF9CC222E}" dt="2026-05-12T04:24:47.728" v="1066" actId="2696"/>
-        <pc:sldMkLst>
-          <pc:docMk/>
-          <pc:sldMk cId="3079706127" sldId="261"/>
-        </pc:sldMkLst>
-      </pc:sldChg>
-      <pc:sldChg chg="del">
-        <pc:chgData name="Toby Donaldson" userId="2e6e5431-bb17-4c41-9985-d39c50d83c73" providerId="ADAL" clId="{F31BC264-820E-54C4-A6D1-F92AF9CC222E}" dt="2026-05-12T04:24:52.654" v="1067" actId="2696"/>
-        <pc:sldMkLst>
-          <pc:docMk/>
-          <pc:sldMk cId="570944480" sldId="262"/>
-        </pc:sldMkLst>
-      </pc:sldChg>
-      <pc:sldChg chg="delSp add del mod">
-        <pc:chgData name="Toby Donaldson" userId="2e6e5431-bb17-4c41-9985-d39c50d83c73" providerId="ADAL" clId="{F31BC264-820E-54C4-A6D1-F92AF9CC222E}" dt="2026-05-12T04:18:52.872" v="790" actId="2696"/>
-        <pc:sldMkLst>
-          <pc:docMk/>
-          <pc:sldMk cId="442348613" sldId="263"/>
-        </pc:sldMkLst>
-        <pc:picChg chg="del">
-          <ac:chgData name="Toby Donaldson" userId="2e6e5431-bb17-4c41-9985-d39c50d83c73" providerId="ADAL" clId="{F31BC264-820E-54C4-A6D1-F92AF9CC222E}" dt="2026-05-12T04:16:49.106" v="773" actId="21"/>
-          <ac:picMkLst>
+        <pc:inkChg chg="add">
+          <ac:chgData name="Toby Donaldson" userId="2e6e5431-bb17-4c41-9985-d39c50d83c73" providerId="ADAL" clId="{F31BC264-820E-54C4-A6D1-F92AF9CC222E}" dt="2026-05-14T19:45:40.666" v="1492"/>
+          <ac:inkMkLst>
             <pc:docMk/>
-            <pc:sldMk cId="442348613" sldId="263"/>
-            <ac:picMk id="4" creationId="{D9F562A4-D8C5-BAC2-AE7A-D7E31587454D}"/>
-          </ac:picMkLst>
-        </pc:picChg>
-      </pc:sldChg>
-      <pc:sldChg chg="del">
-        <pc:chgData name="Toby Donaldson" userId="2e6e5431-bb17-4c41-9985-d39c50d83c73" providerId="ADAL" clId="{F31BC264-820E-54C4-A6D1-F92AF9CC222E}" dt="2026-05-12T04:11:24.648" v="47" actId="2696"/>
-        <pc:sldMkLst>
-          <pc:docMk/>
-          <pc:sldMk cId="1725074489" sldId="263"/>
-        </pc:sldMkLst>
+            <pc:sldMk cId="3882066604" sldId="257"/>
+            <ac:inkMk id="5" creationId="{82DCB664-DACE-DAFA-73E9-AE55A4E99199}"/>
+          </ac:inkMkLst>
+        </pc:inkChg>
       </pc:sldChg>
       <pc:sldChg chg="modSp add mod">
-        <pc:chgData name="Toby Donaldson" userId="2e6e5431-bb17-4c41-9985-d39c50d83c73" providerId="ADAL" clId="{F31BC264-820E-54C4-A6D1-F92AF9CC222E}" dt="2026-05-12T04:18:18.698" v="784" actId="1076"/>
+        <pc:chgData name="Toby Donaldson" userId="2e6e5431-bb17-4c41-9985-d39c50d83c73" providerId="ADAL" clId="{F31BC264-820E-54C4-A6D1-F92AF9CC222E}" dt="2026-05-14T17:12:52.936" v="1221" actId="20577"/>
         <pc:sldMkLst>
           <pc:docMk/>
           <pc:sldMk cId="1733842555" sldId="264"/>
         </pc:sldMkLst>
         <pc:spChg chg="mod">
-          <ac:chgData name="Toby Donaldson" userId="2e6e5431-bb17-4c41-9985-d39c50d83c73" providerId="ADAL" clId="{F31BC264-820E-54C4-A6D1-F92AF9CC222E}" dt="2026-05-12T04:18:13.799" v="783" actId="15"/>
+          <ac:chgData name="Toby Donaldson" userId="2e6e5431-bb17-4c41-9985-d39c50d83c73" providerId="ADAL" clId="{F31BC264-820E-54C4-A6D1-F92AF9CC222E}" dt="2026-05-14T17:12:52.936" v="1221" actId="20577"/>
           <ac:spMkLst>
             <pc:docMk/>
             <pc:sldMk cId="1733842555" sldId="264"/>
@@ -253,13 +208,13 @@
         </pc:picChg>
       </pc:sldChg>
       <pc:sldChg chg="modSp add mod">
-        <pc:chgData name="Toby Donaldson" userId="2e6e5431-bb17-4c41-9985-d39c50d83c73" providerId="ADAL" clId="{F31BC264-820E-54C4-A6D1-F92AF9CC222E}" dt="2026-05-12T04:18:23.575" v="785" actId="1076"/>
+        <pc:chgData name="Toby Donaldson" userId="2e6e5431-bb17-4c41-9985-d39c50d83c73" providerId="ADAL" clId="{F31BC264-820E-54C4-A6D1-F92AF9CC222E}" dt="2026-05-14T17:13:27.786" v="1224" actId="20577"/>
         <pc:sldMkLst>
           <pc:docMk/>
           <pc:sldMk cId="1296688851" sldId="265"/>
         </pc:sldMkLst>
         <pc:spChg chg="mod">
-          <ac:chgData name="Toby Donaldson" userId="2e6e5431-bb17-4c41-9985-d39c50d83c73" providerId="ADAL" clId="{F31BC264-820E-54C4-A6D1-F92AF9CC222E}" dt="2026-05-12T04:18:03.052" v="782" actId="12"/>
+          <ac:chgData name="Toby Donaldson" userId="2e6e5431-bb17-4c41-9985-d39c50d83c73" providerId="ADAL" clId="{F31BC264-820E-54C4-A6D1-F92AF9CC222E}" dt="2026-05-14T17:13:27.786" v="1224" actId="20577"/>
           <ac:spMkLst>
             <pc:docMk/>
             <pc:sldMk cId="1296688851" sldId="265"/>
@@ -276,49 +231,17 @@
         </pc:picChg>
       </pc:sldChg>
       <pc:sldChg chg="addSp delSp modSp add mod">
-        <pc:chgData name="Toby Donaldson" userId="2e6e5431-bb17-4c41-9985-d39c50d83c73" providerId="ADAL" clId="{F31BC264-820E-54C4-A6D1-F92AF9CC222E}" dt="2026-05-12T04:24:27.661" v="1065" actId="1076"/>
+        <pc:chgData name="Toby Donaldson" userId="2e6e5431-bb17-4c41-9985-d39c50d83c73" providerId="ADAL" clId="{F31BC264-820E-54C4-A6D1-F92AF9CC222E}" dt="2026-05-14T19:45:40.666" v="1492"/>
         <pc:sldMkLst>
           <pc:docMk/>
           <pc:sldMk cId="1505878644" sldId="266"/>
         </pc:sldMkLst>
-        <pc:spChg chg="del">
-          <ac:chgData name="Toby Donaldson" userId="2e6e5431-bb17-4c41-9985-d39c50d83c73" providerId="ADAL" clId="{F31BC264-820E-54C4-A6D1-F92AF9CC222E}" dt="2026-05-12T04:20:09.136" v="856" actId="21"/>
-          <ac:spMkLst>
-            <pc:docMk/>
-            <pc:sldMk cId="1505878644" sldId="266"/>
-            <ac:spMk id="2" creationId="{72AC1E66-A9A5-32B4-7E3B-C86D8CDE8666}"/>
-          </ac:spMkLst>
-        </pc:spChg>
-        <pc:spChg chg="del">
-          <ac:chgData name="Toby Donaldson" userId="2e6e5431-bb17-4c41-9985-d39c50d83c73" providerId="ADAL" clId="{F31BC264-820E-54C4-A6D1-F92AF9CC222E}" dt="2026-05-12T04:18:44.144" v="787" actId="21"/>
-          <ac:spMkLst>
-            <pc:docMk/>
-            <pc:sldMk cId="1505878644" sldId="266"/>
-            <ac:spMk id="3" creationId="{9DF4E3A5-F4BA-3CFF-016C-A01646AE86BA}"/>
-          </ac:spMkLst>
-        </pc:spChg>
-        <pc:spChg chg="add del mod">
-          <ac:chgData name="Toby Donaldson" userId="2e6e5431-bb17-4c41-9985-d39c50d83c73" providerId="ADAL" clId="{F31BC264-820E-54C4-A6D1-F92AF9CC222E}" dt="2026-05-12T04:18:46.250" v="788" actId="21"/>
-          <ac:spMkLst>
-            <pc:docMk/>
-            <pc:sldMk cId="1505878644" sldId="266"/>
-            <ac:spMk id="6" creationId="{0985E3F3-2D5E-AE7A-3F7C-1200A5C0169F}"/>
-          </ac:spMkLst>
-        </pc:spChg>
         <pc:spChg chg="add mod">
           <ac:chgData name="Toby Donaldson" userId="2e6e5431-bb17-4c41-9985-d39c50d83c73" providerId="ADAL" clId="{F31BC264-820E-54C4-A6D1-F92AF9CC222E}" dt="2026-05-12T04:22:20.997" v="937" actId="1076"/>
           <ac:spMkLst>
             <pc:docMk/>
             <pc:sldMk cId="1505878644" sldId="266"/>
             <ac:spMk id="7" creationId="{8122EFDC-343D-34E3-4E0A-F0FB9181472C}"/>
-          </ac:spMkLst>
-        </pc:spChg>
-        <pc:spChg chg="add del mod">
-          <ac:chgData name="Toby Donaldson" userId="2e6e5431-bb17-4c41-9985-d39c50d83c73" providerId="ADAL" clId="{F31BC264-820E-54C4-A6D1-F92AF9CC222E}" dt="2026-05-12T04:20:12.358" v="857" actId="21"/>
-          <ac:spMkLst>
-            <pc:docMk/>
-            <pc:sldMk cId="1505878644" sldId="266"/>
-            <ac:spMk id="12" creationId="{97C4A69D-1636-5B58-2D07-733CDCDAB647}"/>
           </ac:spMkLst>
         </pc:spChg>
         <pc:spChg chg="add mod">
@@ -353,23 +276,23 @@
             <ac:picMk id="4" creationId="{CB5B2C65-AD01-A7BC-1BC9-B9F3881ACD15}"/>
           </ac:picMkLst>
         </pc:picChg>
-        <pc:cxnChg chg="add del mod">
-          <ac:chgData name="Toby Donaldson" userId="2e6e5431-bb17-4c41-9985-d39c50d83c73" providerId="ADAL" clId="{F31BC264-820E-54C4-A6D1-F92AF9CC222E}" dt="2026-05-12T04:19:50.297" v="852" actId="21"/>
-          <ac:cxnSpMkLst>
+        <pc:inkChg chg="add">
+          <ac:chgData name="Toby Donaldson" userId="2e6e5431-bb17-4c41-9985-d39c50d83c73" providerId="ADAL" clId="{F31BC264-820E-54C4-A6D1-F92AF9CC222E}" dt="2026-05-14T19:45:40.666" v="1492"/>
+          <ac:inkMkLst>
             <pc:docMk/>
             <pc:sldMk cId="1505878644" sldId="266"/>
-            <ac:cxnSpMk id="8" creationId="{38B95EC0-7419-A6F9-DD44-308E0E3E05BA}"/>
-          </ac:cxnSpMkLst>
-        </pc:cxnChg>
+            <ac:inkMk id="2" creationId="{96DA8BE1-1606-94F7-13AA-2815E86A51D7}"/>
+          </ac:inkMkLst>
+        </pc:inkChg>
       </pc:sldChg>
       <pc:sldChg chg="modSp new mod">
-        <pc:chgData name="Toby Donaldson" userId="2e6e5431-bb17-4c41-9985-d39c50d83c73" providerId="ADAL" clId="{F31BC264-820E-54C4-A6D1-F92AF9CC222E}" dt="2026-05-12T04:25:55.058" v="1143" actId="20577"/>
+        <pc:chgData name="Toby Donaldson" userId="2e6e5431-bb17-4c41-9985-d39c50d83c73" providerId="ADAL" clId="{F31BC264-820E-54C4-A6D1-F92AF9CC222E}" dt="2026-05-12T05:01:19.816" v="1201" actId="5793"/>
         <pc:sldMkLst>
           <pc:docMk/>
           <pc:sldMk cId="1400040307" sldId="267"/>
         </pc:sldMkLst>
         <pc:spChg chg="mod">
-          <ac:chgData name="Toby Donaldson" userId="2e6e5431-bb17-4c41-9985-d39c50d83c73" providerId="ADAL" clId="{F31BC264-820E-54C4-A6D1-F92AF9CC222E}" dt="2026-05-12T04:25:33.040" v="1090" actId="20577"/>
+          <ac:chgData name="Toby Donaldson" userId="2e6e5431-bb17-4c41-9985-d39c50d83c73" providerId="ADAL" clId="{F31BC264-820E-54C4-A6D1-F92AF9CC222E}" dt="2026-05-12T05:01:05.995" v="1144" actId="20577"/>
           <ac:spMkLst>
             <pc:docMk/>
             <pc:sldMk cId="1400040307" sldId="267"/>
@@ -377,7 +300,7 @@
           </ac:spMkLst>
         </pc:spChg>
         <pc:spChg chg="mod">
-          <ac:chgData name="Toby Donaldson" userId="2e6e5431-bb17-4c41-9985-d39c50d83c73" providerId="ADAL" clId="{F31BC264-820E-54C4-A6D1-F92AF9CC222E}" dt="2026-05-12T04:25:55.058" v="1143" actId="20577"/>
+          <ac:chgData name="Toby Donaldson" userId="2e6e5431-bb17-4c41-9985-d39c50d83c73" providerId="ADAL" clId="{F31BC264-820E-54C4-A6D1-F92AF9CC222E}" dt="2026-05-12T05:01:19.816" v="1201" actId="5793"/>
           <ac:spMkLst>
             <pc:docMk/>
             <pc:sldMk cId="1400040307" sldId="267"/>
@@ -385,9 +308,713 @@
           </ac:spMkLst>
         </pc:spChg>
       </pc:sldChg>
+      <pc:sldChg chg="addSp delSp modSp add del mod">
+        <pc:chgData name="Toby Donaldson" userId="2e6e5431-bb17-4c41-9985-d39c50d83c73" providerId="ADAL" clId="{F31BC264-820E-54C4-A6D1-F92AF9CC222E}" dt="2026-05-14T17:25:02.142" v="1342" actId="2696"/>
+        <pc:sldMkLst>
+          <pc:docMk/>
+          <pc:sldMk cId="1947008678" sldId="268"/>
+        </pc:sldMkLst>
+        <pc:spChg chg="add del mod">
+          <ac:chgData name="Toby Donaldson" userId="2e6e5431-bb17-4c41-9985-d39c50d83c73" providerId="ADAL" clId="{F31BC264-820E-54C4-A6D1-F92AF9CC222E}" dt="2026-05-14T17:16:12.829" v="1237" actId="11529"/>
+          <ac:spMkLst>
+            <pc:docMk/>
+            <pc:sldMk cId="1947008678" sldId="268"/>
+            <ac:spMk id="10" creationId="{48D42095-9470-F996-5C31-ADABC0D1751D}"/>
+          </ac:spMkLst>
+        </pc:spChg>
+        <pc:spChg chg="add mod">
+          <ac:chgData name="Toby Donaldson" userId="2e6e5431-bb17-4c41-9985-d39c50d83c73" providerId="ADAL" clId="{F31BC264-820E-54C4-A6D1-F92AF9CC222E}" dt="2026-05-14T17:16:41.376" v="1240" actId="1076"/>
+          <ac:spMkLst>
+            <pc:docMk/>
+            <pc:sldMk cId="1947008678" sldId="268"/>
+            <ac:spMk id="11" creationId="{44E7031C-C9E6-C8B0-EA57-7896F719F52E}"/>
+          </ac:spMkLst>
+        </pc:spChg>
+        <pc:spChg chg="add mod">
+          <ac:chgData name="Toby Donaldson" userId="2e6e5431-bb17-4c41-9985-d39c50d83c73" providerId="ADAL" clId="{F31BC264-820E-54C4-A6D1-F92AF9CC222E}" dt="2026-05-14T17:18:10.569" v="1258" actId="12789"/>
+          <ac:spMkLst>
+            <pc:docMk/>
+            <pc:sldMk cId="1947008678" sldId="268"/>
+            <ac:spMk id="14" creationId="{92051D5B-5CA1-D2E3-A3E5-B94D9D60F9C0}"/>
+          </ac:spMkLst>
+        </pc:spChg>
+        <pc:spChg chg="add mod">
+          <ac:chgData name="Toby Donaldson" userId="2e6e5431-bb17-4c41-9985-d39c50d83c73" providerId="ADAL" clId="{F31BC264-820E-54C4-A6D1-F92AF9CC222E}" dt="2026-05-14T17:18:10.569" v="1258" actId="12789"/>
+          <ac:spMkLst>
+            <pc:docMk/>
+            <pc:sldMk cId="1947008678" sldId="268"/>
+            <ac:spMk id="15" creationId="{85E80152-F869-EF5F-1777-E524B9339A68}"/>
+          </ac:spMkLst>
+        </pc:spChg>
+        <pc:spChg chg="mod">
+          <ac:chgData name="Toby Donaldson" userId="2e6e5431-bb17-4c41-9985-d39c50d83c73" providerId="ADAL" clId="{F31BC264-820E-54C4-A6D1-F92AF9CC222E}" dt="2026-05-14T17:19:10.351" v="1272" actId="408"/>
+          <ac:spMkLst>
+            <pc:docMk/>
+            <pc:sldMk cId="1947008678" sldId="268"/>
+            <ac:spMk id="18" creationId="{E0D0853E-A0C7-A93C-01C5-9F2D036B3F36}"/>
+          </ac:spMkLst>
+        </pc:spChg>
+        <pc:spChg chg="mod">
+          <ac:chgData name="Toby Donaldson" userId="2e6e5431-bb17-4c41-9985-d39c50d83c73" providerId="ADAL" clId="{F31BC264-820E-54C4-A6D1-F92AF9CC222E}" dt="2026-05-14T17:19:24.094" v="1276" actId="20577"/>
+          <ac:spMkLst>
+            <pc:docMk/>
+            <pc:sldMk cId="1947008678" sldId="268"/>
+            <ac:spMk id="19" creationId="{29D3E90E-EEEB-A9B4-CCE0-CBF4DEF62A9C}"/>
+          </ac:spMkLst>
+        </pc:spChg>
+        <pc:spChg chg="mod">
+          <ac:chgData name="Toby Donaldson" userId="2e6e5431-bb17-4c41-9985-d39c50d83c73" providerId="ADAL" clId="{F31BC264-820E-54C4-A6D1-F92AF9CC222E}" dt="2026-05-14T17:19:10.351" v="1272" actId="408"/>
+          <ac:spMkLst>
+            <pc:docMk/>
+            <pc:sldMk cId="1947008678" sldId="268"/>
+            <ac:spMk id="21" creationId="{D1280B1E-E066-9E07-1AF2-5DDD7A0DABDA}"/>
+          </ac:spMkLst>
+        </pc:spChg>
+        <pc:spChg chg="mod">
+          <ac:chgData name="Toby Donaldson" userId="2e6e5431-bb17-4c41-9985-d39c50d83c73" providerId="ADAL" clId="{F31BC264-820E-54C4-A6D1-F92AF9CC222E}" dt="2026-05-14T17:19:27.539" v="1279" actId="20577"/>
+          <ac:spMkLst>
+            <pc:docMk/>
+            <pc:sldMk cId="1947008678" sldId="268"/>
+            <ac:spMk id="22" creationId="{29D59EA5-CB0D-9422-FAC4-A4B11F71656A}"/>
+          </ac:spMkLst>
+        </pc:spChg>
+        <pc:spChg chg="mod">
+          <ac:chgData name="Toby Donaldson" userId="2e6e5431-bb17-4c41-9985-d39c50d83c73" providerId="ADAL" clId="{F31BC264-820E-54C4-A6D1-F92AF9CC222E}" dt="2026-05-14T17:19:10.351" v="1272" actId="408"/>
+          <ac:spMkLst>
+            <pc:docMk/>
+            <pc:sldMk cId="1947008678" sldId="268"/>
+            <ac:spMk id="24" creationId="{7D11DEB9-EFD3-767A-BCE6-0642E051EA29}"/>
+          </ac:spMkLst>
+        </pc:spChg>
+        <pc:spChg chg="mod">
+          <ac:chgData name="Toby Donaldson" userId="2e6e5431-bb17-4c41-9985-d39c50d83c73" providerId="ADAL" clId="{F31BC264-820E-54C4-A6D1-F92AF9CC222E}" dt="2026-05-14T17:19:34.558" v="1282" actId="20577"/>
+          <ac:spMkLst>
+            <pc:docMk/>
+            <pc:sldMk cId="1947008678" sldId="268"/>
+            <ac:spMk id="25" creationId="{8648637C-6569-CBCD-BFD4-996809D4079F}"/>
+          </ac:spMkLst>
+        </pc:spChg>
+        <pc:spChg chg="mod">
+          <ac:chgData name="Toby Donaldson" userId="2e6e5431-bb17-4c41-9985-d39c50d83c73" providerId="ADAL" clId="{F31BC264-820E-54C4-A6D1-F92AF9CC222E}" dt="2026-05-14T17:19:10.351" v="1272" actId="408"/>
+          <ac:spMkLst>
+            <pc:docMk/>
+            <pc:sldMk cId="1947008678" sldId="268"/>
+            <ac:spMk id="27" creationId="{DF246897-445F-D292-FC64-DF5BB76A0BE1}"/>
+          </ac:spMkLst>
+        </pc:spChg>
+        <pc:spChg chg="mod">
+          <ac:chgData name="Toby Donaldson" userId="2e6e5431-bb17-4c41-9985-d39c50d83c73" providerId="ADAL" clId="{F31BC264-820E-54C4-A6D1-F92AF9CC222E}" dt="2026-05-14T17:19:37.291" v="1285" actId="20577"/>
+          <ac:spMkLst>
+            <pc:docMk/>
+            <pc:sldMk cId="1947008678" sldId="268"/>
+            <ac:spMk id="28" creationId="{659C0FB2-639B-FCB6-3E21-8263BCE17761}"/>
+          </ac:spMkLst>
+        </pc:spChg>
+        <pc:spChg chg="mod">
+          <ac:chgData name="Toby Donaldson" userId="2e6e5431-bb17-4c41-9985-d39c50d83c73" providerId="ADAL" clId="{F31BC264-820E-54C4-A6D1-F92AF9CC222E}" dt="2026-05-14T17:18:49.637" v="1269"/>
+          <ac:spMkLst>
+            <pc:docMk/>
+            <pc:sldMk cId="1947008678" sldId="268"/>
+            <ac:spMk id="30" creationId="{CEEE27BA-5FFF-92FD-97AC-9F542933A658}"/>
+          </ac:spMkLst>
+        </pc:spChg>
+        <pc:spChg chg="mod">
+          <ac:chgData name="Toby Donaldson" userId="2e6e5431-bb17-4c41-9985-d39c50d83c73" providerId="ADAL" clId="{F31BC264-820E-54C4-A6D1-F92AF9CC222E}" dt="2026-05-14T17:19:39.856" v="1288" actId="20577"/>
+          <ac:spMkLst>
+            <pc:docMk/>
+            <pc:sldMk cId="1947008678" sldId="268"/>
+            <ac:spMk id="31" creationId="{F92B5D2C-0CF0-3D5C-1E1A-72BA54A35EAB}"/>
+          </ac:spMkLst>
+        </pc:spChg>
+        <pc:spChg chg="add mod">
+          <ac:chgData name="Toby Donaldson" userId="2e6e5431-bb17-4c41-9985-d39c50d83c73" providerId="ADAL" clId="{F31BC264-820E-54C4-A6D1-F92AF9CC222E}" dt="2026-05-14T17:20:08.340" v="1294" actId="1076"/>
+          <ac:spMkLst>
+            <pc:docMk/>
+            <pc:sldMk cId="1947008678" sldId="268"/>
+            <ac:spMk id="33" creationId="{A4D87B86-E3A2-A9CE-624A-2EA5D2CDBEAA}"/>
+          </ac:spMkLst>
+        </pc:spChg>
+        <pc:grpChg chg="add mod">
+          <ac:chgData name="Toby Donaldson" userId="2e6e5431-bb17-4c41-9985-d39c50d83c73" providerId="ADAL" clId="{F31BC264-820E-54C4-A6D1-F92AF9CC222E}" dt="2026-05-14T17:19:04.921" v="1271" actId="12789"/>
+          <ac:grpSpMkLst>
+            <pc:docMk/>
+            <pc:sldMk cId="1947008678" sldId="268"/>
+            <ac:grpSpMk id="16" creationId="{B3292CDE-C1F9-7AA1-9989-2FC06E65AE79}"/>
+          </ac:grpSpMkLst>
+        </pc:grpChg>
+        <pc:grpChg chg="add mod">
+          <ac:chgData name="Toby Donaldson" userId="2e6e5431-bb17-4c41-9985-d39c50d83c73" providerId="ADAL" clId="{F31BC264-820E-54C4-A6D1-F92AF9CC222E}" dt="2026-05-14T17:19:04.921" v="1271" actId="12789"/>
+          <ac:grpSpMkLst>
+            <pc:docMk/>
+            <pc:sldMk cId="1947008678" sldId="268"/>
+            <ac:grpSpMk id="17" creationId="{83D80A13-9778-4E27-263A-6E6ECA82A540}"/>
+          </ac:grpSpMkLst>
+        </pc:grpChg>
+        <pc:grpChg chg="add mod">
+          <ac:chgData name="Toby Donaldson" userId="2e6e5431-bb17-4c41-9985-d39c50d83c73" providerId="ADAL" clId="{F31BC264-820E-54C4-A6D1-F92AF9CC222E}" dt="2026-05-14T17:19:04.921" v="1271" actId="12789"/>
+          <ac:grpSpMkLst>
+            <pc:docMk/>
+            <pc:sldMk cId="1947008678" sldId="268"/>
+            <ac:grpSpMk id="20" creationId="{58F0E828-D7B9-0ADF-4FDC-62B0D8BED4CC}"/>
+          </ac:grpSpMkLst>
+        </pc:grpChg>
+        <pc:grpChg chg="add mod">
+          <ac:chgData name="Toby Donaldson" userId="2e6e5431-bb17-4c41-9985-d39c50d83c73" providerId="ADAL" clId="{F31BC264-820E-54C4-A6D1-F92AF9CC222E}" dt="2026-05-14T17:19:10.351" v="1272" actId="408"/>
+          <ac:grpSpMkLst>
+            <pc:docMk/>
+            <pc:sldMk cId="1947008678" sldId="268"/>
+            <ac:grpSpMk id="23" creationId="{5B2BFD2F-D1D4-3FF8-5723-53226F70FFED}"/>
+          </ac:grpSpMkLst>
+        </pc:grpChg>
+        <pc:grpChg chg="add mod">
+          <ac:chgData name="Toby Donaldson" userId="2e6e5431-bb17-4c41-9985-d39c50d83c73" providerId="ADAL" clId="{F31BC264-820E-54C4-A6D1-F92AF9CC222E}" dt="2026-05-14T17:19:04.921" v="1271" actId="12789"/>
+          <ac:grpSpMkLst>
+            <pc:docMk/>
+            <pc:sldMk cId="1947008678" sldId="268"/>
+            <ac:grpSpMk id="26" creationId="{3BE89DE9-CCBA-5F34-9512-4B6EA323AE81}"/>
+          </ac:grpSpMkLst>
+        </pc:grpChg>
+        <pc:grpChg chg="add mod">
+          <ac:chgData name="Toby Donaldson" userId="2e6e5431-bb17-4c41-9985-d39c50d83c73" providerId="ADAL" clId="{F31BC264-820E-54C4-A6D1-F92AF9CC222E}" dt="2026-05-14T17:19:10.351" v="1272" actId="408"/>
+          <ac:grpSpMkLst>
+            <pc:docMk/>
+            <pc:sldMk cId="1947008678" sldId="268"/>
+            <ac:grpSpMk id="29" creationId="{BCDD5206-4323-4711-026B-E839789E6B13}"/>
+          </ac:grpSpMkLst>
+        </pc:grpChg>
+        <pc:grpChg chg="add">
+          <ac:chgData name="Toby Donaldson" userId="2e6e5431-bb17-4c41-9985-d39c50d83c73" providerId="ADAL" clId="{F31BC264-820E-54C4-A6D1-F92AF9CC222E}" dt="2026-05-14T17:19:20.133" v="1273" actId="164"/>
+          <ac:grpSpMkLst>
+            <pc:docMk/>
+            <pc:sldMk cId="1947008678" sldId="268"/>
+            <ac:grpSpMk id="32" creationId="{AD05B642-C4CC-6FCE-EB25-9A9C5414F958}"/>
+          </ac:grpSpMkLst>
+        </pc:grpChg>
+        <pc:picChg chg="mod">
+          <ac:chgData name="Toby Donaldson" userId="2e6e5431-bb17-4c41-9985-d39c50d83c73" providerId="ADAL" clId="{F31BC264-820E-54C4-A6D1-F92AF9CC222E}" dt="2026-05-14T17:14:59.790" v="1227" actId="1076"/>
+          <ac:picMkLst>
+            <pc:docMk/>
+            <pc:sldMk cId="1947008678" sldId="268"/>
+            <ac:picMk id="4" creationId="{E2237655-4067-54CF-E3B2-59AA7503D142}"/>
+          </ac:picMkLst>
+        </pc:picChg>
+        <pc:cxnChg chg="add mod">
+          <ac:chgData name="Toby Donaldson" userId="2e6e5431-bb17-4c41-9985-d39c50d83c73" providerId="ADAL" clId="{F31BC264-820E-54C4-A6D1-F92AF9CC222E}" dt="2026-05-14T17:15:42.307" v="1233" actId="1076"/>
+          <ac:cxnSpMkLst>
+            <pc:docMk/>
+            <pc:sldMk cId="1947008678" sldId="268"/>
+            <ac:cxnSpMk id="6" creationId="{40FF73E6-D132-4EBE-DBB6-A056655B52B6}"/>
+          </ac:cxnSpMkLst>
+        </pc:cxnChg>
+        <pc:cxnChg chg="add mod">
+          <ac:chgData name="Toby Donaldson" userId="2e6e5431-bb17-4c41-9985-d39c50d83c73" providerId="ADAL" clId="{F31BC264-820E-54C4-A6D1-F92AF9CC222E}" dt="2026-05-14T17:15:37.941" v="1232" actId="14100"/>
+          <ac:cxnSpMkLst>
+            <pc:docMk/>
+            <pc:sldMk cId="1947008678" sldId="268"/>
+            <ac:cxnSpMk id="7" creationId="{9671BFAA-9815-C341-D3A2-EDC1641D7E85}"/>
+          </ac:cxnSpMkLst>
+        </pc:cxnChg>
+        <pc:cxnChg chg="add mod">
+          <ac:chgData name="Toby Donaldson" userId="2e6e5431-bb17-4c41-9985-d39c50d83c73" providerId="ADAL" clId="{F31BC264-820E-54C4-A6D1-F92AF9CC222E}" dt="2026-05-14T17:17:00.140" v="1242" actId="692"/>
+          <ac:cxnSpMkLst>
+            <pc:docMk/>
+            <pc:sldMk cId="1947008678" sldId="268"/>
+            <ac:cxnSpMk id="13" creationId="{0C745CA9-2050-FFF8-68F7-9DB24F4B5B6A}"/>
+          </ac:cxnSpMkLst>
+        </pc:cxnChg>
+      </pc:sldChg>
+      <pc:sldChg chg="add del">
+        <pc:chgData name="Toby Donaldson" userId="2e6e5431-bb17-4c41-9985-d39c50d83c73" providerId="ADAL" clId="{F31BC264-820E-54C4-A6D1-F92AF9CC222E}" dt="2026-05-14T17:25:14.497" v="1343" actId="2696"/>
+        <pc:sldMkLst>
+          <pc:docMk/>
+          <pc:sldMk cId="1679148088" sldId="269"/>
+        </pc:sldMkLst>
+      </pc:sldChg>
+      <pc:sldChg chg="addSp delSp modSp add mod">
+        <pc:chgData name="Toby Donaldson" userId="2e6e5431-bb17-4c41-9985-d39c50d83c73" providerId="ADAL" clId="{F31BC264-820E-54C4-A6D1-F92AF9CC222E}" dt="2026-05-14T17:25:40.190" v="1346" actId="21"/>
+        <pc:sldMkLst>
+          <pc:docMk/>
+          <pc:sldMk cId="1054383362" sldId="270"/>
+        </pc:sldMkLst>
+        <pc:spChg chg="mod">
+          <ac:chgData name="Toby Donaldson" userId="2e6e5431-bb17-4c41-9985-d39c50d83c73" providerId="ADAL" clId="{F31BC264-820E-54C4-A6D1-F92AF9CC222E}" dt="2026-05-14T17:20:58.170" v="1297" actId="1076"/>
+          <ac:spMkLst>
+            <pc:docMk/>
+            <pc:sldMk cId="1054383362" sldId="270"/>
+            <ac:spMk id="2" creationId="{5665F98F-0C99-28B5-4E22-02BF5C6FDF9B}"/>
+          </ac:spMkLst>
+        </pc:spChg>
+        <pc:spChg chg="mod">
+          <ac:chgData name="Toby Donaldson" userId="2e6e5431-bb17-4c41-9985-d39c50d83c73" providerId="ADAL" clId="{F31BC264-820E-54C4-A6D1-F92AF9CC222E}" dt="2026-05-14T17:20:58.170" v="1297" actId="1076"/>
+          <ac:spMkLst>
+            <pc:docMk/>
+            <pc:sldMk cId="1054383362" sldId="270"/>
+            <ac:spMk id="3" creationId="{B3755A2C-AFE5-1DCE-9826-1E09AD66A780}"/>
+          </ac:spMkLst>
+        </pc:spChg>
+        <pc:spChg chg="add del mod">
+          <ac:chgData name="Toby Donaldson" userId="2e6e5431-bb17-4c41-9985-d39c50d83c73" providerId="ADAL" clId="{F31BC264-820E-54C4-A6D1-F92AF9CC222E}" dt="2026-05-14T17:25:35.592" v="1345" actId="21"/>
+          <ac:spMkLst>
+            <pc:docMk/>
+            <pc:sldMk cId="1054383362" sldId="270"/>
+            <ac:spMk id="5" creationId="{96F4267F-8315-917E-2F9B-AE3E55E0A137}"/>
+          </ac:spMkLst>
+        </pc:spChg>
+        <pc:spChg chg="del mod">
+          <ac:chgData name="Toby Donaldson" userId="2e6e5431-bb17-4c41-9985-d39c50d83c73" providerId="ADAL" clId="{F31BC264-820E-54C4-A6D1-F92AF9CC222E}" dt="2026-05-14T17:25:35.592" v="1345" actId="21"/>
+          <ac:spMkLst>
+            <pc:docMk/>
+            <pc:sldMk cId="1054383362" sldId="270"/>
+            <ac:spMk id="11" creationId="{8A30D4C8-6503-4EAC-3E89-10E435E966C7}"/>
+          </ac:spMkLst>
+        </pc:spChg>
+        <pc:spChg chg="del mod">
+          <ac:chgData name="Toby Donaldson" userId="2e6e5431-bb17-4c41-9985-d39c50d83c73" providerId="ADAL" clId="{F31BC264-820E-54C4-A6D1-F92AF9CC222E}" dt="2026-05-14T17:25:35.592" v="1345" actId="21"/>
+          <ac:spMkLst>
+            <pc:docMk/>
+            <pc:sldMk cId="1054383362" sldId="270"/>
+            <ac:spMk id="33" creationId="{3DBB5363-FB1A-B100-0396-BC84D6998F99}"/>
+          </ac:spMkLst>
+        </pc:spChg>
+        <pc:spChg chg="mod">
+          <ac:chgData name="Toby Donaldson" userId="2e6e5431-bb17-4c41-9985-d39c50d83c73" providerId="ADAL" clId="{F31BC264-820E-54C4-A6D1-F92AF9CC222E}" dt="2026-05-14T17:22:17.511" v="1305"/>
+          <ac:spMkLst>
+            <pc:docMk/>
+            <pc:sldMk cId="1054383362" sldId="270"/>
+            <ac:spMk id="37" creationId="{5F8FD57D-D0A1-EE2B-F318-6B8CB0A5011E}"/>
+          </ac:spMkLst>
+        </pc:spChg>
+        <pc:spChg chg="mod">
+          <ac:chgData name="Toby Donaldson" userId="2e6e5431-bb17-4c41-9985-d39c50d83c73" providerId="ADAL" clId="{F31BC264-820E-54C4-A6D1-F92AF9CC222E}" dt="2026-05-14T17:22:17.511" v="1305"/>
+          <ac:spMkLst>
+            <pc:docMk/>
+            <pc:sldMk cId="1054383362" sldId="270"/>
+            <ac:spMk id="38" creationId="{8808B8B4-7BDD-384D-67FA-6A33AA6121DF}"/>
+          </ac:spMkLst>
+        </pc:spChg>
+        <pc:spChg chg="mod">
+          <ac:chgData name="Toby Donaldson" userId="2e6e5431-bb17-4c41-9985-d39c50d83c73" providerId="ADAL" clId="{F31BC264-820E-54C4-A6D1-F92AF9CC222E}" dt="2026-05-14T17:22:17.511" v="1305"/>
+          <ac:spMkLst>
+            <pc:docMk/>
+            <pc:sldMk cId="1054383362" sldId="270"/>
+            <ac:spMk id="40" creationId="{FEBB0F0F-071D-3CC4-528B-6DD999E4DF20}"/>
+          </ac:spMkLst>
+        </pc:spChg>
+        <pc:spChg chg="mod">
+          <ac:chgData name="Toby Donaldson" userId="2e6e5431-bb17-4c41-9985-d39c50d83c73" providerId="ADAL" clId="{F31BC264-820E-54C4-A6D1-F92AF9CC222E}" dt="2026-05-14T17:22:17.511" v="1305"/>
+          <ac:spMkLst>
+            <pc:docMk/>
+            <pc:sldMk cId="1054383362" sldId="270"/>
+            <ac:spMk id="41" creationId="{D14B9B4F-3B0A-3C7B-CC24-9567FEB99926}"/>
+          </ac:spMkLst>
+        </pc:spChg>
+        <pc:spChg chg="mod">
+          <ac:chgData name="Toby Donaldson" userId="2e6e5431-bb17-4c41-9985-d39c50d83c73" providerId="ADAL" clId="{F31BC264-820E-54C4-A6D1-F92AF9CC222E}" dt="2026-05-14T17:23:10.473" v="1326" actId="207"/>
+          <ac:spMkLst>
+            <pc:docMk/>
+            <pc:sldMk cId="1054383362" sldId="270"/>
+            <ac:spMk id="42" creationId="{A47D2738-320A-603A-2D8E-3EC8E19B060B}"/>
+          </ac:spMkLst>
+        </pc:spChg>
+        <pc:spChg chg="mod">
+          <ac:chgData name="Toby Donaldson" userId="2e6e5431-bb17-4c41-9985-d39c50d83c73" providerId="ADAL" clId="{F31BC264-820E-54C4-A6D1-F92AF9CC222E}" dt="2026-05-14T17:22:17.511" v="1305"/>
+          <ac:spMkLst>
+            <pc:docMk/>
+            <pc:sldMk cId="1054383362" sldId="270"/>
+            <ac:spMk id="43" creationId="{2B57170F-E843-CCD3-4E01-DC8494865B5E}"/>
+          </ac:spMkLst>
+        </pc:spChg>
+        <pc:spChg chg="mod">
+          <ac:chgData name="Toby Donaldson" userId="2e6e5431-bb17-4c41-9985-d39c50d83c73" providerId="ADAL" clId="{F31BC264-820E-54C4-A6D1-F92AF9CC222E}" dt="2026-05-14T17:23:14.324" v="1327" actId="207"/>
+          <ac:spMkLst>
+            <pc:docMk/>
+            <pc:sldMk cId="1054383362" sldId="270"/>
+            <ac:spMk id="44" creationId="{39E8677D-3E52-BC2F-E118-4A895039D521}"/>
+          </ac:spMkLst>
+        </pc:spChg>
+        <pc:spChg chg="mod">
+          <ac:chgData name="Toby Donaldson" userId="2e6e5431-bb17-4c41-9985-d39c50d83c73" providerId="ADAL" clId="{F31BC264-820E-54C4-A6D1-F92AF9CC222E}" dt="2026-05-14T17:22:17.511" v="1305"/>
+          <ac:spMkLst>
+            <pc:docMk/>
+            <pc:sldMk cId="1054383362" sldId="270"/>
+            <ac:spMk id="45" creationId="{3AC67708-9D4D-A0A1-F185-F765CA3C015A}"/>
+          </ac:spMkLst>
+        </pc:spChg>
+        <pc:spChg chg="mod">
+          <ac:chgData name="Toby Donaldson" userId="2e6e5431-bb17-4c41-9985-d39c50d83c73" providerId="ADAL" clId="{F31BC264-820E-54C4-A6D1-F92AF9CC222E}" dt="2026-05-14T17:23:16.708" v="1328" actId="207"/>
+          <ac:spMkLst>
+            <pc:docMk/>
+            <pc:sldMk cId="1054383362" sldId="270"/>
+            <ac:spMk id="46" creationId="{B8E12F32-6A23-18E0-0E95-0D10882BEBDF}"/>
+          </ac:spMkLst>
+        </pc:spChg>
+        <pc:spChg chg="mod">
+          <ac:chgData name="Toby Donaldson" userId="2e6e5431-bb17-4c41-9985-d39c50d83c73" providerId="ADAL" clId="{F31BC264-820E-54C4-A6D1-F92AF9CC222E}" dt="2026-05-14T17:22:17.511" v="1305"/>
+          <ac:spMkLst>
+            <pc:docMk/>
+            <pc:sldMk cId="1054383362" sldId="270"/>
+            <ac:spMk id="47" creationId="{375A183A-C0B3-151E-6650-533514D9F107}"/>
+          </ac:spMkLst>
+        </pc:spChg>
+        <pc:spChg chg="mod">
+          <ac:chgData name="Toby Donaldson" userId="2e6e5431-bb17-4c41-9985-d39c50d83c73" providerId="ADAL" clId="{F31BC264-820E-54C4-A6D1-F92AF9CC222E}" dt="2026-05-14T17:23:19.907" v="1329" actId="207"/>
+          <ac:spMkLst>
+            <pc:docMk/>
+            <pc:sldMk cId="1054383362" sldId="270"/>
+            <ac:spMk id="48" creationId="{6F10B9E8-7B9D-5B92-E378-95B866C297E7}"/>
+          </ac:spMkLst>
+        </pc:spChg>
+        <pc:spChg chg="add del mod">
+          <ac:chgData name="Toby Donaldson" userId="2e6e5431-bb17-4c41-9985-d39c50d83c73" providerId="ADAL" clId="{F31BC264-820E-54C4-A6D1-F92AF9CC222E}" dt="2026-05-14T17:25:35.592" v="1345" actId="21"/>
+          <ac:spMkLst>
+            <pc:docMk/>
+            <pc:sldMk cId="1054383362" sldId="270"/>
+            <ac:spMk id="49" creationId="{4E57D7AB-0983-530E-0FF8-EB99F6344EDB}"/>
+          </ac:spMkLst>
+        </pc:spChg>
+        <pc:spChg chg="del mod">
+          <ac:chgData name="Toby Donaldson" userId="2e6e5431-bb17-4c41-9985-d39c50d83c73" providerId="ADAL" clId="{F31BC264-820E-54C4-A6D1-F92AF9CC222E}" dt="2026-05-14T17:25:35.592" v="1345" actId="21"/>
+          <ac:spMkLst>
+            <pc:docMk/>
+            <pc:sldMk cId="1054383362" sldId="270"/>
+            <ac:spMk id="50" creationId="{6A21ED3C-F5EB-3307-EBF1-3EFC383C72CF}"/>
+          </ac:spMkLst>
+        </pc:spChg>
+        <pc:spChg chg="add del mod">
+          <ac:chgData name="Toby Donaldson" userId="2e6e5431-bb17-4c41-9985-d39c50d83c73" providerId="ADAL" clId="{F31BC264-820E-54C4-A6D1-F92AF9CC222E}" dt="2026-05-14T17:25:35.592" v="1345" actId="21"/>
+          <ac:spMkLst>
+            <pc:docMk/>
+            <pc:sldMk cId="1054383362" sldId="270"/>
+            <ac:spMk id="51" creationId="{23F17D11-B72B-3265-D7CA-34952A1461AB}"/>
+          </ac:spMkLst>
+        </pc:spChg>
+        <pc:spChg chg="add del mod">
+          <ac:chgData name="Toby Donaldson" userId="2e6e5431-bb17-4c41-9985-d39c50d83c73" providerId="ADAL" clId="{F31BC264-820E-54C4-A6D1-F92AF9CC222E}" dt="2026-05-14T17:25:35.592" v="1345" actId="21"/>
+          <ac:spMkLst>
+            <pc:docMk/>
+            <pc:sldMk cId="1054383362" sldId="270"/>
+            <ac:spMk id="52" creationId="{96019C5D-CC1C-9BD3-001C-ADAE9B874E17}"/>
+          </ac:spMkLst>
+        </pc:spChg>
+        <pc:spChg chg="add del mod">
+          <ac:chgData name="Toby Donaldson" userId="2e6e5431-bb17-4c41-9985-d39c50d83c73" providerId="ADAL" clId="{F31BC264-820E-54C4-A6D1-F92AF9CC222E}" dt="2026-05-14T17:25:35.592" v="1345" actId="21"/>
+          <ac:spMkLst>
+            <pc:docMk/>
+            <pc:sldMk cId="1054383362" sldId="270"/>
+            <ac:spMk id="53" creationId="{3B7EE4C3-3EC4-B962-F927-119463868832}"/>
+          </ac:spMkLst>
+        </pc:spChg>
+        <pc:grpChg chg="mod">
+          <ac:chgData name="Toby Donaldson" userId="2e6e5431-bb17-4c41-9985-d39c50d83c73" providerId="ADAL" clId="{F31BC264-820E-54C4-A6D1-F92AF9CC222E}" dt="2026-05-14T17:22:22.343" v="1306" actId="1076"/>
+          <ac:grpSpMkLst>
+            <pc:docMk/>
+            <pc:sldMk cId="1054383362" sldId="270"/>
+            <ac:grpSpMk id="8" creationId="{695789D9-8B4A-95E4-DDBA-5285387DC4B4}"/>
+          </ac:grpSpMkLst>
+        </pc:grpChg>
+        <pc:grpChg chg="del mod">
+          <ac:chgData name="Toby Donaldson" userId="2e6e5431-bb17-4c41-9985-d39c50d83c73" providerId="ADAL" clId="{F31BC264-820E-54C4-A6D1-F92AF9CC222E}" dt="2026-05-14T17:25:35.592" v="1345" actId="21"/>
+          <ac:grpSpMkLst>
+            <pc:docMk/>
+            <pc:sldMk cId="1054383362" sldId="270"/>
+            <ac:grpSpMk id="32" creationId="{7C7829CD-5680-B58D-D066-0207BBCDDFE4}"/>
+          </ac:grpSpMkLst>
+        </pc:grpChg>
+        <pc:picChg chg="del mod">
+          <ac:chgData name="Toby Donaldson" userId="2e6e5431-bb17-4c41-9985-d39c50d83c73" providerId="ADAL" clId="{F31BC264-820E-54C4-A6D1-F92AF9CC222E}" dt="2026-05-14T17:25:35.592" v="1345" actId="21"/>
+          <ac:picMkLst>
+            <pc:docMk/>
+            <pc:sldMk cId="1054383362" sldId="270"/>
+            <ac:picMk id="4" creationId="{E74904A2-A4F0-93C6-4419-E6E9C59B7634}"/>
+          </ac:picMkLst>
+        </pc:picChg>
+        <pc:cxnChg chg="del mod">
+          <ac:chgData name="Toby Donaldson" userId="2e6e5431-bb17-4c41-9985-d39c50d83c73" providerId="ADAL" clId="{F31BC264-820E-54C4-A6D1-F92AF9CC222E}" dt="2026-05-14T17:25:40.190" v="1346" actId="21"/>
+          <ac:cxnSpMkLst>
+            <pc:docMk/>
+            <pc:sldMk cId="1054383362" sldId="270"/>
+            <ac:cxnSpMk id="6" creationId="{31BE7AE3-55A9-6E04-0BF1-CC000A328835}"/>
+          </ac:cxnSpMkLst>
+        </pc:cxnChg>
+        <pc:cxnChg chg="del mod">
+          <ac:chgData name="Toby Donaldson" userId="2e6e5431-bb17-4c41-9985-d39c50d83c73" providerId="ADAL" clId="{F31BC264-820E-54C4-A6D1-F92AF9CC222E}" dt="2026-05-14T17:25:40.190" v="1346" actId="21"/>
+          <ac:cxnSpMkLst>
+            <pc:docMk/>
+            <pc:sldMk cId="1054383362" sldId="270"/>
+            <ac:cxnSpMk id="7" creationId="{6D5BA8A3-697D-FE38-E54C-0F2CE8FEEB79}"/>
+          </ac:cxnSpMkLst>
+        </pc:cxnChg>
+        <pc:cxnChg chg="mod">
+          <ac:chgData name="Toby Donaldson" userId="2e6e5431-bb17-4c41-9985-d39c50d83c73" providerId="ADAL" clId="{F31BC264-820E-54C4-A6D1-F92AF9CC222E}" dt="2026-05-14T17:21:13.903" v="1299" actId="1076"/>
+          <ac:cxnSpMkLst>
+            <pc:docMk/>
+            <pc:sldMk cId="1054383362" sldId="270"/>
+            <ac:cxnSpMk id="13" creationId="{DB6BFEA4-5229-C297-110A-30AF8234286E}"/>
+          </ac:cxnSpMkLst>
+        </pc:cxnChg>
+      </pc:sldChg>
+      <pc:sldChg chg="delSp add mod">
+        <pc:chgData name="Toby Donaldson" userId="2e6e5431-bb17-4c41-9985-d39c50d83c73" providerId="ADAL" clId="{F31BC264-820E-54C4-A6D1-F92AF9CC222E}" dt="2026-05-14T17:25:54.363" v="1348" actId="21"/>
+        <pc:sldMkLst>
+          <pc:docMk/>
+          <pc:sldMk cId="3662698123" sldId="271"/>
+        </pc:sldMkLst>
+        <pc:spChg chg="del">
+          <ac:chgData name="Toby Donaldson" userId="2e6e5431-bb17-4c41-9985-d39c50d83c73" providerId="ADAL" clId="{F31BC264-820E-54C4-A6D1-F92AF9CC222E}" dt="2026-05-14T17:25:54.363" v="1348" actId="21"/>
+          <ac:spMkLst>
+            <pc:docMk/>
+            <pc:sldMk cId="3662698123" sldId="271"/>
+            <ac:spMk id="11" creationId="{C4E68108-1C75-1F1F-CE39-A161CE367CC1}"/>
+          </ac:spMkLst>
+        </pc:spChg>
+        <pc:spChg chg="del">
+          <ac:chgData name="Toby Donaldson" userId="2e6e5431-bb17-4c41-9985-d39c50d83c73" providerId="ADAL" clId="{F31BC264-820E-54C4-A6D1-F92AF9CC222E}" dt="2026-05-14T17:25:54.363" v="1348" actId="21"/>
+          <ac:spMkLst>
+            <pc:docMk/>
+            <pc:sldMk cId="3662698123" sldId="271"/>
+            <ac:spMk id="49" creationId="{D76AA185-7A65-51A2-F6E7-4F95B01B6066}"/>
+          </ac:spMkLst>
+        </pc:spChg>
+        <pc:spChg chg="del">
+          <ac:chgData name="Toby Donaldson" userId="2e6e5431-bb17-4c41-9985-d39c50d83c73" providerId="ADAL" clId="{F31BC264-820E-54C4-A6D1-F92AF9CC222E}" dt="2026-05-14T17:25:54.363" v="1348" actId="21"/>
+          <ac:spMkLst>
+            <pc:docMk/>
+            <pc:sldMk cId="3662698123" sldId="271"/>
+            <ac:spMk id="50" creationId="{EFAA3271-579C-1FA4-F0CE-D638B7413156}"/>
+          </ac:spMkLst>
+        </pc:spChg>
+        <pc:spChg chg="del">
+          <ac:chgData name="Toby Donaldson" userId="2e6e5431-bb17-4c41-9985-d39c50d83c73" providerId="ADAL" clId="{F31BC264-820E-54C4-A6D1-F92AF9CC222E}" dt="2026-05-14T17:25:54.363" v="1348" actId="21"/>
+          <ac:spMkLst>
+            <pc:docMk/>
+            <pc:sldMk cId="3662698123" sldId="271"/>
+            <ac:spMk id="51" creationId="{079E6521-2F61-7068-B53E-FD0EBF5101C8}"/>
+          </ac:spMkLst>
+        </pc:spChg>
+        <pc:spChg chg="del">
+          <ac:chgData name="Toby Donaldson" userId="2e6e5431-bb17-4c41-9985-d39c50d83c73" providerId="ADAL" clId="{F31BC264-820E-54C4-A6D1-F92AF9CC222E}" dt="2026-05-14T17:25:54.363" v="1348" actId="21"/>
+          <ac:spMkLst>
+            <pc:docMk/>
+            <pc:sldMk cId="3662698123" sldId="271"/>
+            <ac:spMk id="52" creationId="{7692CBD3-3970-A846-CBE6-5BC75B374111}"/>
+          </ac:spMkLst>
+        </pc:spChg>
+        <pc:spChg chg="del">
+          <ac:chgData name="Toby Donaldson" userId="2e6e5431-bb17-4c41-9985-d39c50d83c73" providerId="ADAL" clId="{F31BC264-820E-54C4-A6D1-F92AF9CC222E}" dt="2026-05-14T17:25:54.363" v="1348" actId="21"/>
+          <ac:spMkLst>
+            <pc:docMk/>
+            <pc:sldMk cId="3662698123" sldId="271"/>
+            <ac:spMk id="53" creationId="{CA5A9FB8-CD74-5CA0-DE23-2D921D0E3D9F}"/>
+          </ac:spMkLst>
+        </pc:spChg>
+        <pc:grpChg chg="del">
+          <ac:chgData name="Toby Donaldson" userId="2e6e5431-bb17-4c41-9985-d39c50d83c73" providerId="ADAL" clId="{F31BC264-820E-54C4-A6D1-F92AF9CC222E}" dt="2026-05-14T17:25:54.363" v="1348" actId="21"/>
+          <ac:grpSpMkLst>
+            <pc:docMk/>
+            <pc:sldMk cId="3662698123" sldId="271"/>
+            <ac:grpSpMk id="8" creationId="{DAB733F2-1136-2FB3-8536-D3414D162C13}"/>
+          </ac:grpSpMkLst>
+        </pc:grpChg>
+        <pc:picChg chg="del">
+          <ac:chgData name="Toby Donaldson" userId="2e6e5431-bb17-4c41-9985-d39c50d83c73" providerId="ADAL" clId="{F31BC264-820E-54C4-A6D1-F92AF9CC222E}" dt="2026-05-14T17:25:54.363" v="1348" actId="21"/>
+          <ac:picMkLst>
+            <pc:docMk/>
+            <pc:sldMk cId="3662698123" sldId="271"/>
+            <ac:picMk id="4" creationId="{3391E10C-FF05-ED86-8DB5-B898A3ED611B}"/>
+          </ac:picMkLst>
+        </pc:picChg>
+        <pc:cxnChg chg="del">
+          <ac:chgData name="Toby Donaldson" userId="2e6e5431-bb17-4c41-9985-d39c50d83c73" providerId="ADAL" clId="{F31BC264-820E-54C4-A6D1-F92AF9CC222E}" dt="2026-05-14T17:25:54.363" v="1348" actId="21"/>
+          <ac:cxnSpMkLst>
+            <pc:docMk/>
+            <pc:sldMk cId="3662698123" sldId="271"/>
+            <ac:cxnSpMk id="6" creationId="{81425CD6-37C5-AAC8-06A9-C0EF37EB18D8}"/>
+          </ac:cxnSpMkLst>
+        </pc:cxnChg>
+        <pc:cxnChg chg="del">
+          <ac:chgData name="Toby Donaldson" userId="2e6e5431-bb17-4c41-9985-d39c50d83c73" providerId="ADAL" clId="{F31BC264-820E-54C4-A6D1-F92AF9CC222E}" dt="2026-05-14T17:25:54.363" v="1348" actId="21"/>
+          <ac:cxnSpMkLst>
+            <pc:docMk/>
+            <pc:sldMk cId="3662698123" sldId="271"/>
+            <ac:cxnSpMk id="7" creationId="{0F30E0AB-7A73-9633-7694-D17C243CC880}"/>
+          </ac:cxnSpMkLst>
+        </pc:cxnChg>
+      </pc:sldChg>
+      <pc:sldChg chg="addSp delSp modSp add mod">
+        <pc:chgData name="Toby Donaldson" userId="2e6e5431-bb17-4c41-9985-d39c50d83c73" providerId="ADAL" clId="{F31BC264-820E-54C4-A6D1-F92AF9CC222E}" dt="2026-05-14T18:55:53.722" v="1490" actId="1076"/>
+        <pc:sldMkLst>
+          <pc:docMk/>
+          <pc:sldMk cId="1354175082" sldId="272"/>
+        </pc:sldMkLst>
+        <pc:spChg chg="del">
+          <ac:chgData name="Toby Donaldson" userId="2e6e5431-bb17-4c41-9985-d39c50d83c73" providerId="ADAL" clId="{F31BC264-820E-54C4-A6D1-F92AF9CC222E}" dt="2026-05-14T17:26:15.541" v="1350" actId="21"/>
+          <ac:spMkLst>
+            <pc:docMk/>
+            <pc:sldMk cId="1354175082" sldId="272"/>
+            <ac:spMk id="11" creationId="{BC9A9EE6-95A2-4302-5CCE-ED5D8771501E}"/>
+          </ac:spMkLst>
+        </pc:spChg>
+        <pc:spChg chg="add mod">
+          <ac:chgData name="Toby Donaldson" userId="2e6e5431-bb17-4c41-9985-d39c50d83c73" providerId="ADAL" clId="{F31BC264-820E-54C4-A6D1-F92AF9CC222E}" dt="2026-05-14T18:54:56.295" v="1480" actId="20577"/>
+          <ac:spMkLst>
+            <pc:docMk/>
+            <pc:sldMk cId="1354175082" sldId="272"/>
+            <ac:spMk id="54" creationId="{73C7FB9F-EA28-19B3-15E0-8AFD8C386781}"/>
+          </ac:spMkLst>
+        </pc:spChg>
+        <pc:grpChg chg="add mod">
+          <ac:chgData name="Toby Donaldson" userId="2e6e5431-bb17-4c41-9985-d39c50d83c73" providerId="ADAL" clId="{F31BC264-820E-54C4-A6D1-F92AF9CC222E}" dt="2026-05-14T18:55:53.722" v="1490" actId="1076"/>
+          <ac:grpSpMkLst>
+            <pc:docMk/>
+            <pc:sldMk cId="1354175082" sldId="272"/>
+            <ac:grpSpMk id="57" creationId="{AE8A40D8-07F9-6B76-6664-F0DBF03DAB4A}"/>
+          </ac:grpSpMkLst>
+        </pc:grpChg>
+        <pc:picChg chg="del">
+          <ac:chgData name="Toby Donaldson" userId="2e6e5431-bb17-4c41-9985-d39c50d83c73" providerId="ADAL" clId="{F31BC264-820E-54C4-A6D1-F92AF9CC222E}" dt="2026-05-14T17:26:15.541" v="1350" actId="21"/>
+          <ac:picMkLst>
+            <pc:docMk/>
+            <pc:sldMk cId="1354175082" sldId="272"/>
+            <ac:picMk id="4" creationId="{90A818FD-652E-A7F6-CFF2-DEFFC6F8F06D}"/>
+          </ac:picMkLst>
+        </pc:picChg>
+        <pc:cxnChg chg="del">
+          <ac:chgData name="Toby Donaldson" userId="2e6e5431-bb17-4c41-9985-d39c50d83c73" providerId="ADAL" clId="{F31BC264-820E-54C4-A6D1-F92AF9CC222E}" dt="2026-05-14T17:26:20.535" v="1351" actId="21"/>
+          <ac:cxnSpMkLst>
+            <pc:docMk/>
+            <pc:sldMk cId="1354175082" sldId="272"/>
+            <ac:cxnSpMk id="6" creationId="{63F38238-EA59-EF6D-85EB-1DC50411492B}"/>
+          </ac:cxnSpMkLst>
+        </pc:cxnChg>
+        <pc:cxnChg chg="del">
+          <ac:chgData name="Toby Donaldson" userId="2e6e5431-bb17-4c41-9985-d39c50d83c73" providerId="ADAL" clId="{F31BC264-820E-54C4-A6D1-F92AF9CC222E}" dt="2026-05-14T17:26:20.535" v="1351" actId="21"/>
+          <ac:cxnSpMkLst>
+            <pc:docMk/>
+            <pc:sldMk cId="1354175082" sldId="272"/>
+            <ac:cxnSpMk id="7" creationId="{95957776-68F6-FF05-2E54-431DFB0521F1}"/>
+          </ac:cxnSpMkLst>
+        </pc:cxnChg>
+        <pc:cxnChg chg="del">
+          <ac:chgData name="Toby Donaldson" userId="2e6e5431-bb17-4c41-9985-d39c50d83c73" providerId="ADAL" clId="{F31BC264-820E-54C4-A6D1-F92AF9CC222E}" dt="2026-05-14T17:26:20.535" v="1351" actId="21"/>
+          <ac:cxnSpMkLst>
+            <pc:docMk/>
+            <pc:sldMk cId="1354175082" sldId="272"/>
+            <ac:cxnSpMk id="13" creationId="{0EEBB820-1A0F-34F3-0617-370A4528CAEC}"/>
+          </ac:cxnSpMkLst>
+        </pc:cxnChg>
+        <pc:cxnChg chg="add mod">
+          <ac:chgData name="Toby Donaldson" userId="2e6e5431-bb17-4c41-9985-d39c50d83c73" providerId="ADAL" clId="{F31BC264-820E-54C4-A6D1-F92AF9CC222E}" dt="2026-05-14T18:55:22.740" v="1481"/>
+          <ac:cxnSpMkLst>
+            <pc:docMk/>
+            <pc:sldMk cId="1354175082" sldId="272"/>
+            <ac:cxnSpMk id="55" creationId="{F6BCA8AD-CAC5-8EF9-61EA-30D4799D8D8B}"/>
+          </ac:cxnSpMkLst>
+        </pc:cxnChg>
+        <pc:cxnChg chg="add mod">
+          <ac:chgData name="Toby Donaldson" userId="2e6e5431-bb17-4c41-9985-d39c50d83c73" providerId="ADAL" clId="{F31BC264-820E-54C4-A6D1-F92AF9CC222E}" dt="2026-05-14T18:55:22.740" v="1481"/>
+          <ac:cxnSpMkLst>
+            <pc:docMk/>
+            <pc:sldMk cId="1354175082" sldId="272"/>
+            <ac:cxnSpMk id="56" creationId="{78015995-C804-C1E1-B021-257C8B20F278}"/>
+          </ac:cxnSpMkLst>
+        </pc:cxnChg>
+      </pc:sldChg>
+      <pc:sldChg chg="addSp modSp add">
+        <pc:chgData name="Toby Donaldson" userId="2e6e5431-bb17-4c41-9985-d39c50d83c73" providerId="ADAL" clId="{F31BC264-820E-54C4-A6D1-F92AF9CC222E}" dt="2026-05-14T18:56:24.965" v="1491"/>
+        <pc:sldMkLst>
+          <pc:docMk/>
+          <pc:sldMk cId="1785195770" sldId="273"/>
+        </pc:sldMkLst>
+        <pc:grpChg chg="add mod">
+          <ac:chgData name="Toby Donaldson" userId="2e6e5431-bb17-4c41-9985-d39c50d83c73" providerId="ADAL" clId="{F31BC264-820E-54C4-A6D1-F92AF9CC222E}" dt="2026-05-14T18:56:24.965" v="1491"/>
+          <ac:grpSpMkLst>
+            <pc:docMk/>
+            <pc:sldMk cId="1785195770" sldId="273"/>
+            <ac:grpSpMk id="54" creationId="{0E98146C-B5AA-3FF9-957E-0BCC21F9476A}"/>
+          </ac:grpSpMkLst>
+        </pc:grpChg>
+        <pc:cxnChg chg="mod">
+          <ac:chgData name="Toby Donaldson" userId="2e6e5431-bb17-4c41-9985-d39c50d83c73" providerId="ADAL" clId="{F31BC264-820E-54C4-A6D1-F92AF9CC222E}" dt="2026-05-14T18:56:24.965" v="1491"/>
+          <ac:cxnSpMkLst>
+            <pc:docMk/>
+            <pc:sldMk cId="1785195770" sldId="273"/>
+            <ac:cxnSpMk id="55" creationId="{926ABFD3-7FB7-0C69-53C6-072C6C8FF63A}"/>
+          </ac:cxnSpMkLst>
+        </pc:cxnChg>
+        <pc:cxnChg chg="mod">
+          <ac:chgData name="Toby Donaldson" userId="2e6e5431-bb17-4c41-9985-d39c50d83c73" providerId="ADAL" clId="{F31BC264-820E-54C4-A6D1-F92AF9CC222E}" dt="2026-05-14T18:56:24.965" v="1491"/>
+          <ac:cxnSpMkLst>
+            <pc:docMk/>
+            <pc:sldMk cId="1785195770" sldId="273"/>
+            <ac:cxnSpMk id="56" creationId="{D316A3C5-88A0-44C3-F137-8B390878F628}"/>
+          </ac:cxnSpMkLst>
+        </pc:cxnChg>
+      </pc:sldChg>
     </pc:docChg>
   </pc:docChgLst>
 </pc:chgInfo>
+</file>
+
+<file path=ppt/ink/ink1.xml><?xml version="1.0" encoding="utf-8"?>
+<inkml:ink xmlns:inkml="http://www.w3.org/2003/InkML">
+  <inkml:definitions>
+    <inkml:context xml:id="ctx0">
+      <inkml:inkSource xml:id="inkSrc0">
+        <inkml:traceFormat>
+          <inkml:channel name="X" type="integer" min="-2.14748E9" max="2.14748E9" units="cm"/>
+          <inkml:channel name="Y" type="integer" min="-2.14748E9" max="2.14748E9" units="cm"/>
+          <inkml:channel name="F" type="integer" max="32767" units="dev"/>
+        </inkml:traceFormat>
+        <inkml:channelProperties>
+          <inkml:channelProperty channel="X" name="resolution" value="1000" units="1/cm"/>
+          <inkml:channelProperty channel="Y" name="resolution" value="1000" units="1/cm"/>
+          <inkml:channelProperty channel="F" name="resolution" value="0" units="1/dev"/>
+        </inkml:channelProperties>
+      </inkml:inkSource>
+      <inkml:timestamp xml:id="ts0" timeString="2026-05-14T19:34:32.836"/>
+    </inkml:context>
+    <inkml:brush xml:id="br0">
+      <inkml:brushProperty name="width" value="0.05292" units="cm"/>
+      <inkml:brushProperty name="height" value="0.05292" units="cm"/>
+      <inkml:brushProperty name="color" value="#FF0000"/>
+    </inkml:brush>
+  </inkml:definitions>
+  <inkml:trace contextRef="#ctx0" brushRef="#br0">8520 13282 24575,'33'0'0,"-5"0"0,5 0 0,14 1 0,4-2-600,-13-3 0,1-2 0,1 0 600,4 3 0,0 0 0,0-2 0,0-5 0,0-3 0,-1 2 0,-4 4 0,0 2 0,0-2 0,2-4 0,0-2 0,-1 3 0,-4 5 0,-1 2 0,0 0 290,11-6 1,-2 2-291,-4 6 0,-2 2 149,-7-1 0,-1 0-149,-2 0 0,-3 0 0,4 0 0,11 0 921,-29 0-921,31 0 0,-5-8 0,-5 0 0,4-2 0,4 1 0,1-1 0,-1 1 0,2 0 0,5-3 0,0 1 0,-10 5 0,-1 0 0,7-3 0,0 0 0,-10 5 0,-1 1 0,2-6 0,0 2 0,-6 5 0,-3 0 0,12-14 0,4 16 0,-21 0 0,-2 0 0,5 0 0,-19 0 0,20 0 0,-7 0 0,3 0 0,13 0 0,-13 0 0,13 0 0,-13 0 0,13 0 0,-21 0 0,11 0 0,-21 0 0,6 0 0,8 0 0,-12 0 0,11 0 0</inkml:trace>
+  <inkml:trace contextRef="#ctx0" brushRef="#br0" timeOffset="21765">26599 13670 24575,'31'0'0,"-1"0"0,5 0 0,1 0 0,-1 0 0,2 0 0,10 0 0,0 0 0,-2 0 0,1 0-366,-10 0 1,2 0 0,1 0 365,2 0 0,0 0 0,1 0 0,-1 0 0,1 0 0,0 0 0,4 0 0,1 0 0,-1 0 0,-6 0 0,-1 0 0,0 0 0,-3 0 0,-1 0 0,0 0 134,13 0 0,-2 0-134,-9 0 0,-2 0 0,-2 0 0,-3 0 0,13 0 0,-10 0 0,-21 0 828,4 16-828,-16-12 0,0 11 0,0-15 0</inkml:trace>
+  <inkml:trace contextRef="#ctx0" brushRef="#br0" timeOffset="63965">24571 12965 24575,'-16'33'0,"5"-4"0,-5 3 0,-11 1 0,-8 2 0,-3 2-656,9-7 1,-1 2-1,-1 1 1,-3-1 0,-3 0 186,3-5 1,-2 0 0,-3-1 0,-1 1 0,0-1 0,-2 2 0,1-1 103,4-2 1,0 1 0,-1 0 0,0 1 0,0-1 0,-2 1 0,1-1 0,-1 1 0,0-1 189,1-2 0,1 0 0,-2 1 0,1-1 0,-1 0 1,0 0-1,-1 0 0,0 0 0,0 0 0,0 0 32,2-2 0,-1 0 1,0 0-1,-1 0 0,0-1 1,0 1-1,0 0 1,0-1-1,0 1 0,0 0 1,0 1 142,0 0 0,-1 0 0,1 1 0,0 1 0,-1-1 0,1 0 0,-1 0 0,0-1 0,0 1 0,-1-2 0,0 0-203,1-1 1,0-2 0,-1 0-1,0 0 1,0-1 0,0 0-1,-1 0 1,0 1 0,1-1-1,-1 0 1,0 1 0,1 1 202,-1 0 0,1 1 0,-1 0 0,1 0 0,-1 1 0,1 0 0,-1-1 0,0 1 0,1-1 0,-1 0 0,-1 0 0,1-1-63,-1-1 0,0 1 1,0-1-1,-1-1 1,0 1-1,1-1 1,-1 0-1,0 0 1,0 1-1,0-1 1,1 0-1,-1 1 63,1 0 0,-1 0 0,1 1 0,0-1 0,0 0 0,-1 1 0,1-1 0,0 0 0,-1 0 0,1 0 0,-1-1 0,0-1-5,1 0 0,-1 0 1,0-1-1,0 0 0,1-1 1,-1 0-1,-1 1 1,1-1-1,0 0 0,-1 0 1,0 1-1,0 0 5,1-1 0,-1 1 0,1 0 0,-1 0 0,0 0 0,0 0 0,0 0 0,-1 0 0,1 0 0,-1 0 0,0 0 0,0-1 0,0 0 0,3-1 0,-1 0 0,0 0 0,0-1 0,-1 0 0,1 0 0,0 1 0,-1-1 0,1 0 0,-1 0 0,0 0 0,1 1 0,-1-1 0,1 1 0,-2 1 0,1 0 0,-1 0 0,0 0 0,0 0 0,1 0 0,-1 1 0,0-1 0,0 1 0,1-1 0,-1 0 0,1 0 0,-1 0 0,1 0 0,1-1 0,0 1 0,0-1 0,0-1 0,0 1 0,1 0 0,-1 0 0,0 0 0,1-1 0,0 1 0,0 0 0,0 0 0,1 1 0,0-1 0,-4 2 0,1 1 0,0 0 0,0 0 0,0 0 0,1 0 0,0 0 0,0 0 0,0 0 0,1-1 0,-1 0 0,1 0 0,-2 0 0,0-1 0,0 0 0,1 0 0,0-1 0,0 0 0,0 1 0,0-1 0,0 1 0,1 0 0,-1 0 0,1 0 0,0 1 0,0 0 0,1 0 0,-1 1 0,1-1 0,-1 0 0,1 0 0,0-1 0,-1 0 0,1-1 0,-3 1 0,0-2 0,-1 0 0,1 0 0,0-1 0,0 1 0,0-1 0,0 0 0,-1 0 0,1 1 0,2-2 0,0 1 0,-1 1 0,0-1 0,1 0 0,-1 0 0,0-1 0,1 1 0,-1 0 0,1-1 0,0 0 13,-3 0 0,1 1 0,-1-1 0,1 0 0,0 0 1,0-1-1,0 1 0,0-1 0,1-1 0,0 1-13,-3-1 0,1 0 0,-1 0 0,1-1 0,1 0 0,-1 0 0,1 0 0,1 0 0,0-1 96,0 1 0,-1 1 0,2-1 0,-1 0 1,1-1-1,1 0 0,0 0 0,1-2-96,-2-1 0,0 0 0,2-2 0,-1 1 0,1-2 0,1 1 0,0 0 194,-3 0 0,0-1 0,1 1 0,1-1 0,-1 0 0,0 0-194,0-1 0,0 0 0,0 0 0,0 0 0,0 0 0,0 0 0,1-1 0,-1 0 0,1 0 0,1 0 0,-1-1 0,1 0 351,-7-2 1,1-1 0,1 0-1,-1-1 1,1 0-352,1 1 0,0 0 0,1-1 0,-1 0 0,2-1 0,-1-2 0,2-1 0,-1-1 0,0 0 0,0 1 0,-3 0 0,0 2 0,0-1 0,-1 0 0,0 0 281,7 0 1,-1 1-1,1-1 1,-1 0-1,0 0 1,1 0-282,-1-1 0,1 1 0,-1-1 0,0 0 0,1-1 0,0 0 0,-7-3 0,0-2 0,0 1 0,1-2 0,1 1 238,2 0 0,1 0 1,0 0-1,1-1 0,2-1-238,-4-4 0,1-3 0,1 1 0,1-1 382,2 3 0,2 0 1,0 0-1,3 0-382,-4-2 0,3 0 0,2 0 613,5-2 1,2 0-1,0 1-613,-14-3 0,3 1 0,10-3 0,-1 0 0,-10 3 0,0 1 0,9-1 0,1 1 1376,-7 3 0,1 1-1376,8-5 0,-1 3 1062,-3 9 0,0 0-1062,2-8 0,1-3 0,-11 1 0,-1-3 71,12 1 0,0-3 0,1-1-71,-2-1 0,1-1 0,0-2 0,5 4 0,0-3 0,1 1 0,-1 2 0,-4-1 0,-1 2 0,2-2 0,3-7 0,1-2 0,-1 3 0,0 10 0,-2 2 0,2-2-58,3-6 0,2-2 1,0 2 57,-10-7 0,1 0 0,8 7 0,0 0 0,1 0 0,-2-7 0,1-1 0,1 8 0,0-1 0,2 1 0,0-8 0,0 1 0,-1 10 0,-2-1 0,1 1 0,2-8 0,1-2 0,-2 5 0,-1-2 0,1 0 0,5 4 0,2 1 0,0-2 0,-3-5 0,-1-2 0,2 3 0,2-8 0,1 4 0,-4 2 0,0 3 0,6 11 0,0 1 0,-2-1 0,-1 3 0,1 3 966,-8-11-966,12 15 431,-11-3-431,15 3 0,0 9 0,0-8 0,0 12 0,0-19 0,0 21 0,0-22 0,0 12 0,0-21 0,0 13 0,-8-13 0,6 13 0,-6-13 0,8 21 0,0-11 0,0 21 0,0-6 0,-16 8 0,12 0 0,-11 0 0,15 0 0,0 8 0,-8 17 0,6 13 0,-6 7 0,-8-10 0,13-2 0,-13-13 0,16 13 0,-8-21 0,6 12 0,-21-7 0,19-5 0,-12 11 0,16-21 0,0 22 0,-8-12 0,-10 29 0,2-15 0,-3 1 0,-3 4 0,-1 2 0,5-4 0,0 0 0,1 0 0,-2 3 0,1 0 0,-4 4 0,3-3 0,7-4 0,-4 3 0,9-30 0,5 5 0,-6-7 0,8-7 0,0-11 0,8-25 0,0 13 0,1-3 0,0-10 0,2-2 0,-1 13 0,2-1 0,-1 0 0,1-2 0,0-1 0,-1 1 0,3-11 0,2 2 0,5 3 0,-1 4 0,-14 9 0,0 3 0,17-11 0,-21 3 0,6 21 0,8-11 0,-12 5 0,19-1 0,-5-15 0,-6 15 0,11-15 0,-21 23 0,6-13 0,-8 22 0,0-6 0,16 8 0,-13 8 0,21 10 0,-6 1 0,-7 15 0,13-15 0,1 15 0,5-15 0,5-1 0,-2 5 0,3-11 0,-7 6 0,-5-5 0,1-3 0,12-6 0,-3 8 0,1 0 0,-7-11 0,1 0 0,8 10 0,2 1 0,-3-10 0,-1 0 0,1 9 0,0 2 0,8-4 0,-2-1 0,-13-2 0,-1 0 0,6 7 0,-1-2 0,4-10 0,-2 7 0,-17-8 0,6 0 0,-20 16 0,11-12 0,-15 12 0,0-16 0,0 7 0,0-5 0,0 6 0,0-8 0</inkml:trace>
+</inkml:ink>
+</file>
+
+<file path=ppt/ink/ink2.xml><?xml version="1.0" encoding="utf-8"?>
+<inkml:ink xmlns:inkml="http://www.w3.org/2003/InkML">
+  <inkml:definitions>
+    <inkml:context xml:id="ctx0">
+      <inkml:inkSource xml:id="inkSrc0">
+        <inkml:traceFormat>
+          <inkml:channel name="X" type="integer" min="-2.14748E9" max="2.14748E9" units="cm"/>
+          <inkml:channel name="Y" type="integer" min="-2.14748E9" max="2.14748E9" units="cm"/>
+          <inkml:channel name="F" type="integer" max="32767" units="dev"/>
+        </inkml:traceFormat>
+        <inkml:channelProperties>
+          <inkml:channelProperty channel="X" name="resolution" value="1000" units="1/cm"/>
+          <inkml:channelProperty channel="Y" name="resolution" value="1000" units="1/cm"/>
+          <inkml:channelProperty channel="F" name="resolution" value="0" units="1/dev"/>
+        </inkml:channelProperties>
+      </inkml:inkSource>
+      <inkml:timestamp xml:id="ts0" timeString="2026-05-14T19:43:45.399"/>
+    </inkml:context>
+    <inkml:brush xml:id="br0">
+      <inkml:brushProperty name="width" value="0.05292" units="cm"/>
+      <inkml:brushProperty name="height" value="0.05292" units="cm"/>
+      <inkml:brushProperty name="color" value="#FF0000"/>
+    </inkml:brush>
+  </inkml:definitions>
+  <inkml:trace contextRef="#ctx0" brushRef="#br0">18662 5697 24575,'10'0'0,"21"0"0,-1 0 0,2 0 0,4 0 0,3 0 0,2 0 0,-6 0 0,0 0 0,1 0 0,0 1 0,0-1 0,0-1 0,2-3 0,0-2 0,0 1 0,-3 3 0,0 2 0,1-2 0,-1-3 0,0-1 0,0 1 0,15 5 0,-2 0 0,-3-4 0,-1 0 0,-9 3 0,0 0 0,3-3 0,1 0 0,0 5 0,2-2 0,7-6 0,2-1 0,-15 6 0,1 2 0,-1-2 0,10-6 0,0 0 0,-11 5 0,1 0 0,-2 1 0,5 1 0,-2 0 0,4-3 0,-1 1 0,-12 2 0,-1 2 0,9-1 0,-17 0 0,5 0 0,-19 0 0,20 0 0,-7 0 0,3 0 0,21 0 0,-4-16 0,-11 14 0,1 0 0,0-6 0,-1 0 0,1 8 0,-1 0 0,19-8 0,-19 8 0,-1-2 0,4-5 0,12 7 0,-21 0 0,13 0 0,-21 0 0,4 0 0</inkml:trace>
+  <inkml:trace contextRef="#ctx0" brushRef="#br0" timeOffset="2000">20973 2117 24575,'25'0'0,"1"0"0,6 0 0,6 0 0,1 0 0,-3 0 0,2 0 0,2 0 0,1 0-656,2 0 1,3 0-1,1 0 1,0 0 0,-1 0 217,-2 0 0,0 0 1,0 0-1,-1 0 1,0 0 437,-1 0 0,1 0 0,-1 0 0,0 0 0,-1 0-88,5 0 1,0 0 0,-1 0-1,0 0 88,-1 0 0,1 0 0,-1 0 0,-1 0 0,-2 0 0,0 1 0,-1-1 0,1-1 0,2-2 0,1-2 0,-1 0 0,0 2 0,-5 2 0,0 1 0,0-1 0,-2-1 209,10-5 0,-2-2 0,2 2-209,3 5 0,1 4 0,-4-4 0,2-10 0,-2 0 0,2 10 0,-2 0 0,-15-6 0,-1 0 1283,-3 8 1,-1 0-1284,19 0 1785,-18 0-1785,-3 0 836,-22-7-836,5 5 0,-7-6 0,0 8 0,0 0 0,0 8 0,0-6 0,0 5 0</inkml:trace>
+  <inkml:trace contextRef="#ctx0" brushRef="#br0" timeOffset="52917">5133 8114 24575,'27'0'0,"1"0"0,1 0 0,20 0 0,-7 0 0,2 0 0,1 0 0,-1 0 0,-3 0 0,0 0 0,7 0 0,-2 0 0,-13 0 0,-1 0 0,3 0 0,-2 0 0,5 0 0,3-8 0,-22 6 0,22-6 0,-11-7 0,-5 12 0,1 2 0,19-15 0,-8 16 0,12-8 0,-20 6 0,7-6 0,5 8 0,-4-15 0,-11 12 0,1 2 0,0-7 0,-1 0 0,0 8 0,1 0 0,-1-4 0,1 0 0,-1 3 0,1 0 0,-1-3 0,1 0 0,18 4 0,-19 0 0,-1 0 0,4 0 0,-3-7 0,-3-1 0,-9 4 0,17-12 0,-29 16 0,6 0 0,-8 16 0,0-12 0,0 11 0,0-15 0</inkml:trace>
+  <inkml:trace contextRef="#ctx0" brushRef="#br0" timeOffset="75215">12012 11624 24575,'40'0'0,"0"0"0,0 0 0,-4 0 0,0 0 0,3 0 0,1 0 0,-1 0 0,3 0 0,1 0 0,0 0 0,1 0-656,5 0 1,0 0-1,1 0 1,0 0 0,1 0 118,-7 0 1,0 0-1,1 0 1,-1 0-1,1 0 1,0 0 536,0 0 0,0 0 0,1 0 0,-1 0 0,1 0 0,-1 0 0,0 0 0,-1 0 0,0 0 0,1 0 0,-2 0 0,1 0 0,5 0 0,-1 0 0,0 0 0,0 0 0,0 0-157,-1 0 1,1 1-1,-1-1 1,0 0-1,-1-1 157,-3-1 0,0-2 0,-1 1 0,0-1 0,0 1 96,6 2 1,-1 1 0,0-1 0,-1-1-97,-3-1 0,-1-2 0,0 1 0,-3 1-68,4 2 0,-2 1 0,-1 1 68,9-1 0,-2 0 0,-3 0 0,-2 0 1407,-9 0 0,-1 0-1407,-5 0 0,-1 0 2407,23 0-2407,-20 0 392,-2 0 0,-11 0 0,-16 0 0</inkml:trace>
+  <inkml:trace contextRef="#ctx0" brushRef="#br0" timeOffset="78067">15099 9613 24575,'-26'0'0,"15"0"0,-13-8 0,6 14 0,-1-12 0,-14 38 0,13-3 0,3-6 0,1-1 0,-4 6 0,2-5 0,11-21 0,7 22 0,0-20 0,-16 19 0,4-5 0,-21 1 0,15 1 0,1 1 0,-6-2 0,0 0 0,5 7 0,-1 1 0,-2-4 0,1-1 0,0 13 0,3-2 0,-7-13 0,13 21 0,-23-4 0,24-4 0,1 3 0,-11-4 0,-2 1 0,4 10 0,-1 0 0,-3-11 0,-1 0 0,4 7 0,3-1 0,6-10 0,2-1 0,0 18 0,0-20 0,1-1 0,3 5 0,-4-4 0,0 1 0,8 19 0,0-19 0,0 1 0,-1 0 0,2-1 0,7 1 0,0-1 0,-4 11 0,19 4 0,-5-21 0,1 13 0,15-21 0,-15 12 0,15-22 0,9 5 0,4-7 0,-17-2 0,1-3 0,3-3 0,0-2 0,-2 1 0,1-2 0,-3-1 0,1-3 0,2 1-511,3 2 0,2 1 1,2-3 510,-4-2 0,2-3 0,0-2 0,1 1-598,2-4 0,2 0 0,0-1 0,0 0 598,-5 2 0,1 0 0,0-1 0,0 0 0,-2 0 0,-3 0 0,-1-1 0,-1 1 0,0-2 0,0 1-314,6-5 1,0-1 0,-1 1 0,-1 0 313,-6 5 0,0 0 0,-2 0 0,-3 0-26,-1-4 1,-3-1-1,-1 1 26,11-9 0,-5-1 0,-15-6 0,-2-4 0,1 16 0,2 0 0,-1-3 78,-4-11 0,-1-3 0,0 0-78,5 4 0,1 1 0,-1 1 0,-4 4 0,-1 0 0,0 3 1116,4-12 1,-2 3-1117,-3 15 0,-2 2 1448,-3-16-1448,0 17 97,-8 13-97,-10 15 1242,-1 0-1242,-15 0 0,15 0 0,-14 0 0,13 0 0,-13 0 0,13 0 0,-13 0 0,13 0 0,-13 0 0,13 0 0,-13 0 0,21 0 0,-19 0 0,3 15 0,-17-11 0,12 7 0,-2 2 0,2-4 0,1-1 0,-4-2 0,1 0 0,4 5 0,2 2 0,-16 4 0,9-5 0,19 11 0,-7-21 0,12 22 0,-21-20 0,-2 19 0,13-21 0,-9 22 0,29-20 0,-22 19 0,20-21 0,-11 6 0,7-8 0,6 0 0,-6 0 0,8 0 0</inkml:trace>
+</inkml:ink>
 </file>
 
 <file path=ppt/slideLayouts/slideLayout1.xml><?xml version="1.0" encoding="utf-8"?>
@@ -537,7 +1164,7 @@
           <a:p>
             <a:fld id="{889F9635-12D6-CA48-83F0-27F24E8721A6}" type="datetimeFigureOut">
               <a:rPr lang="en-US" smtClean="0"/>
-              <a:t>5/11/26</a:t>
+              <a:t>5/14/26</a:t>
             </a:fld>
             <a:endParaRPr lang="en-US"/>
           </a:p>
@@ -735,7 +1362,7 @@
           <a:p>
             <a:fld id="{889F9635-12D6-CA48-83F0-27F24E8721A6}" type="datetimeFigureOut">
               <a:rPr lang="en-US" smtClean="0"/>
-              <a:t>5/11/26</a:t>
+              <a:t>5/14/26</a:t>
             </a:fld>
             <a:endParaRPr lang="en-US"/>
           </a:p>
@@ -943,7 +1570,7 @@
           <a:p>
             <a:fld id="{889F9635-12D6-CA48-83F0-27F24E8721A6}" type="datetimeFigureOut">
               <a:rPr lang="en-US" smtClean="0"/>
-              <a:t>5/11/26</a:t>
+              <a:t>5/14/26</a:t>
             </a:fld>
             <a:endParaRPr lang="en-US"/>
           </a:p>
@@ -1141,7 +1768,7 @@
           <a:p>
             <a:fld id="{889F9635-12D6-CA48-83F0-27F24E8721A6}" type="datetimeFigureOut">
               <a:rPr lang="en-US" smtClean="0"/>
-              <a:t>5/11/26</a:t>
+              <a:t>5/14/26</a:t>
             </a:fld>
             <a:endParaRPr lang="en-US"/>
           </a:p>
@@ -1416,7 +2043,7 @@
           <a:p>
             <a:fld id="{889F9635-12D6-CA48-83F0-27F24E8721A6}" type="datetimeFigureOut">
               <a:rPr lang="en-US" smtClean="0"/>
-              <a:t>5/11/26</a:t>
+              <a:t>5/14/26</a:t>
             </a:fld>
             <a:endParaRPr lang="en-US"/>
           </a:p>
@@ -1681,7 +2308,7 @@
           <a:p>
             <a:fld id="{889F9635-12D6-CA48-83F0-27F24E8721A6}" type="datetimeFigureOut">
               <a:rPr lang="en-US" smtClean="0"/>
-              <a:t>5/11/26</a:t>
+              <a:t>5/14/26</a:t>
             </a:fld>
             <a:endParaRPr lang="en-US"/>
           </a:p>
@@ -2093,7 +2720,7 @@
           <a:p>
             <a:fld id="{889F9635-12D6-CA48-83F0-27F24E8721A6}" type="datetimeFigureOut">
               <a:rPr lang="en-US" smtClean="0"/>
-              <a:t>5/11/26</a:t>
+              <a:t>5/14/26</a:t>
             </a:fld>
             <a:endParaRPr lang="en-US"/>
           </a:p>
@@ -2234,7 +2861,7 @@
           <a:p>
             <a:fld id="{889F9635-12D6-CA48-83F0-27F24E8721A6}" type="datetimeFigureOut">
               <a:rPr lang="en-US" smtClean="0"/>
-              <a:t>5/11/26</a:t>
+              <a:t>5/14/26</a:t>
             </a:fld>
             <a:endParaRPr lang="en-US"/>
           </a:p>
@@ -2347,7 +2974,7 @@
           <a:p>
             <a:fld id="{889F9635-12D6-CA48-83F0-27F24E8721A6}" type="datetimeFigureOut">
               <a:rPr lang="en-US" smtClean="0"/>
-              <a:t>5/11/26</a:t>
+              <a:t>5/14/26</a:t>
             </a:fld>
             <a:endParaRPr lang="en-US"/>
           </a:p>
@@ -2658,7 +3285,7 @@
           <a:p>
             <a:fld id="{889F9635-12D6-CA48-83F0-27F24E8721A6}" type="datetimeFigureOut">
               <a:rPr lang="en-US" smtClean="0"/>
-              <a:t>5/11/26</a:t>
+              <a:t>5/14/26</a:t>
             </a:fld>
             <a:endParaRPr lang="en-US"/>
           </a:p>
@@ -2946,7 +3573,7 @@
           <a:p>
             <a:fld id="{889F9635-12D6-CA48-83F0-27F24E8721A6}" type="datetimeFigureOut">
               <a:rPr lang="en-US" smtClean="0"/>
-              <a:t>5/11/26</a:t>
+              <a:t>5/14/26</a:t>
             </a:fld>
             <a:endParaRPr lang="en-US"/>
           </a:p>
@@ -3187,7 +3814,7 @@
           <a:p>
             <a:fld id="{889F9635-12D6-CA48-83F0-27F24E8721A6}" type="datetimeFigureOut">
               <a:rPr lang="en-US" smtClean="0"/>
-              <a:t>5/11/26</a:t>
+              <a:t>5/14/26</a:t>
             </a:fld>
             <a:endParaRPr lang="en-US"/>
           </a:p>
@@ -3679,6 +4306,100 @@
 </p:sld>
 </file>
 
+<file path=ppt/slides/slide10.xml><?xml version="1.0" encoding="utf-8"?>
+<p:sld xmlns:a="http://schemas.openxmlformats.org/drawingml/2006/main" xmlns:r="http://schemas.openxmlformats.org/officeDocument/2006/relationships" xmlns:p="http://schemas.openxmlformats.org/presentationml/2006/main">
+  <p:cSld>
+    <p:spTree>
+      <p:nvGrpSpPr>
+        <p:cNvPr id="1" name=""/>
+        <p:cNvGrpSpPr/>
+        <p:nvPr/>
+      </p:nvGrpSpPr>
+      <p:grpSpPr>
+        <a:xfrm>
+          <a:off x="0" y="0"/>
+          <a:ext cx="0" cy="0"/>
+          <a:chOff x="0" y="0"/>
+          <a:chExt cx="0" cy="0"/>
+        </a:xfrm>
+      </p:grpSpPr>
+      <p:sp>
+        <p:nvSpPr>
+          <p:cNvPr id="2" name="Title 1">
+            <a:extLst>
+              <a:ext uri="{FF2B5EF4-FFF2-40B4-BE49-F238E27FC236}">
+                <a16:creationId xmlns:a16="http://schemas.microsoft.com/office/drawing/2014/main" id="{04DC1A5B-080A-CA27-D4B7-969D821EAE6B}"/>
+              </a:ext>
+            </a:extLst>
+          </p:cNvPr>
+          <p:cNvSpPr>
+            <a:spLocks noGrp="1"/>
+          </p:cNvSpPr>
+          <p:nvPr>
+            <p:ph type="title"/>
+          </p:nvPr>
+        </p:nvSpPr>
+        <p:spPr/>
+        <p:txBody>
+          <a:bodyPr/>
+          <a:lstStyle/>
+          <a:p>
+            <a:r>
+              <a:rPr lang="en-US" dirty="0"/>
+              <a:t>Practice Problems</a:t>
+            </a:r>
+          </a:p>
+        </p:txBody>
+      </p:sp>
+      <p:sp>
+        <p:nvSpPr>
+          <p:cNvPr id="3" name="Content Placeholder 2">
+            <a:extLst>
+              <a:ext uri="{FF2B5EF4-FFF2-40B4-BE49-F238E27FC236}">
+                <a16:creationId xmlns:a16="http://schemas.microsoft.com/office/drawing/2014/main" id="{F3E806F1-3EF6-4191-AC82-5B78869AA53C}"/>
+              </a:ext>
+            </a:extLst>
+          </p:cNvPr>
+          <p:cNvSpPr>
+            <a:spLocks noGrp="1"/>
+          </p:cNvSpPr>
+          <p:nvPr>
+            <p:ph idx="1"/>
+          </p:nvPr>
+        </p:nvSpPr>
+        <p:spPr/>
+        <p:txBody>
+          <a:bodyPr/>
+          <a:lstStyle/>
+          <a:p>
+            <a:pPr marL="0" indent="0">
+              <a:buNone/>
+            </a:pPr>
+            <a:r>
+              <a:rPr lang="en-US" dirty="0"/>
+              <a:t>Do problems 1, 2, and 3 </a:t>
+            </a:r>
+            <a:r>
+              <a:rPr lang="en-US"/>
+              <a:t>in the notes …</a:t>
+            </a:r>
+            <a:endParaRPr lang="en-US" dirty="0"/>
+          </a:p>
+        </p:txBody>
+      </p:sp>
+    </p:spTree>
+    <p:extLst>
+      <p:ext uri="{BB962C8B-B14F-4D97-AF65-F5344CB8AC3E}">
+        <p14:creationId xmlns:p14="http://schemas.microsoft.com/office/powerpoint/2010/main" val="1400040307"/>
+      </p:ext>
+    </p:extLst>
+  </p:cSld>
+  <p:clrMapOvr>
+    <a:masterClrMapping/>
+  </p:clrMapOvr>
+</p:sld>
+</file>
+
 <file path=ppt/slides/slide2.xml><?xml version="1.0" encoding="utf-8"?>
 <p:sld xmlns:a="http://schemas.openxmlformats.org/drawingml/2006/main" xmlns:r="http://schemas.openxmlformats.org/officeDocument/2006/relationships" xmlns:p="http://schemas.openxmlformats.org/presentationml/2006/main">
   <p:cSld>
@@ -3760,7 +4481,7 @@
             </a:r>
             <a:r>
               <a:rPr lang="en-US" dirty="0"/>
-              <a:t>is a data structure where data is stored in as a record (or struct, or object) that contains the data’s value and the address of the next record in the list.</a:t>
+              <a:t>is a data structure where data is stored as a record (or struct, or object) that contains the data’s value and the address of the next record in the list.</a:t>
             </a:r>
           </a:p>
           <a:p>
@@ -3801,6 +4522,57 @@
           </a:prstGeom>
         </p:spPr>
       </p:pic>
+      <mc:AlternateContent xmlns:mc="http://schemas.openxmlformats.org/markup-compatibility/2006">
+        <mc:Choice xmlns:p14="http://schemas.microsoft.com/office/powerpoint/2010/main" Requires="p14">
+          <p:contentPart p14:bwMode="auto" r:id="rId3">
+            <p14:nvContentPartPr>
+              <p14:cNvPr id="5" name="Ink 4">
+                <a:extLst>
+                  <a:ext uri="{FF2B5EF4-FFF2-40B4-BE49-F238E27FC236}">
+                    <a16:creationId xmlns:a16="http://schemas.microsoft.com/office/drawing/2014/main" id="{82DCB664-DACE-DAFA-73E9-AE55A4E99199}"/>
+                  </a:ext>
+                </a:extLst>
+              </p14:cNvPr>
+              <p14:cNvContentPartPr/>
+              <p14:nvPr/>
+            </p14:nvContentPartPr>
+            <p14:xfrm>
+              <a:off x="2800440" y="4667400"/>
+              <a:ext cx="7296480" cy="1619640"/>
+            </p14:xfrm>
+          </p:contentPart>
+        </mc:Choice>
+        <mc:Fallback>
+          <p:pic>
+            <p:nvPicPr>
+              <p:cNvPr id="5" name="Ink 4">
+                <a:extLst>
+                  <a:ext uri="{FF2B5EF4-FFF2-40B4-BE49-F238E27FC236}">
+                    <a16:creationId xmlns:a16="http://schemas.microsoft.com/office/drawing/2014/main" id="{82DCB664-DACE-DAFA-73E9-AE55A4E99199}"/>
+                  </a:ext>
+                </a:extLst>
+              </p:cNvPr>
+              <p:cNvPicPr/>
+              <p:nvPr/>
+            </p:nvPicPr>
+            <p:blipFill>
+              <a:blip r:embed="rId4"/>
+              <a:stretch>
+                <a:fillRect/>
+              </a:stretch>
+            </p:blipFill>
+            <p:spPr>
+              <a:xfrm>
+                <a:off x="2791080" y="4658040"/>
+                <a:ext cx="7315200" cy="1638360"/>
+              </a:xfrm>
+              <a:prstGeom prst="rect">
+                <a:avLst/>
+              </a:prstGeom>
+            </p:spPr>
+          </p:pic>
+        </mc:Fallback>
+      </mc:AlternateContent>
     </p:spTree>
     <p:extLst>
       <p:ext uri="{BB962C8B-B14F-4D97-AF65-F5344CB8AC3E}">
@@ -3893,14 +4665,14 @@
             </a:pPr>
             <a:r>
               <a:rPr lang="en-US" dirty="0"/>
-              <a:t>Compared to arrays, inserting and removing items from a linked list can often be must faster</a:t>
+              <a:t>Compared to arrays, inserting and removing items from a linked list can often be much faster</a:t>
             </a:r>
           </a:p>
           <a:p>
             <a:pPr lvl="1"/>
             <a:r>
               <a:rPr lang="en-US" dirty="0"/>
-              <a:t>In a linked list, you don’t need to shuffle items around the way you do in arrays</a:t>
+              <a:t>In a linked list, you don’t need to shuffle items like with arrays</a:t>
             </a:r>
           </a:p>
           <a:p>
@@ -4047,7 +4819,7 @@
             <a:pPr lvl="1"/>
             <a:r>
               <a:rPr lang="en-US" dirty="0"/>
-              <a:t>You can easily add one item at a time without needing to pre-allocate memory like you must do with an a dynamic array</a:t>
+              <a:t>You can easily add one item at a time without needing to pre-allocate memory like you must do with a dynamic array</a:t>
             </a:r>
           </a:p>
           <a:p>
@@ -4109,6 +4881,5260 @@
         <p:cNvPr id="1" name="">
           <a:extLst>
             <a:ext uri="{FF2B5EF4-FFF2-40B4-BE49-F238E27FC236}">
+              <a16:creationId xmlns:a16="http://schemas.microsoft.com/office/drawing/2014/main" id="{D777EDF3-54F5-C5BC-ED98-512DFF947712}"/>
+            </a:ext>
+          </a:extLst>
+        </p:cNvPr>
+        <p:cNvGrpSpPr/>
+        <p:nvPr/>
+      </p:nvGrpSpPr>
+      <p:grpSpPr>
+        <a:xfrm>
+          <a:off x="0" y="0"/>
+          <a:ext cx="0" cy="0"/>
+          <a:chOff x="0" y="0"/>
+          <a:chExt cx="0" cy="0"/>
+        </a:xfrm>
+      </p:grpSpPr>
+      <p:sp>
+        <p:nvSpPr>
+          <p:cNvPr id="2" name="Title 1">
+            <a:extLst>
+              <a:ext uri="{FF2B5EF4-FFF2-40B4-BE49-F238E27FC236}">
+                <a16:creationId xmlns:a16="http://schemas.microsoft.com/office/drawing/2014/main" id="{5665F98F-0C99-28B5-4E22-02BF5C6FDF9B}"/>
+              </a:ext>
+            </a:extLst>
+          </p:cNvPr>
+          <p:cNvSpPr>
+            <a:spLocks noGrp="1"/>
+          </p:cNvSpPr>
+          <p:nvPr>
+            <p:ph type="title"/>
+          </p:nvPr>
+        </p:nvSpPr>
+        <p:spPr>
+          <a:xfrm>
+            <a:off x="461839" y="-195623"/>
+            <a:ext cx="10515600" cy="1325563"/>
+          </a:xfrm>
+        </p:spPr>
+        <p:txBody>
+          <a:bodyPr/>
+          <a:lstStyle/>
+          <a:p>
+            <a:r>
+              <a:rPr lang="en-US" dirty="0"/>
+              <a:t>Introduction</a:t>
+            </a:r>
+          </a:p>
+        </p:txBody>
+      </p:sp>
+      <p:sp>
+        <p:nvSpPr>
+          <p:cNvPr id="3" name="Content Placeholder 2">
+            <a:extLst>
+              <a:ext uri="{FF2B5EF4-FFF2-40B4-BE49-F238E27FC236}">
+                <a16:creationId xmlns:a16="http://schemas.microsoft.com/office/drawing/2014/main" id="{B3755A2C-AFE5-1DCE-9826-1E09AD66A780}"/>
+              </a:ext>
+            </a:extLst>
+          </p:cNvPr>
+          <p:cNvSpPr>
+            <a:spLocks noGrp="1"/>
+          </p:cNvSpPr>
+          <p:nvPr>
+            <p:ph idx="1"/>
+          </p:nvPr>
+        </p:nvSpPr>
+        <p:spPr>
+          <a:xfrm>
+            <a:off x="461839" y="1264877"/>
+            <a:ext cx="10515600" cy="4351338"/>
+          </a:xfrm>
+        </p:spPr>
+        <p:txBody>
+          <a:bodyPr>
+            <a:normAutofit/>
+          </a:bodyPr>
+          <a:lstStyle/>
+          <a:p>
+            <a:pPr marL="0" indent="0">
+              <a:buNone/>
+            </a:pPr>
+            <a:r>
+              <a:rPr lang="en-US" dirty="0"/>
+              <a:t>Compared to arrays, linked lists can also give you better control over memory</a:t>
+            </a:r>
+          </a:p>
+          <a:p>
+            <a:pPr lvl="1"/>
+            <a:r>
+              <a:rPr lang="en-US" dirty="0"/>
+              <a:t>You can easily add one item at a time without needing to pre-allocate memory like you must do with a dynamic array</a:t>
+            </a:r>
+          </a:p>
+          <a:p>
+            <a:pPr marL="0" indent="0">
+              <a:buNone/>
+            </a:pPr>
+            <a:endParaRPr lang="en-US" dirty="0"/>
+          </a:p>
+        </p:txBody>
+      </p:sp>
+    </p:spTree>
+    <p:extLst>
+      <p:ext uri="{BB962C8B-B14F-4D97-AF65-F5344CB8AC3E}">
+        <p14:creationId xmlns:p14="http://schemas.microsoft.com/office/powerpoint/2010/main" val="1054383362"/>
+      </p:ext>
+    </p:extLst>
+  </p:cSld>
+  <p:clrMapOvr>
+    <a:masterClrMapping/>
+  </p:clrMapOvr>
+</p:sld>
+</file>
+
+<file path=ppt/slides/slide6.xml><?xml version="1.0" encoding="utf-8"?>
+<p:sld xmlns:a="http://schemas.openxmlformats.org/drawingml/2006/main" xmlns:r="http://schemas.openxmlformats.org/officeDocument/2006/relationships" xmlns:p="http://schemas.openxmlformats.org/presentationml/2006/main">
+  <p:cSld>
+    <p:spTree>
+      <p:nvGrpSpPr>
+        <p:cNvPr id="1" name="">
+          <a:extLst>
+            <a:ext uri="{FF2B5EF4-FFF2-40B4-BE49-F238E27FC236}">
+              <a16:creationId xmlns:a16="http://schemas.microsoft.com/office/drawing/2014/main" id="{732835B0-4A1C-01CD-3598-F48F846F6830}"/>
+            </a:ext>
+          </a:extLst>
+        </p:cNvPr>
+        <p:cNvGrpSpPr/>
+        <p:nvPr/>
+      </p:nvGrpSpPr>
+      <p:grpSpPr>
+        <a:xfrm>
+          <a:off x="0" y="0"/>
+          <a:ext cx="0" cy="0"/>
+          <a:chOff x="0" y="0"/>
+          <a:chExt cx="0" cy="0"/>
+        </a:xfrm>
+      </p:grpSpPr>
+      <p:sp>
+        <p:nvSpPr>
+          <p:cNvPr id="2" name="Title 1">
+            <a:extLst>
+              <a:ext uri="{FF2B5EF4-FFF2-40B4-BE49-F238E27FC236}">
+                <a16:creationId xmlns:a16="http://schemas.microsoft.com/office/drawing/2014/main" id="{89D150CA-2C59-5C93-D9DD-6BA388303ED5}"/>
+              </a:ext>
+            </a:extLst>
+          </p:cNvPr>
+          <p:cNvSpPr>
+            <a:spLocks noGrp="1"/>
+          </p:cNvSpPr>
+          <p:nvPr>
+            <p:ph type="title"/>
+          </p:nvPr>
+        </p:nvSpPr>
+        <p:spPr>
+          <a:xfrm>
+            <a:off x="461839" y="-195623"/>
+            <a:ext cx="10515600" cy="1325563"/>
+          </a:xfrm>
+        </p:spPr>
+        <p:txBody>
+          <a:bodyPr/>
+          <a:lstStyle/>
+          <a:p>
+            <a:r>
+              <a:rPr lang="en-US" dirty="0"/>
+              <a:t>Introduction</a:t>
+            </a:r>
+          </a:p>
+        </p:txBody>
+      </p:sp>
+      <p:sp>
+        <p:nvSpPr>
+          <p:cNvPr id="3" name="Content Placeholder 2">
+            <a:extLst>
+              <a:ext uri="{FF2B5EF4-FFF2-40B4-BE49-F238E27FC236}">
+                <a16:creationId xmlns:a16="http://schemas.microsoft.com/office/drawing/2014/main" id="{15D960E9-E1E7-E0DB-86F0-C82CC7FC5C07}"/>
+              </a:ext>
+            </a:extLst>
+          </p:cNvPr>
+          <p:cNvSpPr>
+            <a:spLocks noGrp="1"/>
+          </p:cNvSpPr>
+          <p:nvPr>
+            <p:ph idx="1"/>
+          </p:nvPr>
+        </p:nvSpPr>
+        <p:spPr>
+          <a:xfrm>
+            <a:off x="461839" y="1264877"/>
+            <a:ext cx="10515600" cy="4351338"/>
+          </a:xfrm>
+        </p:spPr>
+        <p:txBody>
+          <a:bodyPr>
+            <a:normAutofit/>
+          </a:bodyPr>
+          <a:lstStyle/>
+          <a:p>
+            <a:pPr marL="0" indent="0">
+              <a:buNone/>
+            </a:pPr>
+            <a:r>
+              <a:rPr lang="en-US" dirty="0"/>
+              <a:t>Compared to arrays, linked lists can also give you better control over memory</a:t>
+            </a:r>
+          </a:p>
+          <a:p>
+            <a:pPr lvl="1"/>
+            <a:r>
+              <a:rPr lang="en-US" dirty="0"/>
+              <a:t>You can easily add one item at a time without needing to pre-allocate memory like you must do with a dynamic array</a:t>
+            </a:r>
+          </a:p>
+          <a:p>
+            <a:pPr marL="0" indent="0">
+              <a:buNone/>
+            </a:pPr>
+            <a:endParaRPr lang="en-US" dirty="0"/>
+          </a:p>
+        </p:txBody>
+      </p:sp>
+      <p:grpSp>
+        <p:nvGrpSpPr>
+          <p:cNvPr id="32" name="Group 31">
+            <a:extLst>
+              <a:ext uri="{FF2B5EF4-FFF2-40B4-BE49-F238E27FC236}">
+                <a16:creationId xmlns:a16="http://schemas.microsoft.com/office/drawing/2014/main" id="{2D0A7970-2A25-D66E-D7C7-7F0D2A17ABE7}"/>
+              </a:ext>
+            </a:extLst>
+          </p:cNvPr>
+          <p:cNvGrpSpPr/>
+          <p:nvPr/>
+        </p:nvGrpSpPr>
+        <p:grpSpPr>
+          <a:xfrm>
+            <a:off x="1449802" y="3296064"/>
+            <a:ext cx="5914662" cy="462224"/>
+            <a:chOff x="1932123" y="3818579"/>
+            <a:chExt cx="5914662" cy="462224"/>
+          </a:xfrm>
+        </p:grpSpPr>
+        <p:grpSp>
+          <p:nvGrpSpPr>
+            <p:cNvPr id="16" name="Group 15">
+              <a:extLst>
+                <a:ext uri="{FF2B5EF4-FFF2-40B4-BE49-F238E27FC236}">
+                  <a16:creationId xmlns:a16="http://schemas.microsoft.com/office/drawing/2014/main" id="{2D4D8BD6-C04A-AED7-E993-714AD32F1979}"/>
+                </a:ext>
+              </a:extLst>
+            </p:cNvPr>
+            <p:cNvGrpSpPr/>
+            <p:nvPr/>
+          </p:nvGrpSpPr>
+          <p:grpSpPr>
+            <a:xfrm>
+              <a:off x="1932123" y="3818579"/>
+              <a:ext cx="991947" cy="462224"/>
+              <a:chOff x="1932123" y="3818374"/>
+              <a:chExt cx="991947" cy="462224"/>
+            </a:xfrm>
+          </p:grpSpPr>
+          <p:sp>
+            <p:nvSpPr>
+              <p:cNvPr id="14" name="Rectangle 13">
+                <a:extLst>
+                  <a:ext uri="{FF2B5EF4-FFF2-40B4-BE49-F238E27FC236}">
+                    <a16:creationId xmlns:a16="http://schemas.microsoft.com/office/drawing/2014/main" id="{AEB2B787-CBD9-43C0-8FFC-45EB5DBB79AA}"/>
+                  </a:ext>
+                </a:extLst>
+              </p:cNvPr>
+              <p:cNvSpPr/>
+              <p:nvPr/>
+            </p:nvSpPr>
+            <p:spPr>
+              <a:xfrm>
+                <a:off x="1932123" y="3818374"/>
+                <a:ext cx="991947" cy="462224"/>
+              </a:xfrm>
+              <a:prstGeom prst="rect">
+                <a:avLst/>
+              </a:prstGeom>
+              <a:noFill/>
+            </p:spPr>
+            <p:style>
+              <a:lnRef idx="2">
+                <a:schemeClr val="accent1">
+                  <a:shade val="15000"/>
+                </a:schemeClr>
+              </a:lnRef>
+              <a:fillRef idx="1">
+                <a:schemeClr val="accent1"/>
+              </a:fillRef>
+              <a:effectRef idx="0">
+                <a:schemeClr val="accent1"/>
+              </a:effectRef>
+              <a:fontRef idx="minor">
+                <a:schemeClr val="lt1"/>
+              </a:fontRef>
+            </p:style>
+            <p:txBody>
+              <a:bodyPr rtlCol="0" anchor="ctr"/>
+              <a:lstStyle/>
+              <a:p>
+                <a:pPr algn="ctr"/>
+                <a:endParaRPr lang="en-US"/>
+              </a:p>
+            </p:txBody>
+          </p:sp>
+          <p:sp>
+            <p:nvSpPr>
+              <p:cNvPr id="15" name="TextBox 14">
+                <a:extLst>
+                  <a:ext uri="{FF2B5EF4-FFF2-40B4-BE49-F238E27FC236}">
+                    <a16:creationId xmlns:a16="http://schemas.microsoft.com/office/drawing/2014/main" id="{B47401B7-B786-2309-E692-A2ECE8777551}"/>
+                  </a:ext>
+                </a:extLst>
+              </p:cNvPr>
+              <p:cNvSpPr txBox="1"/>
+              <p:nvPr/>
+            </p:nvSpPr>
+            <p:spPr>
+              <a:xfrm>
+                <a:off x="2143724" y="3864820"/>
+                <a:ext cx="568745" cy="369332"/>
+              </a:xfrm>
+              <a:prstGeom prst="rect">
+                <a:avLst/>
+              </a:prstGeom>
+              <a:noFill/>
+            </p:spPr>
+            <p:txBody>
+              <a:bodyPr wrap="none" rtlCol="0">
+                <a:spAutoFit/>
+              </a:bodyPr>
+              <a:lstStyle/>
+              <a:p>
+                <a:r>
+                  <a:rPr lang="en-US" dirty="0"/>
+                  <a:t>LAX</a:t>
+                </a:r>
+              </a:p>
+            </p:txBody>
+          </p:sp>
+        </p:grpSp>
+        <p:grpSp>
+          <p:nvGrpSpPr>
+            <p:cNvPr id="17" name="Group 16">
+              <a:extLst>
+                <a:ext uri="{FF2B5EF4-FFF2-40B4-BE49-F238E27FC236}">
+                  <a16:creationId xmlns:a16="http://schemas.microsoft.com/office/drawing/2014/main" id="{F6B548F4-D133-7BD6-2112-18D8C0847E1D}"/>
+                </a:ext>
+              </a:extLst>
+            </p:cNvPr>
+            <p:cNvGrpSpPr/>
+            <p:nvPr/>
+          </p:nvGrpSpPr>
+          <p:grpSpPr>
+            <a:xfrm>
+              <a:off x="2916666" y="3818579"/>
+              <a:ext cx="991947" cy="462224"/>
+              <a:chOff x="1932123" y="3818374"/>
+              <a:chExt cx="991947" cy="462224"/>
+            </a:xfrm>
+          </p:grpSpPr>
+          <p:sp>
+            <p:nvSpPr>
+              <p:cNvPr id="18" name="Rectangle 17">
+                <a:extLst>
+                  <a:ext uri="{FF2B5EF4-FFF2-40B4-BE49-F238E27FC236}">
+                    <a16:creationId xmlns:a16="http://schemas.microsoft.com/office/drawing/2014/main" id="{AEBB3A32-34B0-248D-F253-067BD452EC81}"/>
+                  </a:ext>
+                </a:extLst>
+              </p:cNvPr>
+              <p:cNvSpPr/>
+              <p:nvPr/>
+            </p:nvSpPr>
+            <p:spPr>
+              <a:xfrm>
+                <a:off x="1932123" y="3818374"/>
+                <a:ext cx="991947" cy="462224"/>
+              </a:xfrm>
+              <a:prstGeom prst="rect">
+                <a:avLst/>
+              </a:prstGeom>
+              <a:noFill/>
+            </p:spPr>
+            <p:style>
+              <a:lnRef idx="2">
+                <a:schemeClr val="accent1">
+                  <a:shade val="15000"/>
+                </a:schemeClr>
+              </a:lnRef>
+              <a:fillRef idx="1">
+                <a:schemeClr val="accent1"/>
+              </a:fillRef>
+              <a:effectRef idx="0">
+                <a:schemeClr val="accent1"/>
+              </a:effectRef>
+              <a:fontRef idx="minor">
+                <a:schemeClr val="lt1"/>
+              </a:fontRef>
+            </p:style>
+            <p:txBody>
+              <a:bodyPr rtlCol="0" anchor="ctr"/>
+              <a:lstStyle/>
+              <a:p>
+                <a:pPr algn="ctr"/>
+                <a:endParaRPr lang="en-US"/>
+              </a:p>
+            </p:txBody>
+          </p:sp>
+          <p:sp>
+            <p:nvSpPr>
+              <p:cNvPr id="19" name="TextBox 18">
+                <a:extLst>
+                  <a:ext uri="{FF2B5EF4-FFF2-40B4-BE49-F238E27FC236}">
+                    <a16:creationId xmlns:a16="http://schemas.microsoft.com/office/drawing/2014/main" id="{A3DDFFCA-C1FE-6008-B21C-F326A3E97C58}"/>
+                  </a:ext>
+                </a:extLst>
+              </p:cNvPr>
+              <p:cNvSpPr txBox="1"/>
+              <p:nvPr/>
+            </p:nvSpPr>
+            <p:spPr>
+              <a:xfrm>
+                <a:off x="2143724" y="3864820"/>
+                <a:ext cx="630301" cy="369332"/>
+              </a:xfrm>
+              <a:prstGeom prst="rect">
+                <a:avLst/>
+              </a:prstGeom>
+              <a:noFill/>
+            </p:spPr>
+            <p:txBody>
+              <a:bodyPr wrap="none" rtlCol="0">
+                <a:spAutoFit/>
+              </a:bodyPr>
+              <a:lstStyle/>
+              <a:p>
+                <a:r>
+                  <a:rPr lang="en-US" dirty="0"/>
+                  <a:t>MSP</a:t>
+                </a:r>
+              </a:p>
+            </p:txBody>
+          </p:sp>
+        </p:grpSp>
+        <p:grpSp>
+          <p:nvGrpSpPr>
+            <p:cNvPr id="20" name="Group 19">
+              <a:extLst>
+                <a:ext uri="{FF2B5EF4-FFF2-40B4-BE49-F238E27FC236}">
+                  <a16:creationId xmlns:a16="http://schemas.microsoft.com/office/drawing/2014/main" id="{88E8E9FE-EB2E-7054-84B1-75D93EA91904}"/>
+                </a:ext>
+              </a:extLst>
+            </p:cNvPr>
+            <p:cNvGrpSpPr/>
+            <p:nvPr/>
+          </p:nvGrpSpPr>
+          <p:grpSpPr>
+            <a:xfrm>
+              <a:off x="3901209" y="3818579"/>
+              <a:ext cx="991947" cy="462224"/>
+              <a:chOff x="1932123" y="3818374"/>
+              <a:chExt cx="991947" cy="462224"/>
+            </a:xfrm>
+          </p:grpSpPr>
+          <p:sp>
+            <p:nvSpPr>
+              <p:cNvPr id="21" name="Rectangle 20">
+                <a:extLst>
+                  <a:ext uri="{FF2B5EF4-FFF2-40B4-BE49-F238E27FC236}">
+                    <a16:creationId xmlns:a16="http://schemas.microsoft.com/office/drawing/2014/main" id="{BC946040-6A62-AEED-D009-3F1352C8872A}"/>
+                  </a:ext>
+                </a:extLst>
+              </p:cNvPr>
+              <p:cNvSpPr/>
+              <p:nvPr/>
+            </p:nvSpPr>
+            <p:spPr>
+              <a:xfrm>
+                <a:off x="1932123" y="3818374"/>
+                <a:ext cx="991947" cy="462224"/>
+              </a:xfrm>
+              <a:prstGeom prst="rect">
+                <a:avLst/>
+              </a:prstGeom>
+              <a:noFill/>
+            </p:spPr>
+            <p:style>
+              <a:lnRef idx="2">
+                <a:schemeClr val="accent1">
+                  <a:shade val="15000"/>
+                </a:schemeClr>
+              </a:lnRef>
+              <a:fillRef idx="1">
+                <a:schemeClr val="accent1"/>
+              </a:fillRef>
+              <a:effectRef idx="0">
+                <a:schemeClr val="accent1"/>
+              </a:effectRef>
+              <a:fontRef idx="minor">
+                <a:schemeClr val="lt1"/>
+              </a:fontRef>
+            </p:style>
+            <p:txBody>
+              <a:bodyPr rtlCol="0" anchor="ctr"/>
+              <a:lstStyle/>
+              <a:p>
+                <a:pPr algn="ctr"/>
+                <a:endParaRPr lang="en-US"/>
+              </a:p>
+            </p:txBody>
+          </p:sp>
+          <p:sp>
+            <p:nvSpPr>
+              <p:cNvPr id="22" name="TextBox 21">
+                <a:extLst>
+                  <a:ext uri="{FF2B5EF4-FFF2-40B4-BE49-F238E27FC236}">
+                    <a16:creationId xmlns:a16="http://schemas.microsoft.com/office/drawing/2014/main" id="{1729F93F-4186-AAF8-BCC1-9894C41641A1}"/>
+                  </a:ext>
+                </a:extLst>
+              </p:cNvPr>
+              <p:cNvSpPr txBox="1"/>
+              <p:nvPr/>
+            </p:nvSpPr>
+            <p:spPr>
+              <a:xfrm>
+                <a:off x="2143724" y="3864820"/>
+                <a:ext cx="536365" cy="369332"/>
+              </a:xfrm>
+              <a:prstGeom prst="rect">
+                <a:avLst/>
+              </a:prstGeom>
+              <a:noFill/>
+            </p:spPr>
+            <p:txBody>
+              <a:bodyPr wrap="none" rtlCol="0">
+                <a:spAutoFit/>
+              </a:bodyPr>
+              <a:lstStyle/>
+              <a:p>
+                <a:r>
+                  <a:rPr lang="en-US" dirty="0"/>
+                  <a:t>ATL</a:t>
+                </a:r>
+              </a:p>
+            </p:txBody>
+          </p:sp>
+        </p:grpSp>
+        <p:grpSp>
+          <p:nvGrpSpPr>
+            <p:cNvPr id="23" name="Group 22">
+              <a:extLst>
+                <a:ext uri="{FF2B5EF4-FFF2-40B4-BE49-F238E27FC236}">
+                  <a16:creationId xmlns:a16="http://schemas.microsoft.com/office/drawing/2014/main" id="{B1D6BECB-CAEF-C72E-C617-631C1F8A1786}"/>
+                </a:ext>
+              </a:extLst>
+            </p:cNvPr>
+            <p:cNvGrpSpPr/>
+            <p:nvPr/>
+          </p:nvGrpSpPr>
+          <p:grpSpPr>
+            <a:xfrm>
+              <a:off x="4885752" y="3818579"/>
+              <a:ext cx="991947" cy="462224"/>
+              <a:chOff x="1932123" y="3818374"/>
+              <a:chExt cx="991947" cy="462224"/>
+            </a:xfrm>
+          </p:grpSpPr>
+          <p:sp>
+            <p:nvSpPr>
+              <p:cNvPr id="24" name="Rectangle 23">
+                <a:extLst>
+                  <a:ext uri="{FF2B5EF4-FFF2-40B4-BE49-F238E27FC236}">
+                    <a16:creationId xmlns:a16="http://schemas.microsoft.com/office/drawing/2014/main" id="{FB2C8AA1-9B59-61D0-6E06-91582558FAD7}"/>
+                  </a:ext>
+                </a:extLst>
+              </p:cNvPr>
+              <p:cNvSpPr/>
+              <p:nvPr/>
+            </p:nvSpPr>
+            <p:spPr>
+              <a:xfrm>
+                <a:off x="1932123" y="3818374"/>
+                <a:ext cx="991947" cy="462224"/>
+              </a:xfrm>
+              <a:prstGeom prst="rect">
+                <a:avLst/>
+              </a:prstGeom>
+              <a:noFill/>
+            </p:spPr>
+            <p:style>
+              <a:lnRef idx="2">
+                <a:schemeClr val="accent1">
+                  <a:shade val="15000"/>
+                </a:schemeClr>
+              </a:lnRef>
+              <a:fillRef idx="1">
+                <a:schemeClr val="accent1"/>
+              </a:fillRef>
+              <a:effectRef idx="0">
+                <a:schemeClr val="accent1"/>
+              </a:effectRef>
+              <a:fontRef idx="minor">
+                <a:schemeClr val="lt1"/>
+              </a:fontRef>
+            </p:style>
+            <p:txBody>
+              <a:bodyPr rtlCol="0" anchor="ctr"/>
+              <a:lstStyle/>
+              <a:p>
+                <a:pPr algn="ctr"/>
+                <a:endParaRPr lang="en-US"/>
+              </a:p>
+            </p:txBody>
+          </p:sp>
+          <p:sp>
+            <p:nvSpPr>
+              <p:cNvPr id="25" name="TextBox 24">
+                <a:extLst>
+                  <a:ext uri="{FF2B5EF4-FFF2-40B4-BE49-F238E27FC236}">
+                    <a16:creationId xmlns:a16="http://schemas.microsoft.com/office/drawing/2014/main" id="{CB7A0367-3E73-747A-7C5A-5310E9E50089}"/>
+                  </a:ext>
+                </a:extLst>
+              </p:cNvPr>
+              <p:cNvSpPr txBox="1"/>
+              <p:nvPr/>
+            </p:nvSpPr>
+            <p:spPr>
+              <a:xfrm>
+                <a:off x="2143724" y="3864820"/>
+                <a:ext cx="622286" cy="369332"/>
+              </a:xfrm>
+              <a:prstGeom prst="rect">
+                <a:avLst/>
+              </a:prstGeom>
+              <a:noFill/>
+            </p:spPr>
+            <p:txBody>
+              <a:bodyPr wrap="none" rtlCol="0">
+                <a:spAutoFit/>
+              </a:bodyPr>
+              <a:lstStyle/>
+              <a:p>
+                <a:r>
+                  <a:rPr lang="en-US" dirty="0"/>
+                  <a:t>BOS</a:t>
+                </a:r>
+              </a:p>
+            </p:txBody>
+          </p:sp>
+        </p:grpSp>
+        <p:grpSp>
+          <p:nvGrpSpPr>
+            <p:cNvPr id="26" name="Group 25">
+              <a:extLst>
+                <a:ext uri="{FF2B5EF4-FFF2-40B4-BE49-F238E27FC236}">
+                  <a16:creationId xmlns:a16="http://schemas.microsoft.com/office/drawing/2014/main" id="{EED73098-B743-F83E-6A95-A159E35D081D}"/>
+                </a:ext>
+              </a:extLst>
+            </p:cNvPr>
+            <p:cNvGrpSpPr/>
+            <p:nvPr/>
+          </p:nvGrpSpPr>
+          <p:grpSpPr>
+            <a:xfrm>
+              <a:off x="5870295" y="3818579"/>
+              <a:ext cx="991947" cy="462224"/>
+              <a:chOff x="1932123" y="3818374"/>
+              <a:chExt cx="991947" cy="462224"/>
+            </a:xfrm>
+          </p:grpSpPr>
+          <p:sp>
+            <p:nvSpPr>
+              <p:cNvPr id="27" name="Rectangle 26">
+                <a:extLst>
+                  <a:ext uri="{FF2B5EF4-FFF2-40B4-BE49-F238E27FC236}">
+                    <a16:creationId xmlns:a16="http://schemas.microsoft.com/office/drawing/2014/main" id="{DC0CEA91-7742-23E6-4A95-8A0F56F9786D}"/>
+                  </a:ext>
+                </a:extLst>
+              </p:cNvPr>
+              <p:cNvSpPr/>
+              <p:nvPr/>
+            </p:nvSpPr>
+            <p:spPr>
+              <a:xfrm>
+                <a:off x="1932123" y="3818374"/>
+                <a:ext cx="991947" cy="462224"/>
+              </a:xfrm>
+              <a:prstGeom prst="rect">
+                <a:avLst/>
+              </a:prstGeom>
+              <a:noFill/>
+            </p:spPr>
+            <p:style>
+              <a:lnRef idx="2">
+                <a:schemeClr val="accent1">
+                  <a:shade val="15000"/>
+                </a:schemeClr>
+              </a:lnRef>
+              <a:fillRef idx="1">
+                <a:schemeClr val="accent1"/>
+              </a:fillRef>
+              <a:effectRef idx="0">
+                <a:schemeClr val="accent1"/>
+              </a:effectRef>
+              <a:fontRef idx="minor">
+                <a:schemeClr val="lt1"/>
+              </a:fontRef>
+            </p:style>
+            <p:txBody>
+              <a:bodyPr rtlCol="0" anchor="ctr"/>
+              <a:lstStyle/>
+              <a:p>
+                <a:pPr algn="ctr"/>
+                <a:endParaRPr lang="en-US"/>
+              </a:p>
+            </p:txBody>
+          </p:sp>
+          <p:sp>
+            <p:nvSpPr>
+              <p:cNvPr id="28" name="TextBox 27">
+                <a:extLst>
+                  <a:ext uri="{FF2B5EF4-FFF2-40B4-BE49-F238E27FC236}">
+                    <a16:creationId xmlns:a16="http://schemas.microsoft.com/office/drawing/2014/main" id="{89529E77-AC49-2AE9-3D6B-48EF830625A3}"/>
+                  </a:ext>
+                </a:extLst>
+              </p:cNvPr>
+              <p:cNvSpPr txBox="1"/>
+              <p:nvPr/>
+            </p:nvSpPr>
+            <p:spPr>
+              <a:xfrm>
+                <a:off x="2143724" y="3864820"/>
+                <a:ext cx="530915" cy="369332"/>
+              </a:xfrm>
+              <a:prstGeom prst="rect">
+                <a:avLst/>
+              </a:prstGeom>
+              <a:noFill/>
+            </p:spPr>
+            <p:txBody>
+              <a:bodyPr wrap="none" rtlCol="0">
+                <a:spAutoFit/>
+              </a:bodyPr>
+              <a:lstStyle/>
+              <a:p>
+                <a:r>
+                  <a:rPr lang="en-US" dirty="0"/>
+                  <a:t>???</a:t>
+                </a:r>
+              </a:p>
+            </p:txBody>
+          </p:sp>
+        </p:grpSp>
+        <p:grpSp>
+          <p:nvGrpSpPr>
+            <p:cNvPr id="29" name="Group 28">
+              <a:extLst>
+                <a:ext uri="{FF2B5EF4-FFF2-40B4-BE49-F238E27FC236}">
+                  <a16:creationId xmlns:a16="http://schemas.microsoft.com/office/drawing/2014/main" id="{6EF0FD4B-77FD-EC70-165F-5218B0183B1B}"/>
+                </a:ext>
+              </a:extLst>
+            </p:cNvPr>
+            <p:cNvGrpSpPr/>
+            <p:nvPr/>
+          </p:nvGrpSpPr>
+          <p:grpSpPr>
+            <a:xfrm>
+              <a:off x="6854838" y="3818579"/>
+              <a:ext cx="991947" cy="462224"/>
+              <a:chOff x="1932123" y="3818374"/>
+              <a:chExt cx="991947" cy="462224"/>
+            </a:xfrm>
+          </p:grpSpPr>
+          <p:sp>
+            <p:nvSpPr>
+              <p:cNvPr id="30" name="Rectangle 29">
+                <a:extLst>
+                  <a:ext uri="{FF2B5EF4-FFF2-40B4-BE49-F238E27FC236}">
+                    <a16:creationId xmlns:a16="http://schemas.microsoft.com/office/drawing/2014/main" id="{2AE1541A-706A-5B2C-6407-00015EA6EB69}"/>
+                  </a:ext>
+                </a:extLst>
+              </p:cNvPr>
+              <p:cNvSpPr/>
+              <p:nvPr/>
+            </p:nvSpPr>
+            <p:spPr>
+              <a:xfrm>
+                <a:off x="1932123" y="3818374"/>
+                <a:ext cx="991947" cy="462224"/>
+              </a:xfrm>
+              <a:prstGeom prst="rect">
+                <a:avLst/>
+              </a:prstGeom>
+              <a:noFill/>
+            </p:spPr>
+            <p:style>
+              <a:lnRef idx="2">
+                <a:schemeClr val="accent1">
+                  <a:shade val="15000"/>
+                </a:schemeClr>
+              </a:lnRef>
+              <a:fillRef idx="1">
+                <a:schemeClr val="accent1"/>
+              </a:fillRef>
+              <a:effectRef idx="0">
+                <a:schemeClr val="accent1"/>
+              </a:effectRef>
+              <a:fontRef idx="minor">
+                <a:schemeClr val="lt1"/>
+              </a:fontRef>
+            </p:style>
+            <p:txBody>
+              <a:bodyPr rtlCol="0" anchor="ctr"/>
+              <a:lstStyle/>
+              <a:p>
+                <a:pPr algn="ctr"/>
+                <a:endParaRPr lang="en-US"/>
+              </a:p>
+            </p:txBody>
+          </p:sp>
+          <p:sp>
+            <p:nvSpPr>
+              <p:cNvPr id="31" name="TextBox 30">
+                <a:extLst>
+                  <a:ext uri="{FF2B5EF4-FFF2-40B4-BE49-F238E27FC236}">
+                    <a16:creationId xmlns:a16="http://schemas.microsoft.com/office/drawing/2014/main" id="{5455ACAA-9B92-FEE4-B18E-C1B44FC4D109}"/>
+                  </a:ext>
+                </a:extLst>
+              </p:cNvPr>
+              <p:cNvSpPr txBox="1"/>
+              <p:nvPr/>
+            </p:nvSpPr>
+            <p:spPr>
+              <a:xfrm>
+                <a:off x="2143724" y="3864820"/>
+                <a:ext cx="530915" cy="369332"/>
+              </a:xfrm>
+              <a:prstGeom prst="rect">
+                <a:avLst/>
+              </a:prstGeom>
+              <a:noFill/>
+            </p:spPr>
+            <p:txBody>
+              <a:bodyPr wrap="none" rtlCol="0">
+                <a:spAutoFit/>
+              </a:bodyPr>
+              <a:lstStyle/>
+              <a:p>
+                <a:r>
+                  <a:rPr lang="en-US" dirty="0"/>
+                  <a:t>???</a:t>
+                </a:r>
+              </a:p>
+            </p:txBody>
+          </p:sp>
+        </p:grpSp>
+      </p:grpSp>
+      <p:sp>
+        <p:nvSpPr>
+          <p:cNvPr id="33" name="TextBox 32">
+            <a:extLst>
+              <a:ext uri="{FF2B5EF4-FFF2-40B4-BE49-F238E27FC236}">
+                <a16:creationId xmlns:a16="http://schemas.microsoft.com/office/drawing/2014/main" id="{352B3158-A3B5-C77A-0E78-4ACDDEB1C74C}"/>
+              </a:ext>
+            </a:extLst>
+          </p:cNvPr>
+          <p:cNvSpPr txBox="1"/>
+          <p:nvPr/>
+        </p:nvSpPr>
+        <p:spPr>
+          <a:xfrm>
+            <a:off x="987816" y="3296064"/>
+            <a:ext cx="461986" cy="369332"/>
+          </a:xfrm>
+          <a:prstGeom prst="rect">
+            <a:avLst/>
+          </a:prstGeom>
+          <a:noFill/>
+        </p:spPr>
+        <p:txBody>
+          <a:bodyPr wrap="none" rtlCol="0">
+            <a:spAutoFit/>
+          </a:bodyPr>
+          <a:lstStyle/>
+          <a:p>
+            <a:r>
+              <a:rPr lang="en-US" dirty="0" err="1"/>
+              <a:t>arr</a:t>
+            </a:r>
+            <a:endParaRPr lang="en-US" dirty="0"/>
+          </a:p>
+        </p:txBody>
+      </p:sp>
+      <p:sp>
+        <p:nvSpPr>
+          <p:cNvPr id="5" name="TextBox 4">
+            <a:extLst>
+              <a:ext uri="{FF2B5EF4-FFF2-40B4-BE49-F238E27FC236}">
+                <a16:creationId xmlns:a16="http://schemas.microsoft.com/office/drawing/2014/main" id="{F00DEADA-A1E5-C005-36C8-3AAC20BC8FDE}"/>
+              </a:ext>
+            </a:extLst>
+          </p:cNvPr>
+          <p:cNvSpPr txBox="1"/>
+          <p:nvPr/>
+        </p:nvSpPr>
+        <p:spPr>
+          <a:xfrm>
+            <a:off x="5599575" y="2900198"/>
+            <a:ext cx="562975" cy="369332"/>
+          </a:xfrm>
+          <a:prstGeom prst="rect">
+            <a:avLst/>
+          </a:prstGeom>
+          <a:noFill/>
+        </p:spPr>
+        <p:txBody>
+          <a:bodyPr wrap="none" rtlCol="0">
+            <a:spAutoFit/>
+          </a:bodyPr>
+          <a:lstStyle/>
+          <a:p>
+            <a:r>
+              <a:rPr lang="en-US" dirty="0"/>
+              <a:t>end</a:t>
+            </a:r>
+          </a:p>
+        </p:txBody>
+      </p:sp>
+    </p:spTree>
+    <p:extLst>
+      <p:ext uri="{BB962C8B-B14F-4D97-AF65-F5344CB8AC3E}">
+        <p14:creationId xmlns:p14="http://schemas.microsoft.com/office/powerpoint/2010/main" val="3662698123"/>
+      </p:ext>
+    </p:extLst>
+  </p:cSld>
+  <p:clrMapOvr>
+    <a:masterClrMapping/>
+  </p:clrMapOvr>
+</p:sld>
+</file>
+
+<file path=ppt/slides/slide7.xml><?xml version="1.0" encoding="utf-8"?>
+<p:sld xmlns:a="http://schemas.openxmlformats.org/drawingml/2006/main" xmlns:r="http://schemas.openxmlformats.org/officeDocument/2006/relationships" xmlns:p="http://schemas.openxmlformats.org/presentationml/2006/main">
+  <p:cSld>
+    <p:spTree>
+      <p:nvGrpSpPr>
+        <p:cNvPr id="1" name="">
+          <a:extLst>
+            <a:ext uri="{FF2B5EF4-FFF2-40B4-BE49-F238E27FC236}">
+              <a16:creationId xmlns:a16="http://schemas.microsoft.com/office/drawing/2014/main" id="{A55372D0-B116-C30A-CDBB-77BDB51A72F3}"/>
+            </a:ext>
+          </a:extLst>
+        </p:cNvPr>
+        <p:cNvGrpSpPr/>
+        <p:nvPr/>
+      </p:nvGrpSpPr>
+      <p:grpSpPr>
+        <a:xfrm>
+          <a:off x="0" y="0"/>
+          <a:ext cx="0" cy="0"/>
+          <a:chOff x="0" y="0"/>
+          <a:chExt cx="0" cy="0"/>
+        </a:xfrm>
+      </p:grpSpPr>
+      <p:sp>
+        <p:nvSpPr>
+          <p:cNvPr id="2" name="Title 1">
+            <a:extLst>
+              <a:ext uri="{FF2B5EF4-FFF2-40B4-BE49-F238E27FC236}">
+                <a16:creationId xmlns:a16="http://schemas.microsoft.com/office/drawing/2014/main" id="{B2522637-D96E-2E7B-23EC-7BEFEF4616A6}"/>
+              </a:ext>
+            </a:extLst>
+          </p:cNvPr>
+          <p:cNvSpPr>
+            <a:spLocks noGrp="1"/>
+          </p:cNvSpPr>
+          <p:nvPr>
+            <p:ph type="title"/>
+          </p:nvPr>
+        </p:nvSpPr>
+        <p:spPr>
+          <a:xfrm>
+            <a:off x="461839" y="-195623"/>
+            <a:ext cx="10515600" cy="1325563"/>
+          </a:xfrm>
+        </p:spPr>
+        <p:txBody>
+          <a:bodyPr/>
+          <a:lstStyle/>
+          <a:p>
+            <a:r>
+              <a:rPr lang="en-US" dirty="0"/>
+              <a:t>Introduction</a:t>
+            </a:r>
+          </a:p>
+        </p:txBody>
+      </p:sp>
+      <p:sp>
+        <p:nvSpPr>
+          <p:cNvPr id="3" name="Content Placeholder 2">
+            <a:extLst>
+              <a:ext uri="{FF2B5EF4-FFF2-40B4-BE49-F238E27FC236}">
+                <a16:creationId xmlns:a16="http://schemas.microsoft.com/office/drawing/2014/main" id="{0A7B7725-32CA-8C47-CE1A-7C69AE0C0A21}"/>
+              </a:ext>
+            </a:extLst>
+          </p:cNvPr>
+          <p:cNvSpPr>
+            <a:spLocks noGrp="1"/>
+          </p:cNvSpPr>
+          <p:nvPr>
+            <p:ph idx="1"/>
+          </p:nvPr>
+        </p:nvSpPr>
+        <p:spPr>
+          <a:xfrm>
+            <a:off x="461839" y="1264877"/>
+            <a:ext cx="10515600" cy="4351338"/>
+          </a:xfrm>
+        </p:spPr>
+        <p:txBody>
+          <a:bodyPr>
+            <a:normAutofit/>
+          </a:bodyPr>
+          <a:lstStyle/>
+          <a:p>
+            <a:pPr marL="0" indent="0">
+              <a:buNone/>
+            </a:pPr>
+            <a:r>
+              <a:rPr lang="en-US" dirty="0"/>
+              <a:t>Compared to arrays, linked lists can also give you better control over memory</a:t>
+            </a:r>
+          </a:p>
+          <a:p>
+            <a:pPr lvl="1"/>
+            <a:r>
+              <a:rPr lang="en-US" dirty="0"/>
+              <a:t>You can easily add one item at a time without needing to pre-allocate memory like you must do with a dynamic array</a:t>
+            </a:r>
+          </a:p>
+          <a:p>
+            <a:pPr marL="0" indent="0">
+              <a:buNone/>
+            </a:pPr>
+            <a:endParaRPr lang="en-US" dirty="0"/>
+          </a:p>
+        </p:txBody>
+      </p:sp>
+      <p:grpSp>
+        <p:nvGrpSpPr>
+          <p:cNvPr id="32" name="Group 31">
+            <a:extLst>
+              <a:ext uri="{FF2B5EF4-FFF2-40B4-BE49-F238E27FC236}">
+                <a16:creationId xmlns:a16="http://schemas.microsoft.com/office/drawing/2014/main" id="{87C46FE8-0F98-A415-486B-8AC828D387EA}"/>
+              </a:ext>
+            </a:extLst>
+          </p:cNvPr>
+          <p:cNvGrpSpPr/>
+          <p:nvPr/>
+        </p:nvGrpSpPr>
+        <p:grpSpPr>
+          <a:xfrm>
+            <a:off x="1449802" y="3296064"/>
+            <a:ext cx="5914662" cy="462224"/>
+            <a:chOff x="1932123" y="3818579"/>
+            <a:chExt cx="5914662" cy="462224"/>
+          </a:xfrm>
+        </p:grpSpPr>
+        <p:grpSp>
+          <p:nvGrpSpPr>
+            <p:cNvPr id="16" name="Group 15">
+              <a:extLst>
+                <a:ext uri="{FF2B5EF4-FFF2-40B4-BE49-F238E27FC236}">
+                  <a16:creationId xmlns:a16="http://schemas.microsoft.com/office/drawing/2014/main" id="{8E666B28-A0DC-5B14-4D69-68542A5498B5}"/>
+                </a:ext>
+              </a:extLst>
+            </p:cNvPr>
+            <p:cNvGrpSpPr/>
+            <p:nvPr/>
+          </p:nvGrpSpPr>
+          <p:grpSpPr>
+            <a:xfrm>
+              <a:off x="1932123" y="3818579"/>
+              <a:ext cx="991947" cy="462224"/>
+              <a:chOff x="1932123" y="3818374"/>
+              <a:chExt cx="991947" cy="462224"/>
+            </a:xfrm>
+          </p:grpSpPr>
+          <p:sp>
+            <p:nvSpPr>
+              <p:cNvPr id="14" name="Rectangle 13">
+                <a:extLst>
+                  <a:ext uri="{FF2B5EF4-FFF2-40B4-BE49-F238E27FC236}">
+                    <a16:creationId xmlns:a16="http://schemas.microsoft.com/office/drawing/2014/main" id="{21D591CE-93FC-FB06-FA12-155D7C00095E}"/>
+                  </a:ext>
+                </a:extLst>
+              </p:cNvPr>
+              <p:cNvSpPr/>
+              <p:nvPr/>
+            </p:nvSpPr>
+            <p:spPr>
+              <a:xfrm>
+                <a:off x="1932123" y="3818374"/>
+                <a:ext cx="991947" cy="462224"/>
+              </a:xfrm>
+              <a:prstGeom prst="rect">
+                <a:avLst/>
+              </a:prstGeom>
+              <a:noFill/>
+            </p:spPr>
+            <p:style>
+              <a:lnRef idx="2">
+                <a:schemeClr val="accent1">
+                  <a:shade val="15000"/>
+                </a:schemeClr>
+              </a:lnRef>
+              <a:fillRef idx="1">
+                <a:schemeClr val="accent1"/>
+              </a:fillRef>
+              <a:effectRef idx="0">
+                <a:schemeClr val="accent1"/>
+              </a:effectRef>
+              <a:fontRef idx="minor">
+                <a:schemeClr val="lt1"/>
+              </a:fontRef>
+            </p:style>
+            <p:txBody>
+              <a:bodyPr rtlCol="0" anchor="ctr"/>
+              <a:lstStyle/>
+              <a:p>
+                <a:pPr algn="ctr"/>
+                <a:endParaRPr lang="en-US"/>
+              </a:p>
+            </p:txBody>
+          </p:sp>
+          <p:sp>
+            <p:nvSpPr>
+              <p:cNvPr id="15" name="TextBox 14">
+                <a:extLst>
+                  <a:ext uri="{FF2B5EF4-FFF2-40B4-BE49-F238E27FC236}">
+                    <a16:creationId xmlns:a16="http://schemas.microsoft.com/office/drawing/2014/main" id="{585A922C-F5B8-EA55-314B-C0C1013E813C}"/>
+                  </a:ext>
+                </a:extLst>
+              </p:cNvPr>
+              <p:cNvSpPr txBox="1"/>
+              <p:nvPr/>
+            </p:nvSpPr>
+            <p:spPr>
+              <a:xfrm>
+                <a:off x="2143724" y="3864820"/>
+                <a:ext cx="568745" cy="369332"/>
+              </a:xfrm>
+              <a:prstGeom prst="rect">
+                <a:avLst/>
+              </a:prstGeom>
+              <a:noFill/>
+            </p:spPr>
+            <p:txBody>
+              <a:bodyPr wrap="none" rtlCol="0">
+                <a:spAutoFit/>
+              </a:bodyPr>
+              <a:lstStyle/>
+              <a:p>
+                <a:r>
+                  <a:rPr lang="en-US" dirty="0"/>
+                  <a:t>LAX</a:t>
+                </a:r>
+              </a:p>
+            </p:txBody>
+          </p:sp>
+        </p:grpSp>
+        <p:grpSp>
+          <p:nvGrpSpPr>
+            <p:cNvPr id="17" name="Group 16">
+              <a:extLst>
+                <a:ext uri="{FF2B5EF4-FFF2-40B4-BE49-F238E27FC236}">
+                  <a16:creationId xmlns:a16="http://schemas.microsoft.com/office/drawing/2014/main" id="{2D80EFE4-BD6B-67DF-4FBE-18B0087E0DE3}"/>
+                </a:ext>
+              </a:extLst>
+            </p:cNvPr>
+            <p:cNvGrpSpPr/>
+            <p:nvPr/>
+          </p:nvGrpSpPr>
+          <p:grpSpPr>
+            <a:xfrm>
+              <a:off x="2916666" y="3818579"/>
+              <a:ext cx="991947" cy="462224"/>
+              <a:chOff x="1932123" y="3818374"/>
+              <a:chExt cx="991947" cy="462224"/>
+            </a:xfrm>
+          </p:grpSpPr>
+          <p:sp>
+            <p:nvSpPr>
+              <p:cNvPr id="18" name="Rectangle 17">
+                <a:extLst>
+                  <a:ext uri="{FF2B5EF4-FFF2-40B4-BE49-F238E27FC236}">
+                    <a16:creationId xmlns:a16="http://schemas.microsoft.com/office/drawing/2014/main" id="{09CA33AE-8DC0-B627-40B7-0FDEC89D2BE0}"/>
+                  </a:ext>
+                </a:extLst>
+              </p:cNvPr>
+              <p:cNvSpPr/>
+              <p:nvPr/>
+            </p:nvSpPr>
+            <p:spPr>
+              <a:xfrm>
+                <a:off x="1932123" y="3818374"/>
+                <a:ext cx="991947" cy="462224"/>
+              </a:xfrm>
+              <a:prstGeom prst="rect">
+                <a:avLst/>
+              </a:prstGeom>
+              <a:noFill/>
+            </p:spPr>
+            <p:style>
+              <a:lnRef idx="2">
+                <a:schemeClr val="accent1">
+                  <a:shade val="15000"/>
+                </a:schemeClr>
+              </a:lnRef>
+              <a:fillRef idx="1">
+                <a:schemeClr val="accent1"/>
+              </a:fillRef>
+              <a:effectRef idx="0">
+                <a:schemeClr val="accent1"/>
+              </a:effectRef>
+              <a:fontRef idx="minor">
+                <a:schemeClr val="lt1"/>
+              </a:fontRef>
+            </p:style>
+            <p:txBody>
+              <a:bodyPr rtlCol="0" anchor="ctr"/>
+              <a:lstStyle/>
+              <a:p>
+                <a:pPr algn="ctr"/>
+                <a:endParaRPr lang="en-US"/>
+              </a:p>
+            </p:txBody>
+          </p:sp>
+          <p:sp>
+            <p:nvSpPr>
+              <p:cNvPr id="19" name="TextBox 18">
+                <a:extLst>
+                  <a:ext uri="{FF2B5EF4-FFF2-40B4-BE49-F238E27FC236}">
+                    <a16:creationId xmlns:a16="http://schemas.microsoft.com/office/drawing/2014/main" id="{80BB4DD6-819E-6A76-19B7-6D31F8FED146}"/>
+                  </a:ext>
+                </a:extLst>
+              </p:cNvPr>
+              <p:cNvSpPr txBox="1"/>
+              <p:nvPr/>
+            </p:nvSpPr>
+            <p:spPr>
+              <a:xfrm>
+                <a:off x="2143724" y="3864820"/>
+                <a:ext cx="630301" cy="369332"/>
+              </a:xfrm>
+              <a:prstGeom prst="rect">
+                <a:avLst/>
+              </a:prstGeom>
+              <a:noFill/>
+            </p:spPr>
+            <p:txBody>
+              <a:bodyPr wrap="none" rtlCol="0">
+                <a:spAutoFit/>
+              </a:bodyPr>
+              <a:lstStyle/>
+              <a:p>
+                <a:r>
+                  <a:rPr lang="en-US" dirty="0"/>
+                  <a:t>MSP</a:t>
+                </a:r>
+              </a:p>
+            </p:txBody>
+          </p:sp>
+        </p:grpSp>
+        <p:grpSp>
+          <p:nvGrpSpPr>
+            <p:cNvPr id="20" name="Group 19">
+              <a:extLst>
+                <a:ext uri="{FF2B5EF4-FFF2-40B4-BE49-F238E27FC236}">
+                  <a16:creationId xmlns:a16="http://schemas.microsoft.com/office/drawing/2014/main" id="{BC123DDF-2A05-FD31-A598-722F5037A712}"/>
+                </a:ext>
+              </a:extLst>
+            </p:cNvPr>
+            <p:cNvGrpSpPr/>
+            <p:nvPr/>
+          </p:nvGrpSpPr>
+          <p:grpSpPr>
+            <a:xfrm>
+              <a:off x="3901209" y="3818579"/>
+              <a:ext cx="991947" cy="462224"/>
+              <a:chOff x="1932123" y="3818374"/>
+              <a:chExt cx="991947" cy="462224"/>
+            </a:xfrm>
+          </p:grpSpPr>
+          <p:sp>
+            <p:nvSpPr>
+              <p:cNvPr id="21" name="Rectangle 20">
+                <a:extLst>
+                  <a:ext uri="{FF2B5EF4-FFF2-40B4-BE49-F238E27FC236}">
+                    <a16:creationId xmlns:a16="http://schemas.microsoft.com/office/drawing/2014/main" id="{55F95D79-2219-BC7C-4C69-CAA1998DB1FC}"/>
+                  </a:ext>
+                </a:extLst>
+              </p:cNvPr>
+              <p:cNvSpPr/>
+              <p:nvPr/>
+            </p:nvSpPr>
+            <p:spPr>
+              <a:xfrm>
+                <a:off x="1932123" y="3818374"/>
+                <a:ext cx="991947" cy="462224"/>
+              </a:xfrm>
+              <a:prstGeom prst="rect">
+                <a:avLst/>
+              </a:prstGeom>
+              <a:noFill/>
+            </p:spPr>
+            <p:style>
+              <a:lnRef idx="2">
+                <a:schemeClr val="accent1">
+                  <a:shade val="15000"/>
+                </a:schemeClr>
+              </a:lnRef>
+              <a:fillRef idx="1">
+                <a:schemeClr val="accent1"/>
+              </a:fillRef>
+              <a:effectRef idx="0">
+                <a:schemeClr val="accent1"/>
+              </a:effectRef>
+              <a:fontRef idx="minor">
+                <a:schemeClr val="lt1"/>
+              </a:fontRef>
+            </p:style>
+            <p:txBody>
+              <a:bodyPr rtlCol="0" anchor="ctr"/>
+              <a:lstStyle/>
+              <a:p>
+                <a:pPr algn="ctr"/>
+                <a:endParaRPr lang="en-US"/>
+              </a:p>
+            </p:txBody>
+          </p:sp>
+          <p:sp>
+            <p:nvSpPr>
+              <p:cNvPr id="22" name="TextBox 21">
+                <a:extLst>
+                  <a:ext uri="{FF2B5EF4-FFF2-40B4-BE49-F238E27FC236}">
+                    <a16:creationId xmlns:a16="http://schemas.microsoft.com/office/drawing/2014/main" id="{F0DF053C-C60E-75A5-C9A9-96E95C560A5F}"/>
+                  </a:ext>
+                </a:extLst>
+              </p:cNvPr>
+              <p:cNvSpPr txBox="1"/>
+              <p:nvPr/>
+            </p:nvSpPr>
+            <p:spPr>
+              <a:xfrm>
+                <a:off x="2143724" y="3864820"/>
+                <a:ext cx="536365" cy="369332"/>
+              </a:xfrm>
+              <a:prstGeom prst="rect">
+                <a:avLst/>
+              </a:prstGeom>
+              <a:noFill/>
+            </p:spPr>
+            <p:txBody>
+              <a:bodyPr wrap="none" rtlCol="0">
+                <a:spAutoFit/>
+              </a:bodyPr>
+              <a:lstStyle/>
+              <a:p>
+                <a:r>
+                  <a:rPr lang="en-US" dirty="0"/>
+                  <a:t>ATL</a:t>
+                </a:r>
+              </a:p>
+            </p:txBody>
+          </p:sp>
+        </p:grpSp>
+        <p:grpSp>
+          <p:nvGrpSpPr>
+            <p:cNvPr id="23" name="Group 22">
+              <a:extLst>
+                <a:ext uri="{FF2B5EF4-FFF2-40B4-BE49-F238E27FC236}">
+                  <a16:creationId xmlns:a16="http://schemas.microsoft.com/office/drawing/2014/main" id="{ED4B23A8-FB37-96FD-5654-844F13ED73FA}"/>
+                </a:ext>
+              </a:extLst>
+            </p:cNvPr>
+            <p:cNvGrpSpPr/>
+            <p:nvPr/>
+          </p:nvGrpSpPr>
+          <p:grpSpPr>
+            <a:xfrm>
+              <a:off x="4885752" y="3818579"/>
+              <a:ext cx="991947" cy="462224"/>
+              <a:chOff x="1932123" y="3818374"/>
+              <a:chExt cx="991947" cy="462224"/>
+            </a:xfrm>
+          </p:grpSpPr>
+          <p:sp>
+            <p:nvSpPr>
+              <p:cNvPr id="24" name="Rectangle 23">
+                <a:extLst>
+                  <a:ext uri="{FF2B5EF4-FFF2-40B4-BE49-F238E27FC236}">
+                    <a16:creationId xmlns:a16="http://schemas.microsoft.com/office/drawing/2014/main" id="{96EA4436-E2B1-70DD-D4C5-7A24FB6DA273}"/>
+                  </a:ext>
+                </a:extLst>
+              </p:cNvPr>
+              <p:cNvSpPr/>
+              <p:nvPr/>
+            </p:nvSpPr>
+            <p:spPr>
+              <a:xfrm>
+                <a:off x="1932123" y="3818374"/>
+                <a:ext cx="991947" cy="462224"/>
+              </a:xfrm>
+              <a:prstGeom prst="rect">
+                <a:avLst/>
+              </a:prstGeom>
+              <a:noFill/>
+            </p:spPr>
+            <p:style>
+              <a:lnRef idx="2">
+                <a:schemeClr val="accent1">
+                  <a:shade val="15000"/>
+                </a:schemeClr>
+              </a:lnRef>
+              <a:fillRef idx="1">
+                <a:schemeClr val="accent1"/>
+              </a:fillRef>
+              <a:effectRef idx="0">
+                <a:schemeClr val="accent1"/>
+              </a:effectRef>
+              <a:fontRef idx="minor">
+                <a:schemeClr val="lt1"/>
+              </a:fontRef>
+            </p:style>
+            <p:txBody>
+              <a:bodyPr rtlCol="0" anchor="ctr"/>
+              <a:lstStyle/>
+              <a:p>
+                <a:pPr algn="ctr"/>
+                <a:endParaRPr lang="en-US"/>
+              </a:p>
+            </p:txBody>
+          </p:sp>
+          <p:sp>
+            <p:nvSpPr>
+              <p:cNvPr id="25" name="TextBox 24">
+                <a:extLst>
+                  <a:ext uri="{FF2B5EF4-FFF2-40B4-BE49-F238E27FC236}">
+                    <a16:creationId xmlns:a16="http://schemas.microsoft.com/office/drawing/2014/main" id="{502766F1-B37A-D242-2C81-FBE57CAE3232}"/>
+                  </a:ext>
+                </a:extLst>
+              </p:cNvPr>
+              <p:cNvSpPr txBox="1"/>
+              <p:nvPr/>
+            </p:nvSpPr>
+            <p:spPr>
+              <a:xfrm>
+                <a:off x="2143724" y="3864820"/>
+                <a:ext cx="622286" cy="369332"/>
+              </a:xfrm>
+              <a:prstGeom prst="rect">
+                <a:avLst/>
+              </a:prstGeom>
+              <a:noFill/>
+            </p:spPr>
+            <p:txBody>
+              <a:bodyPr wrap="none" rtlCol="0">
+                <a:spAutoFit/>
+              </a:bodyPr>
+              <a:lstStyle/>
+              <a:p>
+                <a:r>
+                  <a:rPr lang="en-US" dirty="0"/>
+                  <a:t>BOS</a:t>
+                </a:r>
+              </a:p>
+            </p:txBody>
+          </p:sp>
+        </p:grpSp>
+        <p:grpSp>
+          <p:nvGrpSpPr>
+            <p:cNvPr id="26" name="Group 25">
+              <a:extLst>
+                <a:ext uri="{FF2B5EF4-FFF2-40B4-BE49-F238E27FC236}">
+                  <a16:creationId xmlns:a16="http://schemas.microsoft.com/office/drawing/2014/main" id="{82BAEB05-DBE3-6E7D-C2E1-F368B2AC7BE1}"/>
+                </a:ext>
+              </a:extLst>
+            </p:cNvPr>
+            <p:cNvGrpSpPr/>
+            <p:nvPr/>
+          </p:nvGrpSpPr>
+          <p:grpSpPr>
+            <a:xfrm>
+              <a:off x="5870295" y="3818579"/>
+              <a:ext cx="991947" cy="462224"/>
+              <a:chOff x="1932123" y="3818374"/>
+              <a:chExt cx="991947" cy="462224"/>
+            </a:xfrm>
+          </p:grpSpPr>
+          <p:sp>
+            <p:nvSpPr>
+              <p:cNvPr id="27" name="Rectangle 26">
+                <a:extLst>
+                  <a:ext uri="{FF2B5EF4-FFF2-40B4-BE49-F238E27FC236}">
+                    <a16:creationId xmlns:a16="http://schemas.microsoft.com/office/drawing/2014/main" id="{45838489-C5AE-8898-C3D1-994913D22505}"/>
+                  </a:ext>
+                </a:extLst>
+              </p:cNvPr>
+              <p:cNvSpPr/>
+              <p:nvPr/>
+            </p:nvSpPr>
+            <p:spPr>
+              <a:xfrm>
+                <a:off x="1932123" y="3818374"/>
+                <a:ext cx="991947" cy="462224"/>
+              </a:xfrm>
+              <a:prstGeom prst="rect">
+                <a:avLst/>
+              </a:prstGeom>
+              <a:noFill/>
+            </p:spPr>
+            <p:style>
+              <a:lnRef idx="2">
+                <a:schemeClr val="accent1">
+                  <a:shade val="15000"/>
+                </a:schemeClr>
+              </a:lnRef>
+              <a:fillRef idx="1">
+                <a:schemeClr val="accent1"/>
+              </a:fillRef>
+              <a:effectRef idx="0">
+                <a:schemeClr val="accent1"/>
+              </a:effectRef>
+              <a:fontRef idx="minor">
+                <a:schemeClr val="lt1"/>
+              </a:fontRef>
+            </p:style>
+            <p:txBody>
+              <a:bodyPr rtlCol="0" anchor="ctr"/>
+              <a:lstStyle/>
+              <a:p>
+                <a:pPr algn="ctr"/>
+                <a:endParaRPr lang="en-US"/>
+              </a:p>
+            </p:txBody>
+          </p:sp>
+          <p:sp>
+            <p:nvSpPr>
+              <p:cNvPr id="28" name="TextBox 27">
+                <a:extLst>
+                  <a:ext uri="{FF2B5EF4-FFF2-40B4-BE49-F238E27FC236}">
+                    <a16:creationId xmlns:a16="http://schemas.microsoft.com/office/drawing/2014/main" id="{6F2C3B80-43EC-2C6A-0E0A-1E046FA9CFC2}"/>
+                  </a:ext>
+                </a:extLst>
+              </p:cNvPr>
+              <p:cNvSpPr txBox="1"/>
+              <p:nvPr/>
+            </p:nvSpPr>
+            <p:spPr>
+              <a:xfrm>
+                <a:off x="2143724" y="3864820"/>
+                <a:ext cx="530915" cy="369332"/>
+              </a:xfrm>
+              <a:prstGeom prst="rect">
+                <a:avLst/>
+              </a:prstGeom>
+              <a:noFill/>
+            </p:spPr>
+            <p:txBody>
+              <a:bodyPr wrap="none" rtlCol="0">
+                <a:spAutoFit/>
+              </a:bodyPr>
+              <a:lstStyle/>
+              <a:p>
+                <a:r>
+                  <a:rPr lang="en-US" dirty="0"/>
+                  <a:t>???</a:t>
+                </a:r>
+              </a:p>
+            </p:txBody>
+          </p:sp>
+        </p:grpSp>
+        <p:grpSp>
+          <p:nvGrpSpPr>
+            <p:cNvPr id="29" name="Group 28">
+              <a:extLst>
+                <a:ext uri="{FF2B5EF4-FFF2-40B4-BE49-F238E27FC236}">
+                  <a16:creationId xmlns:a16="http://schemas.microsoft.com/office/drawing/2014/main" id="{58A99B79-F5C9-714A-F2CA-8D5843432F18}"/>
+                </a:ext>
+              </a:extLst>
+            </p:cNvPr>
+            <p:cNvGrpSpPr/>
+            <p:nvPr/>
+          </p:nvGrpSpPr>
+          <p:grpSpPr>
+            <a:xfrm>
+              <a:off x="6854838" y="3818579"/>
+              <a:ext cx="991947" cy="462224"/>
+              <a:chOff x="1932123" y="3818374"/>
+              <a:chExt cx="991947" cy="462224"/>
+            </a:xfrm>
+          </p:grpSpPr>
+          <p:sp>
+            <p:nvSpPr>
+              <p:cNvPr id="30" name="Rectangle 29">
+                <a:extLst>
+                  <a:ext uri="{FF2B5EF4-FFF2-40B4-BE49-F238E27FC236}">
+                    <a16:creationId xmlns:a16="http://schemas.microsoft.com/office/drawing/2014/main" id="{EA17269E-89E9-7378-D72F-F4E303B9DD48}"/>
+                  </a:ext>
+                </a:extLst>
+              </p:cNvPr>
+              <p:cNvSpPr/>
+              <p:nvPr/>
+            </p:nvSpPr>
+            <p:spPr>
+              <a:xfrm>
+                <a:off x="1932123" y="3818374"/>
+                <a:ext cx="991947" cy="462224"/>
+              </a:xfrm>
+              <a:prstGeom prst="rect">
+                <a:avLst/>
+              </a:prstGeom>
+              <a:noFill/>
+            </p:spPr>
+            <p:style>
+              <a:lnRef idx="2">
+                <a:schemeClr val="accent1">
+                  <a:shade val="15000"/>
+                </a:schemeClr>
+              </a:lnRef>
+              <a:fillRef idx="1">
+                <a:schemeClr val="accent1"/>
+              </a:fillRef>
+              <a:effectRef idx="0">
+                <a:schemeClr val="accent1"/>
+              </a:effectRef>
+              <a:fontRef idx="minor">
+                <a:schemeClr val="lt1"/>
+              </a:fontRef>
+            </p:style>
+            <p:txBody>
+              <a:bodyPr rtlCol="0" anchor="ctr"/>
+              <a:lstStyle/>
+              <a:p>
+                <a:pPr algn="ctr"/>
+                <a:endParaRPr lang="en-US"/>
+              </a:p>
+            </p:txBody>
+          </p:sp>
+          <p:sp>
+            <p:nvSpPr>
+              <p:cNvPr id="31" name="TextBox 30">
+                <a:extLst>
+                  <a:ext uri="{FF2B5EF4-FFF2-40B4-BE49-F238E27FC236}">
+                    <a16:creationId xmlns:a16="http://schemas.microsoft.com/office/drawing/2014/main" id="{1B5E5BD0-F0A3-6B0A-6C89-650AC586B7D5}"/>
+                  </a:ext>
+                </a:extLst>
+              </p:cNvPr>
+              <p:cNvSpPr txBox="1"/>
+              <p:nvPr/>
+            </p:nvSpPr>
+            <p:spPr>
+              <a:xfrm>
+                <a:off x="2143724" y="3864820"/>
+                <a:ext cx="530915" cy="369332"/>
+              </a:xfrm>
+              <a:prstGeom prst="rect">
+                <a:avLst/>
+              </a:prstGeom>
+              <a:noFill/>
+            </p:spPr>
+            <p:txBody>
+              <a:bodyPr wrap="none" rtlCol="0">
+                <a:spAutoFit/>
+              </a:bodyPr>
+              <a:lstStyle/>
+              <a:p>
+                <a:r>
+                  <a:rPr lang="en-US" dirty="0"/>
+                  <a:t>???</a:t>
+                </a:r>
+              </a:p>
+            </p:txBody>
+          </p:sp>
+        </p:grpSp>
+      </p:grpSp>
+      <p:sp>
+        <p:nvSpPr>
+          <p:cNvPr id="33" name="TextBox 32">
+            <a:extLst>
+              <a:ext uri="{FF2B5EF4-FFF2-40B4-BE49-F238E27FC236}">
+                <a16:creationId xmlns:a16="http://schemas.microsoft.com/office/drawing/2014/main" id="{0FD4CDDE-CCAD-1010-70CD-93E3D00A6285}"/>
+              </a:ext>
+            </a:extLst>
+          </p:cNvPr>
+          <p:cNvSpPr txBox="1"/>
+          <p:nvPr/>
+        </p:nvSpPr>
+        <p:spPr>
+          <a:xfrm>
+            <a:off x="987816" y="3296064"/>
+            <a:ext cx="461986" cy="369332"/>
+          </a:xfrm>
+          <a:prstGeom prst="rect">
+            <a:avLst/>
+          </a:prstGeom>
+          <a:noFill/>
+        </p:spPr>
+        <p:txBody>
+          <a:bodyPr wrap="none" rtlCol="0">
+            <a:spAutoFit/>
+          </a:bodyPr>
+          <a:lstStyle/>
+          <a:p>
+            <a:r>
+              <a:rPr lang="en-US" dirty="0" err="1"/>
+              <a:t>arr</a:t>
+            </a:r>
+            <a:endParaRPr lang="en-US" dirty="0"/>
+          </a:p>
+        </p:txBody>
+      </p:sp>
+      <p:sp>
+        <p:nvSpPr>
+          <p:cNvPr id="5" name="TextBox 4">
+            <a:extLst>
+              <a:ext uri="{FF2B5EF4-FFF2-40B4-BE49-F238E27FC236}">
+                <a16:creationId xmlns:a16="http://schemas.microsoft.com/office/drawing/2014/main" id="{C49C81BA-EBEC-ABF3-7D3E-2E0A6836CB18}"/>
+              </a:ext>
+            </a:extLst>
+          </p:cNvPr>
+          <p:cNvSpPr txBox="1"/>
+          <p:nvPr/>
+        </p:nvSpPr>
+        <p:spPr>
+          <a:xfrm>
+            <a:off x="5599575" y="2900198"/>
+            <a:ext cx="562975" cy="369332"/>
+          </a:xfrm>
+          <a:prstGeom prst="rect">
+            <a:avLst/>
+          </a:prstGeom>
+          <a:noFill/>
+        </p:spPr>
+        <p:txBody>
+          <a:bodyPr wrap="none" rtlCol="0">
+            <a:spAutoFit/>
+          </a:bodyPr>
+          <a:lstStyle/>
+          <a:p>
+            <a:r>
+              <a:rPr lang="en-US" dirty="0"/>
+              <a:t>end</a:t>
+            </a:r>
+          </a:p>
+        </p:txBody>
+      </p:sp>
+      <p:grpSp>
+        <p:nvGrpSpPr>
+          <p:cNvPr id="8" name="Group 7">
+            <a:extLst>
+              <a:ext uri="{FF2B5EF4-FFF2-40B4-BE49-F238E27FC236}">
+                <a16:creationId xmlns:a16="http://schemas.microsoft.com/office/drawing/2014/main" id="{EB6D7A76-17F0-CE77-B04E-E660351BCBBB}"/>
+              </a:ext>
+            </a:extLst>
+          </p:cNvPr>
+          <p:cNvGrpSpPr/>
+          <p:nvPr/>
+        </p:nvGrpSpPr>
+        <p:grpSpPr>
+          <a:xfrm>
+            <a:off x="1385575" y="4290349"/>
+            <a:ext cx="5914662" cy="462224"/>
+            <a:chOff x="1932123" y="3818579"/>
+            <a:chExt cx="5914662" cy="462224"/>
+          </a:xfrm>
+        </p:grpSpPr>
+        <p:grpSp>
+          <p:nvGrpSpPr>
+            <p:cNvPr id="9" name="Group 8">
+              <a:extLst>
+                <a:ext uri="{FF2B5EF4-FFF2-40B4-BE49-F238E27FC236}">
+                  <a16:creationId xmlns:a16="http://schemas.microsoft.com/office/drawing/2014/main" id="{5EFA4B99-D630-D8B9-1455-4144B53B6F7F}"/>
+                </a:ext>
+              </a:extLst>
+            </p:cNvPr>
+            <p:cNvGrpSpPr/>
+            <p:nvPr/>
+          </p:nvGrpSpPr>
+          <p:grpSpPr>
+            <a:xfrm>
+              <a:off x="1932123" y="3818579"/>
+              <a:ext cx="991947" cy="462224"/>
+              <a:chOff x="1932123" y="3818374"/>
+              <a:chExt cx="991947" cy="462224"/>
+            </a:xfrm>
+          </p:grpSpPr>
+          <p:sp>
+            <p:nvSpPr>
+              <p:cNvPr id="47" name="Rectangle 46">
+                <a:extLst>
+                  <a:ext uri="{FF2B5EF4-FFF2-40B4-BE49-F238E27FC236}">
+                    <a16:creationId xmlns:a16="http://schemas.microsoft.com/office/drawing/2014/main" id="{F20833FC-A3A6-30A1-B279-DA5E586F0AEA}"/>
+                  </a:ext>
+                </a:extLst>
+              </p:cNvPr>
+              <p:cNvSpPr/>
+              <p:nvPr/>
+            </p:nvSpPr>
+            <p:spPr>
+              <a:xfrm>
+                <a:off x="1932123" y="3818374"/>
+                <a:ext cx="991947" cy="462224"/>
+              </a:xfrm>
+              <a:prstGeom prst="rect">
+                <a:avLst/>
+              </a:prstGeom>
+              <a:noFill/>
+            </p:spPr>
+            <p:style>
+              <a:lnRef idx="2">
+                <a:schemeClr val="accent1">
+                  <a:shade val="15000"/>
+                </a:schemeClr>
+              </a:lnRef>
+              <a:fillRef idx="1">
+                <a:schemeClr val="accent1"/>
+              </a:fillRef>
+              <a:effectRef idx="0">
+                <a:schemeClr val="accent1"/>
+              </a:effectRef>
+              <a:fontRef idx="minor">
+                <a:schemeClr val="lt1"/>
+              </a:fontRef>
+            </p:style>
+            <p:txBody>
+              <a:bodyPr rtlCol="0" anchor="ctr"/>
+              <a:lstStyle/>
+              <a:p>
+                <a:pPr algn="ctr"/>
+                <a:endParaRPr lang="en-US"/>
+              </a:p>
+            </p:txBody>
+          </p:sp>
+          <p:sp>
+            <p:nvSpPr>
+              <p:cNvPr id="48" name="TextBox 47">
+                <a:extLst>
+                  <a:ext uri="{FF2B5EF4-FFF2-40B4-BE49-F238E27FC236}">
+                    <a16:creationId xmlns:a16="http://schemas.microsoft.com/office/drawing/2014/main" id="{3FE974E8-4402-0685-9F1F-371E3B71D66A}"/>
+                  </a:ext>
+                </a:extLst>
+              </p:cNvPr>
+              <p:cNvSpPr txBox="1"/>
+              <p:nvPr/>
+            </p:nvSpPr>
+            <p:spPr>
+              <a:xfrm>
+                <a:off x="2143724" y="3864820"/>
+                <a:ext cx="630301" cy="369332"/>
+              </a:xfrm>
+              <a:prstGeom prst="rect">
+                <a:avLst/>
+              </a:prstGeom>
+              <a:noFill/>
+            </p:spPr>
+            <p:txBody>
+              <a:bodyPr wrap="none" rtlCol="0">
+                <a:spAutoFit/>
+              </a:bodyPr>
+              <a:lstStyle/>
+              <a:p>
+                <a:r>
+                  <a:rPr lang="en-US" dirty="0">
+                    <a:solidFill>
+                      <a:srgbClr val="FF0000"/>
+                    </a:solidFill>
+                  </a:rPr>
+                  <a:t>MSP</a:t>
+                </a:r>
+              </a:p>
+            </p:txBody>
+          </p:sp>
+        </p:grpSp>
+        <p:grpSp>
+          <p:nvGrpSpPr>
+            <p:cNvPr id="10" name="Group 9">
+              <a:extLst>
+                <a:ext uri="{FF2B5EF4-FFF2-40B4-BE49-F238E27FC236}">
+                  <a16:creationId xmlns:a16="http://schemas.microsoft.com/office/drawing/2014/main" id="{AB120A85-A56A-468E-AFD5-49618B170F71}"/>
+                </a:ext>
+              </a:extLst>
+            </p:cNvPr>
+            <p:cNvGrpSpPr/>
+            <p:nvPr/>
+          </p:nvGrpSpPr>
+          <p:grpSpPr>
+            <a:xfrm>
+              <a:off x="2916666" y="3818579"/>
+              <a:ext cx="991947" cy="462224"/>
+              <a:chOff x="1932123" y="3818374"/>
+              <a:chExt cx="991947" cy="462224"/>
+            </a:xfrm>
+          </p:grpSpPr>
+          <p:sp>
+            <p:nvSpPr>
+              <p:cNvPr id="45" name="Rectangle 44">
+                <a:extLst>
+                  <a:ext uri="{FF2B5EF4-FFF2-40B4-BE49-F238E27FC236}">
+                    <a16:creationId xmlns:a16="http://schemas.microsoft.com/office/drawing/2014/main" id="{A9ACCD2E-743F-CE96-6990-F1B647CF1973}"/>
+                  </a:ext>
+                </a:extLst>
+              </p:cNvPr>
+              <p:cNvSpPr/>
+              <p:nvPr/>
+            </p:nvSpPr>
+            <p:spPr>
+              <a:xfrm>
+                <a:off x="1932123" y="3818374"/>
+                <a:ext cx="991947" cy="462224"/>
+              </a:xfrm>
+              <a:prstGeom prst="rect">
+                <a:avLst/>
+              </a:prstGeom>
+              <a:noFill/>
+            </p:spPr>
+            <p:style>
+              <a:lnRef idx="2">
+                <a:schemeClr val="accent1">
+                  <a:shade val="15000"/>
+                </a:schemeClr>
+              </a:lnRef>
+              <a:fillRef idx="1">
+                <a:schemeClr val="accent1"/>
+              </a:fillRef>
+              <a:effectRef idx="0">
+                <a:schemeClr val="accent1"/>
+              </a:effectRef>
+              <a:fontRef idx="minor">
+                <a:schemeClr val="lt1"/>
+              </a:fontRef>
+            </p:style>
+            <p:txBody>
+              <a:bodyPr rtlCol="0" anchor="ctr"/>
+              <a:lstStyle/>
+              <a:p>
+                <a:pPr algn="ctr"/>
+                <a:endParaRPr lang="en-US"/>
+              </a:p>
+            </p:txBody>
+          </p:sp>
+          <p:sp>
+            <p:nvSpPr>
+              <p:cNvPr id="46" name="TextBox 45">
+                <a:extLst>
+                  <a:ext uri="{FF2B5EF4-FFF2-40B4-BE49-F238E27FC236}">
+                    <a16:creationId xmlns:a16="http://schemas.microsoft.com/office/drawing/2014/main" id="{CB55022B-9875-E758-D5FA-D09522A38FE7}"/>
+                  </a:ext>
+                </a:extLst>
+              </p:cNvPr>
+              <p:cNvSpPr txBox="1"/>
+              <p:nvPr/>
+            </p:nvSpPr>
+            <p:spPr>
+              <a:xfrm>
+                <a:off x="2143724" y="3864820"/>
+                <a:ext cx="536365" cy="369332"/>
+              </a:xfrm>
+              <a:prstGeom prst="rect">
+                <a:avLst/>
+              </a:prstGeom>
+              <a:noFill/>
+            </p:spPr>
+            <p:txBody>
+              <a:bodyPr wrap="none" rtlCol="0">
+                <a:spAutoFit/>
+              </a:bodyPr>
+              <a:lstStyle/>
+              <a:p>
+                <a:r>
+                  <a:rPr lang="en-US" dirty="0">
+                    <a:solidFill>
+                      <a:srgbClr val="FF0000"/>
+                    </a:solidFill>
+                  </a:rPr>
+                  <a:t>ATL</a:t>
+                </a:r>
+              </a:p>
+            </p:txBody>
+          </p:sp>
+        </p:grpSp>
+        <p:grpSp>
+          <p:nvGrpSpPr>
+            <p:cNvPr id="12" name="Group 11">
+              <a:extLst>
+                <a:ext uri="{FF2B5EF4-FFF2-40B4-BE49-F238E27FC236}">
+                  <a16:creationId xmlns:a16="http://schemas.microsoft.com/office/drawing/2014/main" id="{3F2ACFE4-1876-0D50-D3F5-BBCB88CA13CF}"/>
+                </a:ext>
+              </a:extLst>
+            </p:cNvPr>
+            <p:cNvGrpSpPr/>
+            <p:nvPr/>
+          </p:nvGrpSpPr>
+          <p:grpSpPr>
+            <a:xfrm>
+              <a:off x="3901209" y="3818579"/>
+              <a:ext cx="991947" cy="462224"/>
+              <a:chOff x="1932123" y="3818374"/>
+              <a:chExt cx="991947" cy="462224"/>
+            </a:xfrm>
+          </p:grpSpPr>
+          <p:sp>
+            <p:nvSpPr>
+              <p:cNvPr id="43" name="Rectangle 42">
+                <a:extLst>
+                  <a:ext uri="{FF2B5EF4-FFF2-40B4-BE49-F238E27FC236}">
+                    <a16:creationId xmlns:a16="http://schemas.microsoft.com/office/drawing/2014/main" id="{02B6F120-0C18-6F47-B7B6-F50A4BD41006}"/>
+                  </a:ext>
+                </a:extLst>
+              </p:cNvPr>
+              <p:cNvSpPr/>
+              <p:nvPr/>
+            </p:nvSpPr>
+            <p:spPr>
+              <a:xfrm>
+                <a:off x="1932123" y="3818374"/>
+                <a:ext cx="991947" cy="462224"/>
+              </a:xfrm>
+              <a:prstGeom prst="rect">
+                <a:avLst/>
+              </a:prstGeom>
+              <a:noFill/>
+            </p:spPr>
+            <p:style>
+              <a:lnRef idx="2">
+                <a:schemeClr val="accent1">
+                  <a:shade val="15000"/>
+                </a:schemeClr>
+              </a:lnRef>
+              <a:fillRef idx="1">
+                <a:schemeClr val="accent1"/>
+              </a:fillRef>
+              <a:effectRef idx="0">
+                <a:schemeClr val="accent1"/>
+              </a:effectRef>
+              <a:fontRef idx="minor">
+                <a:schemeClr val="lt1"/>
+              </a:fontRef>
+            </p:style>
+            <p:txBody>
+              <a:bodyPr rtlCol="0" anchor="ctr"/>
+              <a:lstStyle/>
+              <a:p>
+                <a:pPr algn="ctr"/>
+                <a:endParaRPr lang="en-US"/>
+              </a:p>
+            </p:txBody>
+          </p:sp>
+          <p:sp>
+            <p:nvSpPr>
+              <p:cNvPr id="44" name="TextBox 43">
+                <a:extLst>
+                  <a:ext uri="{FF2B5EF4-FFF2-40B4-BE49-F238E27FC236}">
+                    <a16:creationId xmlns:a16="http://schemas.microsoft.com/office/drawing/2014/main" id="{02B20D25-E9FD-E318-7F35-82AB5F05F7A6}"/>
+                  </a:ext>
+                </a:extLst>
+              </p:cNvPr>
+              <p:cNvSpPr txBox="1"/>
+              <p:nvPr/>
+            </p:nvSpPr>
+            <p:spPr>
+              <a:xfrm>
+                <a:off x="2143724" y="3864820"/>
+                <a:ext cx="622286" cy="369332"/>
+              </a:xfrm>
+              <a:prstGeom prst="rect">
+                <a:avLst/>
+              </a:prstGeom>
+              <a:noFill/>
+            </p:spPr>
+            <p:txBody>
+              <a:bodyPr wrap="none" rtlCol="0">
+                <a:spAutoFit/>
+              </a:bodyPr>
+              <a:lstStyle/>
+              <a:p>
+                <a:r>
+                  <a:rPr lang="en-US" dirty="0">
+                    <a:solidFill>
+                      <a:srgbClr val="FF0000"/>
+                    </a:solidFill>
+                  </a:rPr>
+                  <a:t>BOS</a:t>
+                </a:r>
+              </a:p>
+            </p:txBody>
+          </p:sp>
+        </p:grpSp>
+        <p:grpSp>
+          <p:nvGrpSpPr>
+            <p:cNvPr id="34" name="Group 33">
+              <a:extLst>
+                <a:ext uri="{FF2B5EF4-FFF2-40B4-BE49-F238E27FC236}">
+                  <a16:creationId xmlns:a16="http://schemas.microsoft.com/office/drawing/2014/main" id="{1FA446A5-B813-A711-B32A-B852F8A313C9}"/>
+                </a:ext>
+              </a:extLst>
+            </p:cNvPr>
+            <p:cNvGrpSpPr/>
+            <p:nvPr/>
+          </p:nvGrpSpPr>
+          <p:grpSpPr>
+            <a:xfrm>
+              <a:off x="4885752" y="3818579"/>
+              <a:ext cx="991947" cy="462224"/>
+              <a:chOff x="1932123" y="3818374"/>
+              <a:chExt cx="991947" cy="462224"/>
+            </a:xfrm>
+          </p:grpSpPr>
+          <p:sp>
+            <p:nvSpPr>
+              <p:cNvPr id="41" name="Rectangle 40">
+                <a:extLst>
+                  <a:ext uri="{FF2B5EF4-FFF2-40B4-BE49-F238E27FC236}">
+                    <a16:creationId xmlns:a16="http://schemas.microsoft.com/office/drawing/2014/main" id="{944F50D7-2359-9866-DAFB-3E663BD99EF5}"/>
+                  </a:ext>
+                </a:extLst>
+              </p:cNvPr>
+              <p:cNvSpPr/>
+              <p:nvPr/>
+            </p:nvSpPr>
+            <p:spPr>
+              <a:xfrm>
+                <a:off x="1932123" y="3818374"/>
+                <a:ext cx="991947" cy="462224"/>
+              </a:xfrm>
+              <a:prstGeom prst="rect">
+                <a:avLst/>
+              </a:prstGeom>
+              <a:noFill/>
+            </p:spPr>
+            <p:style>
+              <a:lnRef idx="2">
+                <a:schemeClr val="accent1">
+                  <a:shade val="15000"/>
+                </a:schemeClr>
+              </a:lnRef>
+              <a:fillRef idx="1">
+                <a:schemeClr val="accent1"/>
+              </a:fillRef>
+              <a:effectRef idx="0">
+                <a:schemeClr val="accent1"/>
+              </a:effectRef>
+              <a:fontRef idx="minor">
+                <a:schemeClr val="lt1"/>
+              </a:fontRef>
+            </p:style>
+            <p:txBody>
+              <a:bodyPr rtlCol="0" anchor="ctr"/>
+              <a:lstStyle/>
+              <a:p>
+                <a:pPr algn="ctr"/>
+                <a:endParaRPr lang="en-US"/>
+              </a:p>
+            </p:txBody>
+          </p:sp>
+          <p:sp>
+            <p:nvSpPr>
+              <p:cNvPr id="42" name="TextBox 41">
+                <a:extLst>
+                  <a:ext uri="{FF2B5EF4-FFF2-40B4-BE49-F238E27FC236}">
+                    <a16:creationId xmlns:a16="http://schemas.microsoft.com/office/drawing/2014/main" id="{AC22583E-1745-C386-6F0E-89D15661DB69}"/>
+                  </a:ext>
+                </a:extLst>
+              </p:cNvPr>
+              <p:cNvSpPr txBox="1"/>
+              <p:nvPr/>
+            </p:nvSpPr>
+            <p:spPr>
+              <a:xfrm>
+                <a:off x="2143724" y="3864820"/>
+                <a:ext cx="530915" cy="369332"/>
+              </a:xfrm>
+              <a:prstGeom prst="rect">
+                <a:avLst/>
+              </a:prstGeom>
+              <a:noFill/>
+            </p:spPr>
+            <p:txBody>
+              <a:bodyPr wrap="none" rtlCol="0">
+                <a:spAutoFit/>
+              </a:bodyPr>
+              <a:lstStyle/>
+              <a:p>
+                <a:r>
+                  <a:rPr lang="en-US" dirty="0">
+                    <a:solidFill>
+                      <a:srgbClr val="FF0000"/>
+                    </a:solidFill>
+                  </a:rPr>
+                  <a:t>???</a:t>
+                </a:r>
+              </a:p>
+            </p:txBody>
+          </p:sp>
+        </p:grpSp>
+        <p:grpSp>
+          <p:nvGrpSpPr>
+            <p:cNvPr id="35" name="Group 34">
+              <a:extLst>
+                <a:ext uri="{FF2B5EF4-FFF2-40B4-BE49-F238E27FC236}">
+                  <a16:creationId xmlns:a16="http://schemas.microsoft.com/office/drawing/2014/main" id="{FD188ED2-6A2D-44D3-6153-5FE81ACDF8BF}"/>
+                </a:ext>
+              </a:extLst>
+            </p:cNvPr>
+            <p:cNvGrpSpPr/>
+            <p:nvPr/>
+          </p:nvGrpSpPr>
+          <p:grpSpPr>
+            <a:xfrm>
+              <a:off x="5870295" y="3818579"/>
+              <a:ext cx="991947" cy="462224"/>
+              <a:chOff x="1932123" y="3818374"/>
+              <a:chExt cx="991947" cy="462224"/>
+            </a:xfrm>
+          </p:grpSpPr>
+          <p:sp>
+            <p:nvSpPr>
+              <p:cNvPr id="39" name="Rectangle 38">
+                <a:extLst>
+                  <a:ext uri="{FF2B5EF4-FFF2-40B4-BE49-F238E27FC236}">
+                    <a16:creationId xmlns:a16="http://schemas.microsoft.com/office/drawing/2014/main" id="{C9C6B3DF-683B-9CB6-D3E0-BFC59903F3D6}"/>
+                  </a:ext>
+                </a:extLst>
+              </p:cNvPr>
+              <p:cNvSpPr/>
+              <p:nvPr/>
+            </p:nvSpPr>
+            <p:spPr>
+              <a:xfrm>
+                <a:off x="1932123" y="3818374"/>
+                <a:ext cx="991947" cy="462224"/>
+              </a:xfrm>
+              <a:prstGeom prst="rect">
+                <a:avLst/>
+              </a:prstGeom>
+              <a:noFill/>
+            </p:spPr>
+            <p:style>
+              <a:lnRef idx="2">
+                <a:schemeClr val="accent1">
+                  <a:shade val="15000"/>
+                </a:schemeClr>
+              </a:lnRef>
+              <a:fillRef idx="1">
+                <a:schemeClr val="accent1"/>
+              </a:fillRef>
+              <a:effectRef idx="0">
+                <a:schemeClr val="accent1"/>
+              </a:effectRef>
+              <a:fontRef idx="minor">
+                <a:schemeClr val="lt1"/>
+              </a:fontRef>
+            </p:style>
+            <p:txBody>
+              <a:bodyPr rtlCol="0" anchor="ctr"/>
+              <a:lstStyle/>
+              <a:p>
+                <a:pPr algn="ctr"/>
+                <a:endParaRPr lang="en-US"/>
+              </a:p>
+            </p:txBody>
+          </p:sp>
+          <p:sp>
+            <p:nvSpPr>
+              <p:cNvPr id="40" name="TextBox 39">
+                <a:extLst>
+                  <a:ext uri="{FF2B5EF4-FFF2-40B4-BE49-F238E27FC236}">
+                    <a16:creationId xmlns:a16="http://schemas.microsoft.com/office/drawing/2014/main" id="{B1E8A089-C636-7ECF-466D-E822D0E0645F}"/>
+                  </a:ext>
+                </a:extLst>
+              </p:cNvPr>
+              <p:cNvSpPr txBox="1"/>
+              <p:nvPr/>
+            </p:nvSpPr>
+            <p:spPr>
+              <a:xfrm>
+                <a:off x="2143724" y="3864820"/>
+                <a:ext cx="530915" cy="369332"/>
+              </a:xfrm>
+              <a:prstGeom prst="rect">
+                <a:avLst/>
+              </a:prstGeom>
+              <a:noFill/>
+            </p:spPr>
+            <p:txBody>
+              <a:bodyPr wrap="none" rtlCol="0">
+                <a:spAutoFit/>
+              </a:bodyPr>
+              <a:lstStyle/>
+              <a:p>
+                <a:r>
+                  <a:rPr lang="en-US" dirty="0"/>
+                  <a:t>???</a:t>
+                </a:r>
+              </a:p>
+            </p:txBody>
+          </p:sp>
+        </p:grpSp>
+        <p:grpSp>
+          <p:nvGrpSpPr>
+            <p:cNvPr id="36" name="Group 35">
+              <a:extLst>
+                <a:ext uri="{FF2B5EF4-FFF2-40B4-BE49-F238E27FC236}">
+                  <a16:creationId xmlns:a16="http://schemas.microsoft.com/office/drawing/2014/main" id="{AA5A6618-D344-9939-1DA1-996C79FF9646}"/>
+                </a:ext>
+              </a:extLst>
+            </p:cNvPr>
+            <p:cNvGrpSpPr/>
+            <p:nvPr/>
+          </p:nvGrpSpPr>
+          <p:grpSpPr>
+            <a:xfrm>
+              <a:off x="6854838" y="3818579"/>
+              <a:ext cx="991947" cy="462224"/>
+              <a:chOff x="1932123" y="3818374"/>
+              <a:chExt cx="991947" cy="462224"/>
+            </a:xfrm>
+          </p:grpSpPr>
+          <p:sp>
+            <p:nvSpPr>
+              <p:cNvPr id="37" name="Rectangle 36">
+                <a:extLst>
+                  <a:ext uri="{FF2B5EF4-FFF2-40B4-BE49-F238E27FC236}">
+                    <a16:creationId xmlns:a16="http://schemas.microsoft.com/office/drawing/2014/main" id="{E433CDC4-8B25-6328-4458-7170C21BA5B2}"/>
+                  </a:ext>
+                </a:extLst>
+              </p:cNvPr>
+              <p:cNvSpPr/>
+              <p:nvPr/>
+            </p:nvSpPr>
+            <p:spPr>
+              <a:xfrm>
+                <a:off x="1932123" y="3818374"/>
+                <a:ext cx="991947" cy="462224"/>
+              </a:xfrm>
+              <a:prstGeom prst="rect">
+                <a:avLst/>
+              </a:prstGeom>
+              <a:noFill/>
+            </p:spPr>
+            <p:style>
+              <a:lnRef idx="2">
+                <a:schemeClr val="accent1">
+                  <a:shade val="15000"/>
+                </a:schemeClr>
+              </a:lnRef>
+              <a:fillRef idx="1">
+                <a:schemeClr val="accent1"/>
+              </a:fillRef>
+              <a:effectRef idx="0">
+                <a:schemeClr val="accent1"/>
+              </a:effectRef>
+              <a:fontRef idx="minor">
+                <a:schemeClr val="lt1"/>
+              </a:fontRef>
+            </p:style>
+            <p:txBody>
+              <a:bodyPr rtlCol="0" anchor="ctr"/>
+              <a:lstStyle/>
+              <a:p>
+                <a:pPr algn="ctr"/>
+                <a:endParaRPr lang="en-US"/>
+              </a:p>
+            </p:txBody>
+          </p:sp>
+          <p:sp>
+            <p:nvSpPr>
+              <p:cNvPr id="38" name="TextBox 37">
+                <a:extLst>
+                  <a:ext uri="{FF2B5EF4-FFF2-40B4-BE49-F238E27FC236}">
+                    <a16:creationId xmlns:a16="http://schemas.microsoft.com/office/drawing/2014/main" id="{D566D4FA-E0FB-10DB-14C9-E169125EA6BB}"/>
+                  </a:ext>
+                </a:extLst>
+              </p:cNvPr>
+              <p:cNvSpPr txBox="1"/>
+              <p:nvPr/>
+            </p:nvSpPr>
+            <p:spPr>
+              <a:xfrm>
+                <a:off x="2143724" y="3864820"/>
+                <a:ext cx="530915" cy="369332"/>
+              </a:xfrm>
+              <a:prstGeom prst="rect">
+                <a:avLst/>
+              </a:prstGeom>
+              <a:noFill/>
+            </p:spPr>
+            <p:txBody>
+              <a:bodyPr wrap="none" rtlCol="0">
+                <a:spAutoFit/>
+              </a:bodyPr>
+              <a:lstStyle/>
+              <a:p>
+                <a:r>
+                  <a:rPr lang="en-US" dirty="0"/>
+                  <a:t>???</a:t>
+                </a:r>
+              </a:p>
+            </p:txBody>
+          </p:sp>
+        </p:grpSp>
+      </p:grpSp>
+      <p:sp>
+        <p:nvSpPr>
+          <p:cNvPr id="49" name="TextBox 48">
+            <a:extLst>
+              <a:ext uri="{FF2B5EF4-FFF2-40B4-BE49-F238E27FC236}">
+                <a16:creationId xmlns:a16="http://schemas.microsoft.com/office/drawing/2014/main" id="{DAC4F120-7A69-4600-E08F-23DE4F4A63C1}"/>
+              </a:ext>
+            </a:extLst>
+          </p:cNvPr>
+          <p:cNvSpPr txBox="1"/>
+          <p:nvPr/>
+        </p:nvSpPr>
+        <p:spPr>
+          <a:xfrm>
+            <a:off x="923589" y="4290349"/>
+            <a:ext cx="461986" cy="369332"/>
+          </a:xfrm>
+          <a:prstGeom prst="rect">
+            <a:avLst/>
+          </a:prstGeom>
+          <a:noFill/>
+        </p:spPr>
+        <p:txBody>
+          <a:bodyPr wrap="none" rtlCol="0">
+            <a:spAutoFit/>
+          </a:bodyPr>
+          <a:lstStyle/>
+          <a:p>
+            <a:r>
+              <a:rPr lang="en-US" dirty="0" err="1"/>
+              <a:t>arr</a:t>
+            </a:r>
+            <a:endParaRPr lang="en-US" dirty="0"/>
+          </a:p>
+        </p:txBody>
+      </p:sp>
+      <p:sp>
+        <p:nvSpPr>
+          <p:cNvPr id="50" name="TextBox 49">
+            <a:extLst>
+              <a:ext uri="{FF2B5EF4-FFF2-40B4-BE49-F238E27FC236}">
+                <a16:creationId xmlns:a16="http://schemas.microsoft.com/office/drawing/2014/main" id="{B295C76D-97C1-CFA8-341D-071500863F03}"/>
+              </a:ext>
+            </a:extLst>
+          </p:cNvPr>
+          <p:cNvSpPr txBox="1"/>
+          <p:nvPr/>
+        </p:nvSpPr>
+        <p:spPr>
+          <a:xfrm>
+            <a:off x="4528535" y="3903863"/>
+            <a:ext cx="562975" cy="369332"/>
+          </a:xfrm>
+          <a:prstGeom prst="rect">
+            <a:avLst/>
+          </a:prstGeom>
+          <a:noFill/>
+        </p:spPr>
+        <p:txBody>
+          <a:bodyPr wrap="none" rtlCol="0">
+            <a:spAutoFit/>
+          </a:bodyPr>
+          <a:lstStyle/>
+          <a:p>
+            <a:r>
+              <a:rPr lang="en-US" dirty="0">
+                <a:solidFill>
+                  <a:srgbClr val="FF0000"/>
+                </a:solidFill>
+              </a:rPr>
+              <a:t>end</a:t>
+            </a:r>
+          </a:p>
+        </p:txBody>
+      </p:sp>
+      <p:sp>
+        <p:nvSpPr>
+          <p:cNvPr id="51" name="Freeform 50">
+            <a:extLst>
+              <a:ext uri="{FF2B5EF4-FFF2-40B4-BE49-F238E27FC236}">
+                <a16:creationId xmlns:a16="http://schemas.microsoft.com/office/drawing/2014/main" id="{DF2551C7-2A18-3140-2EA9-CD1FE49B64CF}"/>
+              </a:ext>
+            </a:extLst>
+          </p:cNvPr>
+          <p:cNvSpPr/>
+          <p:nvPr/>
+        </p:nvSpPr>
+        <p:spPr>
+          <a:xfrm>
+            <a:off x="3994915" y="4862216"/>
+            <a:ext cx="703385" cy="191011"/>
+          </a:xfrm>
+          <a:custGeom>
+            <a:avLst/>
+            <a:gdLst>
+              <a:gd name="csX0" fmla="*/ 703385 w 703385"/>
+              <a:gd name="csY0" fmla="*/ 20096 h 191011"/>
+              <a:gd name="csX1" fmla="*/ 301451 w 703385"/>
+              <a:gd name="csY1" fmla="*/ 190918 h 191011"/>
+              <a:gd name="csX2" fmla="*/ 0 w 703385"/>
+              <a:gd name="csY2" fmla="*/ 0 h 191011"/>
+            </a:gdLst>
+            <a:ahLst/>
+            <a:cxnLst>
+              <a:cxn ang="0">
+                <a:pos x="csX0" y="csY0"/>
+              </a:cxn>
+              <a:cxn ang="0">
+                <a:pos x="csX1" y="csY1"/>
+              </a:cxn>
+              <a:cxn ang="0">
+                <a:pos x="csX2" y="csY2"/>
+              </a:cxn>
+            </a:cxnLst>
+            <a:rect l="l" t="t" r="r" b="b"/>
+            <a:pathLst>
+              <a:path w="703385" h="191011">
+                <a:moveTo>
+                  <a:pt x="703385" y="20096"/>
+                </a:moveTo>
+                <a:cubicBezTo>
+                  <a:pt x="561033" y="107181"/>
+                  <a:pt x="418682" y="194267"/>
+                  <a:pt x="301451" y="190918"/>
+                </a:cubicBezTo>
+                <a:cubicBezTo>
+                  <a:pt x="184220" y="187569"/>
+                  <a:pt x="92110" y="93784"/>
+                  <a:pt x="0" y="0"/>
+                </a:cubicBezTo>
+              </a:path>
+            </a:pathLst>
+          </a:custGeom>
+          <a:noFill/>
+          <a:ln>
+            <a:solidFill>
+              <a:srgbClr val="FF0000"/>
+            </a:solidFill>
+            <a:headEnd type="none"/>
+            <a:tailEnd type="triangle"/>
+          </a:ln>
+        </p:spPr>
+        <p:style>
+          <a:lnRef idx="2">
+            <a:schemeClr val="accent1">
+              <a:shade val="15000"/>
+            </a:schemeClr>
+          </a:lnRef>
+          <a:fillRef idx="1">
+            <a:schemeClr val="accent1"/>
+          </a:fillRef>
+          <a:effectRef idx="0">
+            <a:schemeClr val="accent1"/>
+          </a:effectRef>
+          <a:fontRef idx="minor">
+            <a:schemeClr val="lt1"/>
+          </a:fontRef>
+        </p:style>
+        <p:txBody>
+          <a:bodyPr rtlCol="0" anchor="ctr"/>
+          <a:lstStyle/>
+          <a:p>
+            <a:pPr algn="ctr"/>
+            <a:endParaRPr lang="en-US" dirty="0"/>
+          </a:p>
+        </p:txBody>
+      </p:sp>
+      <p:sp>
+        <p:nvSpPr>
+          <p:cNvPr id="52" name="Freeform 51">
+            <a:extLst>
+              <a:ext uri="{FF2B5EF4-FFF2-40B4-BE49-F238E27FC236}">
+                <a16:creationId xmlns:a16="http://schemas.microsoft.com/office/drawing/2014/main" id="{E0FAEDF0-FBCC-418D-8C0E-A0B4A9976736}"/>
+              </a:ext>
+            </a:extLst>
+          </p:cNvPr>
+          <p:cNvSpPr/>
+          <p:nvPr/>
+        </p:nvSpPr>
+        <p:spPr>
+          <a:xfrm>
+            <a:off x="2967663" y="4862216"/>
+            <a:ext cx="703385" cy="191011"/>
+          </a:xfrm>
+          <a:custGeom>
+            <a:avLst/>
+            <a:gdLst>
+              <a:gd name="csX0" fmla="*/ 703385 w 703385"/>
+              <a:gd name="csY0" fmla="*/ 20096 h 191011"/>
+              <a:gd name="csX1" fmla="*/ 301451 w 703385"/>
+              <a:gd name="csY1" fmla="*/ 190918 h 191011"/>
+              <a:gd name="csX2" fmla="*/ 0 w 703385"/>
+              <a:gd name="csY2" fmla="*/ 0 h 191011"/>
+            </a:gdLst>
+            <a:ahLst/>
+            <a:cxnLst>
+              <a:cxn ang="0">
+                <a:pos x="csX0" y="csY0"/>
+              </a:cxn>
+              <a:cxn ang="0">
+                <a:pos x="csX1" y="csY1"/>
+              </a:cxn>
+              <a:cxn ang="0">
+                <a:pos x="csX2" y="csY2"/>
+              </a:cxn>
+            </a:cxnLst>
+            <a:rect l="l" t="t" r="r" b="b"/>
+            <a:pathLst>
+              <a:path w="703385" h="191011">
+                <a:moveTo>
+                  <a:pt x="703385" y="20096"/>
+                </a:moveTo>
+                <a:cubicBezTo>
+                  <a:pt x="561033" y="107181"/>
+                  <a:pt x="418682" y="194267"/>
+                  <a:pt x="301451" y="190918"/>
+                </a:cubicBezTo>
+                <a:cubicBezTo>
+                  <a:pt x="184220" y="187569"/>
+                  <a:pt x="92110" y="93784"/>
+                  <a:pt x="0" y="0"/>
+                </a:cubicBezTo>
+              </a:path>
+            </a:pathLst>
+          </a:custGeom>
+          <a:noFill/>
+          <a:ln>
+            <a:solidFill>
+              <a:srgbClr val="FF0000"/>
+            </a:solidFill>
+            <a:headEnd type="none"/>
+            <a:tailEnd type="triangle"/>
+          </a:ln>
+        </p:spPr>
+        <p:style>
+          <a:lnRef idx="2">
+            <a:schemeClr val="accent1">
+              <a:shade val="15000"/>
+            </a:schemeClr>
+          </a:lnRef>
+          <a:fillRef idx="1">
+            <a:schemeClr val="accent1"/>
+          </a:fillRef>
+          <a:effectRef idx="0">
+            <a:schemeClr val="accent1"/>
+          </a:effectRef>
+          <a:fontRef idx="minor">
+            <a:schemeClr val="lt1"/>
+          </a:fontRef>
+        </p:style>
+        <p:txBody>
+          <a:bodyPr rtlCol="0" anchor="ctr"/>
+          <a:lstStyle/>
+          <a:p>
+            <a:pPr algn="ctr"/>
+            <a:endParaRPr lang="en-US" dirty="0"/>
+          </a:p>
+        </p:txBody>
+      </p:sp>
+      <p:sp>
+        <p:nvSpPr>
+          <p:cNvPr id="53" name="Freeform 52">
+            <a:extLst>
+              <a:ext uri="{FF2B5EF4-FFF2-40B4-BE49-F238E27FC236}">
+                <a16:creationId xmlns:a16="http://schemas.microsoft.com/office/drawing/2014/main" id="{8F78511C-EE90-CD2E-AD00-38B01ACEA6CA}"/>
+              </a:ext>
+            </a:extLst>
+          </p:cNvPr>
+          <p:cNvSpPr/>
+          <p:nvPr/>
+        </p:nvSpPr>
+        <p:spPr>
+          <a:xfrm>
+            <a:off x="1940411" y="4862216"/>
+            <a:ext cx="703385" cy="191011"/>
+          </a:xfrm>
+          <a:custGeom>
+            <a:avLst/>
+            <a:gdLst>
+              <a:gd name="csX0" fmla="*/ 703385 w 703385"/>
+              <a:gd name="csY0" fmla="*/ 20096 h 191011"/>
+              <a:gd name="csX1" fmla="*/ 301451 w 703385"/>
+              <a:gd name="csY1" fmla="*/ 190918 h 191011"/>
+              <a:gd name="csX2" fmla="*/ 0 w 703385"/>
+              <a:gd name="csY2" fmla="*/ 0 h 191011"/>
+            </a:gdLst>
+            <a:ahLst/>
+            <a:cxnLst>
+              <a:cxn ang="0">
+                <a:pos x="csX0" y="csY0"/>
+              </a:cxn>
+              <a:cxn ang="0">
+                <a:pos x="csX1" y="csY1"/>
+              </a:cxn>
+              <a:cxn ang="0">
+                <a:pos x="csX2" y="csY2"/>
+              </a:cxn>
+            </a:cxnLst>
+            <a:rect l="l" t="t" r="r" b="b"/>
+            <a:pathLst>
+              <a:path w="703385" h="191011">
+                <a:moveTo>
+                  <a:pt x="703385" y="20096"/>
+                </a:moveTo>
+                <a:cubicBezTo>
+                  <a:pt x="561033" y="107181"/>
+                  <a:pt x="418682" y="194267"/>
+                  <a:pt x="301451" y="190918"/>
+                </a:cubicBezTo>
+                <a:cubicBezTo>
+                  <a:pt x="184220" y="187569"/>
+                  <a:pt x="92110" y="93784"/>
+                  <a:pt x="0" y="0"/>
+                </a:cubicBezTo>
+              </a:path>
+            </a:pathLst>
+          </a:custGeom>
+          <a:noFill/>
+          <a:ln>
+            <a:solidFill>
+              <a:srgbClr val="FF0000"/>
+            </a:solidFill>
+            <a:headEnd type="none"/>
+            <a:tailEnd type="triangle"/>
+          </a:ln>
+        </p:spPr>
+        <p:style>
+          <a:lnRef idx="2">
+            <a:schemeClr val="accent1">
+              <a:shade val="15000"/>
+            </a:schemeClr>
+          </a:lnRef>
+          <a:fillRef idx="1">
+            <a:schemeClr val="accent1"/>
+          </a:fillRef>
+          <a:effectRef idx="0">
+            <a:schemeClr val="accent1"/>
+          </a:effectRef>
+          <a:fontRef idx="minor">
+            <a:schemeClr val="lt1"/>
+          </a:fontRef>
+        </p:style>
+        <p:txBody>
+          <a:bodyPr rtlCol="0" anchor="ctr"/>
+          <a:lstStyle/>
+          <a:p>
+            <a:pPr algn="ctr"/>
+            <a:endParaRPr lang="en-US" dirty="0"/>
+          </a:p>
+        </p:txBody>
+      </p:sp>
+      <p:sp>
+        <p:nvSpPr>
+          <p:cNvPr id="54" name="TextBox 53">
+            <a:extLst>
+              <a:ext uri="{FF2B5EF4-FFF2-40B4-BE49-F238E27FC236}">
+                <a16:creationId xmlns:a16="http://schemas.microsoft.com/office/drawing/2014/main" id="{73C7FB9F-EA28-19B3-15E0-8AFD8C386781}"/>
+              </a:ext>
+            </a:extLst>
+          </p:cNvPr>
+          <p:cNvSpPr txBox="1"/>
+          <p:nvPr/>
+        </p:nvSpPr>
+        <p:spPr>
+          <a:xfrm>
+            <a:off x="8390375" y="3989196"/>
+            <a:ext cx="2204450" cy="1200329"/>
+          </a:xfrm>
+          <a:prstGeom prst="rect">
+            <a:avLst/>
+          </a:prstGeom>
+          <a:noFill/>
+        </p:spPr>
+        <p:txBody>
+          <a:bodyPr wrap="square" rtlCol="0">
+            <a:spAutoFit/>
+          </a:bodyPr>
+          <a:lstStyle/>
+          <a:p>
+            <a:pPr algn="ctr"/>
+            <a:r>
+              <a:rPr lang="en-US" dirty="0"/>
+              <a:t>Removing first item requires moving all other items one position to the left.</a:t>
+            </a:r>
+          </a:p>
+        </p:txBody>
+      </p:sp>
+      <p:grpSp>
+        <p:nvGrpSpPr>
+          <p:cNvPr id="57" name="Group 56">
+            <a:extLst>
+              <a:ext uri="{FF2B5EF4-FFF2-40B4-BE49-F238E27FC236}">
+                <a16:creationId xmlns:a16="http://schemas.microsoft.com/office/drawing/2014/main" id="{AE8A40D8-07F9-6B76-6664-F0DBF03DAB4A}"/>
+              </a:ext>
+            </a:extLst>
+          </p:cNvPr>
+          <p:cNvGrpSpPr/>
+          <p:nvPr/>
+        </p:nvGrpSpPr>
+        <p:grpSpPr>
+          <a:xfrm>
+            <a:off x="1307161" y="3037608"/>
+            <a:ext cx="1106160" cy="886243"/>
+            <a:chOff x="1838085" y="5759006"/>
+            <a:chExt cx="743578" cy="876660"/>
+          </a:xfrm>
+        </p:grpSpPr>
+        <p:cxnSp>
+          <p:nvCxnSpPr>
+            <p:cNvPr id="55" name="Straight Connector 54">
+              <a:extLst>
+                <a:ext uri="{FF2B5EF4-FFF2-40B4-BE49-F238E27FC236}">
+                  <a16:creationId xmlns:a16="http://schemas.microsoft.com/office/drawing/2014/main" id="{F6BCA8AD-CAC5-8EF9-61EA-30D4799D8D8B}"/>
+                </a:ext>
+              </a:extLst>
+            </p:cNvPr>
+            <p:cNvCxnSpPr/>
+            <p:nvPr/>
+          </p:nvCxnSpPr>
+          <p:spPr>
+            <a:xfrm flipV="1">
+              <a:off x="1838085" y="5841846"/>
+              <a:ext cx="743578" cy="793820"/>
+            </a:xfrm>
+            <a:prstGeom prst="line">
+              <a:avLst/>
+            </a:prstGeom>
+            <a:ln>
+              <a:solidFill>
+                <a:srgbClr val="FF0000"/>
+              </a:solidFill>
+            </a:ln>
+          </p:spPr>
+          <p:style>
+            <a:lnRef idx="2">
+              <a:schemeClr val="accent1"/>
+            </a:lnRef>
+            <a:fillRef idx="0">
+              <a:schemeClr val="accent1"/>
+            </a:fillRef>
+            <a:effectRef idx="1">
+              <a:schemeClr val="accent1"/>
+            </a:effectRef>
+            <a:fontRef idx="minor">
+              <a:schemeClr val="tx1"/>
+            </a:fontRef>
+          </p:style>
+        </p:cxnSp>
+        <p:cxnSp>
+          <p:nvCxnSpPr>
+            <p:cNvPr id="56" name="Straight Connector 55">
+              <a:extLst>
+                <a:ext uri="{FF2B5EF4-FFF2-40B4-BE49-F238E27FC236}">
+                  <a16:creationId xmlns:a16="http://schemas.microsoft.com/office/drawing/2014/main" id="{78015995-C804-C1E1-B021-257C8B20F278}"/>
+                </a:ext>
+              </a:extLst>
+            </p:cNvPr>
+            <p:cNvCxnSpPr>
+              <a:cxnSpLocks/>
+            </p:cNvCxnSpPr>
+            <p:nvPr/>
+          </p:nvCxnSpPr>
+          <p:spPr>
+            <a:xfrm flipH="1" flipV="1">
+              <a:off x="2096168" y="5759006"/>
+              <a:ext cx="485495" cy="834827"/>
+            </a:xfrm>
+            <a:prstGeom prst="line">
+              <a:avLst/>
+            </a:prstGeom>
+            <a:ln>
+              <a:solidFill>
+                <a:srgbClr val="FF0000"/>
+              </a:solidFill>
+            </a:ln>
+          </p:spPr>
+          <p:style>
+            <a:lnRef idx="2">
+              <a:schemeClr val="accent1"/>
+            </a:lnRef>
+            <a:fillRef idx="0">
+              <a:schemeClr val="accent1"/>
+            </a:fillRef>
+            <a:effectRef idx="1">
+              <a:schemeClr val="accent1"/>
+            </a:effectRef>
+            <a:fontRef idx="minor">
+              <a:schemeClr val="tx1"/>
+            </a:fontRef>
+          </p:style>
+        </p:cxnSp>
+      </p:grpSp>
+    </p:spTree>
+    <p:extLst>
+      <p:ext uri="{BB962C8B-B14F-4D97-AF65-F5344CB8AC3E}">
+        <p14:creationId xmlns:p14="http://schemas.microsoft.com/office/powerpoint/2010/main" val="1354175082"/>
+      </p:ext>
+    </p:extLst>
+  </p:cSld>
+  <p:clrMapOvr>
+    <a:masterClrMapping/>
+  </p:clrMapOvr>
+</p:sld>
+</file>
+
+<file path=ppt/slides/slide8.xml><?xml version="1.0" encoding="utf-8"?>
+<p:sld xmlns:a="http://schemas.openxmlformats.org/drawingml/2006/main" xmlns:r="http://schemas.openxmlformats.org/officeDocument/2006/relationships" xmlns:p="http://schemas.openxmlformats.org/presentationml/2006/main">
+  <p:cSld>
+    <p:spTree>
+      <p:nvGrpSpPr>
+        <p:cNvPr id="1" name="">
+          <a:extLst>
+            <a:ext uri="{FF2B5EF4-FFF2-40B4-BE49-F238E27FC236}">
+              <a16:creationId xmlns:a16="http://schemas.microsoft.com/office/drawing/2014/main" id="{75FB90B8-7E28-97C0-5F96-0177A8549706}"/>
+            </a:ext>
+          </a:extLst>
+        </p:cNvPr>
+        <p:cNvGrpSpPr/>
+        <p:nvPr/>
+      </p:nvGrpSpPr>
+      <p:grpSpPr>
+        <a:xfrm>
+          <a:off x="0" y="0"/>
+          <a:ext cx="0" cy="0"/>
+          <a:chOff x="0" y="0"/>
+          <a:chExt cx="0" cy="0"/>
+        </a:xfrm>
+      </p:grpSpPr>
+      <p:sp>
+        <p:nvSpPr>
+          <p:cNvPr id="2" name="Title 1">
+            <a:extLst>
+              <a:ext uri="{FF2B5EF4-FFF2-40B4-BE49-F238E27FC236}">
+                <a16:creationId xmlns:a16="http://schemas.microsoft.com/office/drawing/2014/main" id="{1832C02F-AFDD-700A-1F49-B55C0D988F3C}"/>
+              </a:ext>
+            </a:extLst>
+          </p:cNvPr>
+          <p:cNvSpPr>
+            <a:spLocks noGrp="1"/>
+          </p:cNvSpPr>
+          <p:nvPr>
+            <p:ph type="title"/>
+          </p:nvPr>
+        </p:nvSpPr>
+        <p:spPr>
+          <a:xfrm>
+            <a:off x="461839" y="-195623"/>
+            <a:ext cx="10515600" cy="1325563"/>
+          </a:xfrm>
+        </p:spPr>
+        <p:txBody>
+          <a:bodyPr/>
+          <a:lstStyle/>
+          <a:p>
+            <a:r>
+              <a:rPr lang="en-US" dirty="0"/>
+              <a:t>Introduction</a:t>
+            </a:r>
+          </a:p>
+        </p:txBody>
+      </p:sp>
+      <p:sp>
+        <p:nvSpPr>
+          <p:cNvPr id="3" name="Content Placeholder 2">
+            <a:extLst>
+              <a:ext uri="{FF2B5EF4-FFF2-40B4-BE49-F238E27FC236}">
+                <a16:creationId xmlns:a16="http://schemas.microsoft.com/office/drawing/2014/main" id="{3FE10300-8D6A-CC3B-F044-D199D8C90FF5}"/>
+              </a:ext>
+            </a:extLst>
+          </p:cNvPr>
+          <p:cNvSpPr>
+            <a:spLocks noGrp="1"/>
+          </p:cNvSpPr>
+          <p:nvPr>
+            <p:ph idx="1"/>
+          </p:nvPr>
+        </p:nvSpPr>
+        <p:spPr>
+          <a:xfrm>
+            <a:off x="461839" y="1264877"/>
+            <a:ext cx="10515600" cy="4351338"/>
+          </a:xfrm>
+        </p:spPr>
+        <p:txBody>
+          <a:bodyPr>
+            <a:normAutofit/>
+          </a:bodyPr>
+          <a:lstStyle/>
+          <a:p>
+            <a:pPr marL="0" indent="0">
+              <a:buNone/>
+            </a:pPr>
+            <a:r>
+              <a:rPr lang="en-US" dirty="0"/>
+              <a:t>Compared to arrays, linked lists can also give you better control over memory</a:t>
+            </a:r>
+          </a:p>
+          <a:p>
+            <a:pPr lvl="1"/>
+            <a:r>
+              <a:rPr lang="en-US" dirty="0"/>
+              <a:t>You can easily add one item at a time without needing to pre-allocate memory like you must do with a dynamic array</a:t>
+            </a:r>
+          </a:p>
+          <a:p>
+            <a:pPr marL="0" indent="0">
+              <a:buNone/>
+            </a:pPr>
+            <a:endParaRPr lang="en-US" dirty="0"/>
+          </a:p>
+        </p:txBody>
+      </p:sp>
+      <p:pic>
+        <p:nvPicPr>
+          <p:cNvPr id="4" name="Picture 3">
+            <a:extLst>
+              <a:ext uri="{FF2B5EF4-FFF2-40B4-BE49-F238E27FC236}">
+                <a16:creationId xmlns:a16="http://schemas.microsoft.com/office/drawing/2014/main" id="{8E6C39BA-3556-64BF-D02E-75844C8191A0}"/>
+              </a:ext>
+            </a:extLst>
+          </p:cNvPr>
+          <p:cNvPicPr>
+            <a:picLocks noChangeAspect="1"/>
+          </p:cNvPicPr>
+          <p:nvPr/>
+        </p:nvPicPr>
+        <p:blipFill>
+          <a:blip r:embed="rId2"/>
+          <a:stretch>
+            <a:fillRect/>
+          </a:stretch>
+        </p:blipFill>
+        <p:spPr>
+          <a:xfrm>
+            <a:off x="1041092" y="5063321"/>
+            <a:ext cx="7537862" cy="1391370"/>
+          </a:xfrm>
+          <a:prstGeom prst="rect">
+            <a:avLst/>
+          </a:prstGeom>
+        </p:spPr>
+      </p:pic>
+      <p:cxnSp>
+        <p:nvCxnSpPr>
+          <p:cNvPr id="6" name="Straight Connector 5">
+            <a:extLst>
+              <a:ext uri="{FF2B5EF4-FFF2-40B4-BE49-F238E27FC236}">
+                <a16:creationId xmlns:a16="http://schemas.microsoft.com/office/drawing/2014/main" id="{57C915D4-DFF7-1CA9-AE94-763BE3DF7718}"/>
+              </a:ext>
+            </a:extLst>
+          </p:cNvPr>
+          <p:cNvCxnSpPr/>
+          <p:nvPr/>
+        </p:nvCxnSpPr>
+        <p:spPr>
+          <a:xfrm flipV="1">
+            <a:off x="1838085" y="5841846"/>
+            <a:ext cx="743578" cy="793820"/>
+          </a:xfrm>
+          <a:prstGeom prst="line">
+            <a:avLst/>
+          </a:prstGeom>
+          <a:ln>
+            <a:solidFill>
+              <a:srgbClr val="FF0000"/>
+            </a:solidFill>
+          </a:ln>
+        </p:spPr>
+        <p:style>
+          <a:lnRef idx="2">
+            <a:schemeClr val="accent1"/>
+          </a:lnRef>
+          <a:fillRef idx="0">
+            <a:schemeClr val="accent1"/>
+          </a:fillRef>
+          <a:effectRef idx="1">
+            <a:schemeClr val="accent1"/>
+          </a:effectRef>
+          <a:fontRef idx="minor">
+            <a:schemeClr val="tx1"/>
+          </a:fontRef>
+        </p:style>
+      </p:cxnSp>
+      <p:cxnSp>
+        <p:nvCxnSpPr>
+          <p:cNvPr id="7" name="Straight Connector 6">
+            <a:extLst>
+              <a:ext uri="{FF2B5EF4-FFF2-40B4-BE49-F238E27FC236}">
+                <a16:creationId xmlns:a16="http://schemas.microsoft.com/office/drawing/2014/main" id="{8A342FE0-3DA6-6FA3-BE80-E6101614963D}"/>
+              </a:ext>
+            </a:extLst>
+          </p:cNvPr>
+          <p:cNvCxnSpPr>
+            <a:cxnSpLocks/>
+          </p:cNvCxnSpPr>
+          <p:nvPr/>
+        </p:nvCxnSpPr>
+        <p:spPr>
+          <a:xfrm flipH="1" flipV="1">
+            <a:off x="2096168" y="5759006"/>
+            <a:ext cx="485495" cy="834827"/>
+          </a:xfrm>
+          <a:prstGeom prst="line">
+            <a:avLst/>
+          </a:prstGeom>
+          <a:ln>
+            <a:solidFill>
+              <a:srgbClr val="FF0000"/>
+            </a:solidFill>
+          </a:ln>
+        </p:spPr>
+        <p:style>
+          <a:lnRef idx="2">
+            <a:schemeClr val="accent1"/>
+          </a:lnRef>
+          <a:fillRef idx="0">
+            <a:schemeClr val="accent1"/>
+          </a:fillRef>
+          <a:effectRef idx="1">
+            <a:schemeClr val="accent1"/>
+          </a:effectRef>
+          <a:fontRef idx="minor">
+            <a:schemeClr val="tx1"/>
+          </a:fontRef>
+        </p:style>
+      </p:cxnSp>
+      <p:sp>
+        <p:nvSpPr>
+          <p:cNvPr id="11" name="Freeform 10">
+            <a:extLst>
+              <a:ext uri="{FF2B5EF4-FFF2-40B4-BE49-F238E27FC236}">
+                <a16:creationId xmlns:a16="http://schemas.microsoft.com/office/drawing/2014/main" id="{94AE61AA-4814-6C64-AB7F-1983BB22E6C6}"/>
+              </a:ext>
+            </a:extLst>
+          </p:cNvPr>
+          <p:cNvSpPr/>
+          <p:nvPr/>
+        </p:nvSpPr>
+        <p:spPr>
+          <a:xfrm>
+            <a:off x="1385575" y="5494326"/>
+            <a:ext cx="452510" cy="333089"/>
+          </a:xfrm>
+          <a:custGeom>
+            <a:avLst/>
+            <a:gdLst>
+              <a:gd name="csX0" fmla="*/ 0 w 452510"/>
+              <a:gd name="csY0" fmla="*/ 11541 h 333089"/>
+              <a:gd name="csX1" fmla="*/ 70339 w 452510"/>
+              <a:gd name="csY1" fmla="*/ 1493 h 333089"/>
+              <a:gd name="csX2" fmla="*/ 80387 w 452510"/>
+              <a:gd name="csY2" fmla="*/ 31638 h 333089"/>
+              <a:gd name="csX3" fmla="*/ 90435 w 452510"/>
+              <a:gd name="csY3" fmla="*/ 101977 h 333089"/>
+              <a:gd name="csX4" fmla="*/ 150725 w 452510"/>
+              <a:gd name="csY4" fmla="*/ 71832 h 333089"/>
+              <a:gd name="csX5" fmla="*/ 160774 w 452510"/>
+              <a:gd name="csY5" fmla="*/ 101977 h 333089"/>
+              <a:gd name="csX6" fmla="*/ 170822 w 452510"/>
+              <a:gd name="csY6" fmla="*/ 142170 h 333089"/>
+              <a:gd name="csX7" fmla="*/ 211016 w 452510"/>
+              <a:gd name="csY7" fmla="*/ 132122 h 333089"/>
+              <a:gd name="csX8" fmla="*/ 241161 w 452510"/>
+              <a:gd name="csY8" fmla="*/ 122073 h 333089"/>
+              <a:gd name="csX9" fmla="*/ 271306 w 452510"/>
+              <a:gd name="csY9" fmla="*/ 132122 h 333089"/>
+              <a:gd name="csX10" fmla="*/ 311499 w 452510"/>
+              <a:gd name="csY10" fmla="*/ 212509 h 333089"/>
+              <a:gd name="csX11" fmla="*/ 341644 w 452510"/>
+              <a:gd name="csY11" fmla="*/ 202460 h 333089"/>
+              <a:gd name="csX12" fmla="*/ 351692 w 452510"/>
+              <a:gd name="csY12" fmla="*/ 232605 h 333089"/>
+              <a:gd name="csX13" fmla="*/ 361741 w 452510"/>
+              <a:gd name="csY13" fmla="*/ 272799 h 333089"/>
+              <a:gd name="csX14" fmla="*/ 401934 w 452510"/>
+              <a:gd name="csY14" fmla="*/ 262750 h 333089"/>
+              <a:gd name="csX15" fmla="*/ 442128 w 452510"/>
+              <a:gd name="csY15" fmla="*/ 272799 h 333089"/>
+              <a:gd name="csX16" fmla="*/ 452176 w 452510"/>
+              <a:gd name="csY16" fmla="*/ 333089 h 333089"/>
+            </a:gdLst>
+            <a:ahLst/>
+            <a:cxnLst>
+              <a:cxn ang="0">
+                <a:pos x="csX0" y="csY0"/>
+              </a:cxn>
+              <a:cxn ang="0">
+                <a:pos x="csX1" y="csY1"/>
+              </a:cxn>
+              <a:cxn ang="0">
+                <a:pos x="csX2" y="csY2"/>
+              </a:cxn>
+              <a:cxn ang="0">
+                <a:pos x="csX3" y="csY3"/>
+              </a:cxn>
+              <a:cxn ang="0">
+                <a:pos x="csX4" y="csY4"/>
+              </a:cxn>
+              <a:cxn ang="0">
+                <a:pos x="csX5" y="csY5"/>
+              </a:cxn>
+              <a:cxn ang="0">
+                <a:pos x="csX6" y="csY6"/>
+              </a:cxn>
+              <a:cxn ang="0">
+                <a:pos x="csX7" y="csY7"/>
+              </a:cxn>
+              <a:cxn ang="0">
+                <a:pos x="csX8" y="csY8"/>
+              </a:cxn>
+              <a:cxn ang="0">
+                <a:pos x="csX9" y="csY9"/>
+              </a:cxn>
+              <a:cxn ang="0">
+                <a:pos x="csX10" y="csY10"/>
+              </a:cxn>
+              <a:cxn ang="0">
+                <a:pos x="csX11" y="csY11"/>
+              </a:cxn>
+              <a:cxn ang="0">
+                <a:pos x="csX12" y="csY12"/>
+              </a:cxn>
+              <a:cxn ang="0">
+                <a:pos x="csX13" y="csY13"/>
+              </a:cxn>
+              <a:cxn ang="0">
+                <a:pos x="csX14" y="csY14"/>
+              </a:cxn>
+              <a:cxn ang="0">
+                <a:pos x="csX15" y="csY15"/>
+              </a:cxn>
+              <a:cxn ang="0">
+                <a:pos x="csX16" y="csY16"/>
+              </a:cxn>
+            </a:cxnLst>
+            <a:rect l="l" t="t" r="r" b="b"/>
+            <a:pathLst>
+              <a:path w="452510" h="333089">
+                <a:moveTo>
+                  <a:pt x="0" y="11541"/>
+                </a:moveTo>
+                <a:cubicBezTo>
+                  <a:pt x="23446" y="8192"/>
+                  <a:pt x="47362" y="-4251"/>
+                  <a:pt x="70339" y="1493"/>
+                </a:cubicBezTo>
+                <a:cubicBezTo>
+                  <a:pt x="80615" y="4062"/>
+                  <a:pt x="78310" y="21252"/>
+                  <a:pt x="80387" y="31638"/>
+                </a:cubicBezTo>
+                <a:cubicBezTo>
+                  <a:pt x="85032" y="54862"/>
+                  <a:pt x="87086" y="78531"/>
+                  <a:pt x="90435" y="101977"/>
+                </a:cubicBezTo>
+                <a:cubicBezTo>
+                  <a:pt x="95512" y="98592"/>
+                  <a:pt x="138838" y="65889"/>
+                  <a:pt x="150725" y="71832"/>
+                </a:cubicBezTo>
+                <a:cubicBezTo>
+                  <a:pt x="160199" y="76569"/>
+                  <a:pt x="157864" y="91793"/>
+                  <a:pt x="160774" y="101977"/>
+                </a:cubicBezTo>
+                <a:cubicBezTo>
+                  <a:pt x="164568" y="115256"/>
+                  <a:pt x="167473" y="128772"/>
+                  <a:pt x="170822" y="142170"/>
+                </a:cubicBezTo>
+                <a:cubicBezTo>
+                  <a:pt x="184220" y="138821"/>
+                  <a:pt x="197737" y="135916"/>
+                  <a:pt x="211016" y="132122"/>
+                </a:cubicBezTo>
+                <a:cubicBezTo>
+                  <a:pt x="221200" y="129212"/>
+                  <a:pt x="230569" y="122073"/>
+                  <a:pt x="241161" y="122073"/>
+                </a:cubicBezTo>
+                <a:cubicBezTo>
+                  <a:pt x="251753" y="122073"/>
+                  <a:pt x="261258" y="128772"/>
+                  <a:pt x="271306" y="132122"/>
+                </a:cubicBezTo>
+                <a:cubicBezTo>
+                  <a:pt x="276529" y="163461"/>
+                  <a:pt x="268439" y="205333"/>
+                  <a:pt x="311499" y="212509"/>
+                </a:cubicBezTo>
+                <a:cubicBezTo>
+                  <a:pt x="321947" y="214250"/>
+                  <a:pt x="331596" y="205810"/>
+                  <a:pt x="341644" y="202460"/>
+                </a:cubicBezTo>
+                <a:cubicBezTo>
+                  <a:pt x="344993" y="212508"/>
+                  <a:pt x="348782" y="222421"/>
+                  <a:pt x="351692" y="232605"/>
+                </a:cubicBezTo>
+                <a:cubicBezTo>
+                  <a:pt x="355486" y="245884"/>
+                  <a:pt x="349899" y="265694"/>
+                  <a:pt x="361741" y="272799"/>
+                </a:cubicBezTo>
+                <a:cubicBezTo>
+                  <a:pt x="373583" y="279904"/>
+                  <a:pt x="388536" y="266100"/>
+                  <a:pt x="401934" y="262750"/>
+                </a:cubicBezTo>
+                <a:cubicBezTo>
+                  <a:pt x="415332" y="266100"/>
+                  <a:pt x="431344" y="264172"/>
+                  <a:pt x="442128" y="272799"/>
+                </a:cubicBezTo>
+                <a:cubicBezTo>
+                  <a:pt x="455353" y="283379"/>
+                  <a:pt x="452176" y="319956"/>
+                  <a:pt x="452176" y="333089"/>
+                </a:cubicBezTo>
+              </a:path>
+            </a:pathLst>
+          </a:custGeom>
+          <a:noFill/>
+          <a:ln>
+            <a:solidFill>
+              <a:srgbClr val="FF0000"/>
+            </a:solidFill>
+          </a:ln>
+        </p:spPr>
+        <p:style>
+          <a:lnRef idx="2">
+            <a:schemeClr val="accent1">
+              <a:shade val="15000"/>
+            </a:schemeClr>
+          </a:lnRef>
+          <a:fillRef idx="1">
+            <a:schemeClr val="accent1"/>
+          </a:fillRef>
+          <a:effectRef idx="0">
+            <a:schemeClr val="accent1"/>
+          </a:effectRef>
+          <a:fontRef idx="minor">
+            <a:schemeClr val="lt1"/>
+          </a:fontRef>
+        </p:style>
+        <p:txBody>
+          <a:bodyPr rtlCol="0" anchor="ctr"/>
+          <a:lstStyle/>
+          <a:p>
+            <a:pPr algn="ctr"/>
+            <a:endParaRPr lang="en-US"/>
+          </a:p>
+        </p:txBody>
+      </p:sp>
+      <p:cxnSp>
+        <p:nvCxnSpPr>
+          <p:cNvPr id="13" name="Straight Arrow Connector 12">
+            <a:extLst>
+              <a:ext uri="{FF2B5EF4-FFF2-40B4-BE49-F238E27FC236}">
+                <a16:creationId xmlns:a16="http://schemas.microsoft.com/office/drawing/2014/main" id="{DCE9D35B-86FE-E1C6-0E9E-1F54A30BE6FC}"/>
+              </a:ext>
+            </a:extLst>
+          </p:cNvPr>
+          <p:cNvCxnSpPr/>
+          <p:nvPr/>
+        </p:nvCxnSpPr>
+        <p:spPr>
+          <a:xfrm>
+            <a:off x="1715389" y="5316370"/>
+            <a:ext cx="1552074" cy="625642"/>
+          </a:xfrm>
+          <a:prstGeom prst="straightConnector1">
+            <a:avLst/>
+          </a:prstGeom>
+          <a:ln>
+            <a:solidFill>
+              <a:srgbClr val="FF0000"/>
+            </a:solidFill>
+            <a:tailEnd type="triangle"/>
+          </a:ln>
+        </p:spPr>
+        <p:style>
+          <a:lnRef idx="2">
+            <a:schemeClr val="accent1"/>
+          </a:lnRef>
+          <a:fillRef idx="0">
+            <a:schemeClr val="accent1"/>
+          </a:fillRef>
+          <a:effectRef idx="1">
+            <a:schemeClr val="accent1"/>
+          </a:effectRef>
+          <a:fontRef idx="minor">
+            <a:schemeClr val="tx1"/>
+          </a:fontRef>
+        </p:style>
+      </p:cxnSp>
+      <p:grpSp>
+        <p:nvGrpSpPr>
+          <p:cNvPr id="32" name="Group 31">
+            <a:extLst>
+              <a:ext uri="{FF2B5EF4-FFF2-40B4-BE49-F238E27FC236}">
+                <a16:creationId xmlns:a16="http://schemas.microsoft.com/office/drawing/2014/main" id="{1F6DF060-93CD-D6E4-AEE7-9C17422AE266}"/>
+              </a:ext>
+            </a:extLst>
+          </p:cNvPr>
+          <p:cNvGrpSpPr/>
+          <p:nvPr/>
+        </p:nvGrpSpPr>
+        <p:grpSpPr>
+          <a:xfrm>
+            <a:off x="1449802" y="3296064"/>
+            <a:ext cx="5914662" cy="462224"/>
+            <a:chOff x="1932123" y="3818579"/>
+            <a:chExt cx="5914662" cy="462224"/>
+          </a:xfrm>
+        </p:grpSpPr>
+        <p:grpSp>
+          <p:nvGrpSpPr>
+            <p:cNvPr id="16" name="Group 15">
+              <a:extLst>
+                <a:ext uri="{FF2B5EF4-FFF2-40B4-BE49-F238E27FC236}">
+                  <a16:creationId xmlns:a16="http://schemas.microsoft.com/office/drawing/2014/main" id="{CC62CF4C-C09C-6397-C67A-AC90C85DA772}"/>
+                </a:ext>
+              </a:extLst>
+            </p:cNvPr>
+            <p:cNvGrpSpPr/>
+            <p:nvPr/>
+          </p:nvGrpSpPr>
+          <p:grpSpPr>
+            <a:xfrm>
+              <a:off x="1932123" y="3818579"/>
+              <a:ext cx="991947" cy="462224"/>
+              <a:chOff x="1932123" y="3818374"/>
+              <a:chExt cx="991947" cy="462224"/>
+            </a:xfrm>
+          </p:grpSpPr>
+          <p:sp>
+            <p:nvSpPr>
+              <p:cNvPr id="14" name="Rectangle 13">
+                <a:extLst>
+                  <a:ext uri="{FF2B5EF4-FFF2-40B4-BE49-F238E27FC236}">
+                    <a16:creationId xmlns:a16="http://schemas.microsoft.com/office/drawing/2014/main" id="{A76F670E-BBC3-95DA-D7B4-38FA382A158B}"/>
+                  </a:ext>
+                </a:extLst>
+              </p:cNvPr>
+              <p:cNvSpPr/>
+              <p:nvPr/>
+            </p:nvSpPr>
+            <p:spPr>
+              <a:xfrm>
+                <a:off x="1932123" y="3818374"/>
+                <a:ext cx="991947" cy="462224"/>
+              </a:xfrm>
+              <a:prstGeom prst="rect">
+                <a:avLst/>
+              </a:prstGeom>
+              <a:noFill/>
+            </p:spPr>
+            <p:style>
+              <a:lnRef idx="2">
+                <a:schemeClr val="accent1">
+                  <a:shade val="15000"/>
+                </a:schemeClr>
+              </a:lnRef>
+              <a:fillRef idx="1">
+                <a:schemeClr val="accent1"/>
+              </a:fillRef>
+              <a:effectRef idx="0">
+                <a:schemeClr val="accent1"/>
+              </a:effectRef>
+              <a:fontRef idx="minor">
+                <a:schemeClr val="lt1"/>
+              </a:fontRef>
+            </p:style>
+            <p:txBody>
+              <a:bodyPr rtlCol="0" anchor="ctr"/>
+              <a:lstStyle/>
+              <a:p>
+                <a:pPr algn="ctr"/>
+                <a:endParaRPr lang="en-US"/>
+              </a:p>
+            </p:txBody>
+          </p:sp>
+          <p:sp>
+            <p:nvSpPr>
+              <p:cNvPr id="15" name="TextBox 14">
+                <a:extLst>
+                  <a:ext uri="{FF2B5EF4-FFF2-40B4-BE49-F238E27FC236}">
+                    <a16:creationId xmlns:a16="http://schemas.microsoft.com/office/drawing/2014/main" id="{6243035A-5C80-FF2E-CBCA-8E341192E22B}"/>
+                  </a:ext>
+                </a:extLst>
+              </p:cNvPr>
+              <p:cNvSpPr txBox="1"/>
+              <p:nvPr/>
+            </p:nvSpPr>
+            <p:spPr>
+              <a:xfrm>
+                <a:off x="2143724" y="3864820"/>
+                <a:ext cx="568745" cy="369332"/>
+              </a:xfrm>
+              <a:prstGeom prst="rect">
+                <a:avLst/>
+              </a:prstGeom>
+              <a:noFill/>
+            </p:spPr>
+            <p:txBody>
+              <a:bodyPr wrap="none" rtlCol="0">
+                <a:spAutoFit/>
+              </a:bodyPr>
+              <a:lstStyle/>
+              <a:p>
+                <a:r>
+                  <a:rPr lang="en-US" dirty="0"/>
+                  <a:t>LAX</a:t>
+                </a:r>
+              </a:p>
+            </p:txBody>
+          </p:sp>
+        </p:grpSp>
+        <p:grpSp>
+          <p:nvGrpSpPr>
+            <p:cNvPr id="17" name="Group 16">
+              <a:extLst>
+                <a:ext uri="{FF2B5EF4-FFF2-40B4-BE49-F238E27FC236}">
+                  <a16:creationId xmlns:a16="http://schemas.microsoft.com/office/drawing/2014/main" id="{5C77C1A8-13B5-6AFE-6BE5-454D670F5903}"/>
+                </a:ext>
+              </a:extLst>
+            </p:cNvPr>
+            <p:cNvGrpSpPr/>
+            <p:nvPr/>
+          </p:nvGrpSpPr>
+          <p:grpSpPr>
+            <a:xfrm>
+              <a:off x="2916666" y="3818579"/>
+              <a:ext cx="991947" cy="462224"/>
+              <a:chOff x="1932123" y="3818374"/>
+              <a:chExt cx="991947" cy="462224"/>
+            </a:xfrm>
+          </p:grpSpPr>
+          <p:sp>
+            <p:nvSpPr>
+              <p:cNvPr id="18" name="Rectangle 17">
+                <a:extLst>
+                  <a:ext uri="{FF2B5EF4-FFF2-40B4-BE49-F238E27FC236}">
+                    <a16:creationId xmlns:a16="http://schemas.microsoft.com/office/drawing/2014/main" id="{472B069E-B019-C502-0DCD-18F8FF69C9D7}"/>
+                  </a:ext>
+                </a:extLst>
+              </p:cNvPr>
+              <p:cNvSpPr/>
+              <p:nvPr/>
+            </p:nvSpPr>
+            <p:spPr>
+              <a:xfrm>
+                <a:off x="1932123" y="3818374"/>
+                <a:ext cx="991947" cy="462224"/>
+              </a:xfrm>
+              <a:prstGeom prst="rect">
+                <a:avLst/>
+              </a:prstGeom>
+              <a:noFill/>
+            </p:spPr>
+            <p:style>
+              <a:lnRef idx="2">
+                <a:schemeClr val="accent1">
+                  <a:shade val="15000"/>
+                </a:schemeClr>
+              </a:lnRef>
+              <a:fillRef idx="1">
+                <a:schemeClr val="accent1"/>
+              </a:fillRef>
+              <a:effectRef idx="0">
+                <a:schemeClr val="accent1"/>
+              </a:effectRef>
+              <a:fontRef idx="minor">
+                <a:schemeClr val="lt1"/>
+              </a:fontRef>
+            </p:style>
+            <p:txBody>
+              <a:bodyPr rtlCol="0" anchor="ctr"/>
+              <a:lstStyle/>
+              <a:p>
+                <a:pPr algn="ctr"/>
+                <a:endParaRPr lang="en-US"/>
+              </a:p>
+            </p:txBody>
+          </p:sp>
+          <p:sp>
+            <p:nvSpPr>
+              <p:cNvPr id="19" name="TextBox 18">
+                <a:extLst>
+                  <a:ext uri="{FF2B5EF4-FFF2-40B4-BE49-F238E27FC236}">
+                    <a16:creationId xmlns:a16="http://schemas.microsoft.com/office/drawing/2014/main" id="{94D7F3E6-AE2D-203A-4ADD-8E780FCB5710}"/>
+                  </a:ext>
+                </a:extLst>
+              </p:cNvPr>
+              <p:cNvSpPr txBox="1"/>
+              <p:nvPr/>
+            </p:nvSpPr>
+            <p:spPr>
+              <a:xfrm>
+                <a:off x="2143724" y="3864820"/>
+                <a:ext cx="630301" cy="369332"/>
+              </a:xfrm>
+              <a:prstGeom prst="rect">
+                <a:avLst/>
+              </a:prstGeom>
+              <a:noFill/>
+            </p:spPr>
+            <p:txBody>
+              <a:bodyPr wrap="none" rtlCol="0">
+                <a:spAutoFit/>
+              </a:bodyPr>
+              <a:lstStyle/>
+              <a:p>
+                <a:r>
+                  <a:rPr lang="en-US" dirty="0"/>
+                  <a:t>MSP</a:t>
+                </a:r>
+              </a:p>
+            </p:txBody>
+          </p:sp>
+        </p:grpSp>
+        <p:grpSp>
+          <p:nvGrpSpPr>
+            <p:cNvPr id="20" name="Group 19">
+              <a:extLst>
+                <a:ext uri="{FF2B5EF4-FFF2-40B4-BE49-F238E27FC236}">
+                  <a16:creationId xmlns:a16="http://schemas.microsoft.com/office/drawing/2014/main" id="{5F615495-C341-3233-4597-4E21FCEA2B71}"/>
+                </a:ext>
+              </a:extLst>
+            </p:cNvPr>
+            <p:cNvGrpSpPr/>
+            <p:nvPr/>
+          </p:nvGrpSpPr>
+          <p:grpSpPr>
+            <a:xfrm>
+              <a:off x="3901209" y="3818579"/>
+              <a:ext cx="991947" cy="462224"/>
+              <a:chOff x="1932123" y="3818374"/>
+              <a:chExt cx="991947" cy="462224"/>
+            </a:xfrm>
+          </p:grpSpPr>
+          <p:sp>
+            <p:nvSpPr>
+              <p:cNvPr id="21" name="Rectangle 20">
+                <a:extLst>
+                  <a:ext uri="{FF2B5EF4-FFF2-40B4-BE49-F238E27FC236}">
+                    <a16:creationId xmlns:a16="http://schemas.microsoft.com/office/drawing/2014/main" id="{ABE3428E-EB73-F302-1760-472AAB40936D}"/>
+                  </a:ext>
+                </a:extLst>
+              </p:cNvPr>
+              <p:cNvSpPr/>
+              <p:nvPr/>
+            </p:nvSpPr>
+            <p:spPr>
+              <a:xfrm>
+                <a:off x="1932123" y="3818374"/>
+                <a:ext cx="991947" cy="462224"/>
+              </a:xfrm>
+              <a:prstGeom prst="rect">
+                <a:avLst/>
+              </a:prstGeom>
+              <a:noFill/>
+            </p:spPr>
+            <p:style>
+              <a:lnRef idx="2">
+                <a:schemeClr val="accent1">
+                  <a:shade val="15000"/>
+                </a:schemeClr>
+              </a:lnRef>
+              <a:fillRef idx="1">
+                <a:schemeClr val="accent1"/>
+              </a:fillRef>
+              <a:effectRef idx="0">
+                <a:schemeClr val="accent1"/>
+              </a:effectRef>
+              <a:fontRef idx="minor">
+                <a:schemeClr val="lt1"/>
+              </a:fontRef>
+            </p:style>
+            <p:txBody>
+              <a:bodyPr rtlCol="0" anchor="ctr"/>
+              <a:lstStyle/>
+              <a:p>
+                <a:pPr algn="ctr"/>
+                <a:endParaRPr lang="en-US"/>
+              </a:p>
+            </p:txBody>
+          </p:sp>
+          <p:sp>
+            <p:nvSpPr>
+              <p:cNvPr id="22" name="TextBox 21">
+                <a:extLst>
+                  <a:ext uri="{FF2B5EF4-FFF2-40B4-BE49-F238E27FC236}">
+                    <a16:creationId xmlns:a16="http://schemas.microsoft.com/office/drawing/2014/main" id="{CAE47FC6-C4EA-ADB8-3A53-F57824455F36}"/>
+                  </a:ext>
+                </a:extLst>
+              </p:cNvPr>
+              <p:cNvSpPr txBox="1"/>
+              <p:nvPr/>
+            </p:nvSpPr>
+            <p:spPr>
+              <a:xfrm>
+                <a:off x="2143724" y="3864820"/>
+                <a:ext cx="536365" cy="369332"/>
+              </a:xfrm>
+              <a:prstGeom prst="rect">
+                <a:avLst/>
+              </a:prstGeom>
+              <a:noFill/>
+            </p:spPr>
+            <p:txBody>
+              <a:bodyPr wrap="none" rtlCol="0">
+                <a:spAutoFit/>
+              </a:bodyPr>
+              <a:lstStyle/>
+              <a:p>
+                <a:r>
+                  <a:rPr lang="en-US" dirty="0"/>
+                  <a:t>ATL</a:t>
+                </a:r>
+              </a:p>
+            </p:txBody>
+          </p:sp>
+        </p:grpSp>
+        <p:grpSp>
+          <p:nvGrpSpPr>
+            <p:cNvPr id="23" name="Group 22">
+              <a:extLst>
+                <a:ext uri="{FF2B5EF4-FFF2-40B4-BE49-F238E27FC236}">
+                  <a16:creationId xmlns:a16="http://schemas.microsoft.com/office/drawing/2014/main" id="{0270605A-19CF-4CA5-2C11-8A672DABAC22}"/>
+                </a:ext>
+              </a:extLst>
+            </p:cNvPr>
+            <p:cNvGrpSpPr/>
+            <p:nvPr/>
+          </p:nvGrpSpPr>
+          <p:grpSpPr>
+            <a:xfrm>
+              <a:off x="4885752" y="3818579"/>
+              <a:ext cx="991947" cy="462224"/>
+              <a:chOff x="1932123" y="3818374"/>
+              <a:chExt cx="991947" cy="462224"/>
+            </a:xfrm>
+          </p:grpSpPr>
+          <p:sp>
+            <p:nvSpPr>
+              <p:cNvPr id="24" name="Rectangle 23">
+                <a:extLst>
+                  <a:ext uri="{FF2B5EF4-FFF2-40B4-BE49-F238E27FC236}">
+                    <a16:creationId xmlns:a16="http://schemas.microsoft.com/office/drawing/2014/main" id="{5E2532A1-A06C-8205-616C-7C02ACF48B63}"/>
+                  </a:ext>
+                </a:extLst>
+              </p:cNvPr>
+              <p:cNvSpPr/>
+              <p:nvPr/>
+            </p:nvSpPr>
+            <p:spPr>
+              <a:xfrm>
+                <a:off x="1932123" y="3818374"/>
+                <a:ext cx="991947" cy="462224"/>
+              </a:xfrm>
+              <a:prstGeom prst="rect">
+                <a:avLst/>
+              </a:prstGeom>
+              <a:noFill/>
+            </p:spPr>
+            <p:style>
+              <a:lnRef idx="2">
+                <a:schemeClr val="accent1">
+                  <a:shade val="15000"/>
+                </a:schemeClr>
+              </a:lnRef>
+              <a:fillRef idx="1">
+                <a:schemeClr val="accent1"/>
+              </a:fillRef>
+              <a:effectRef idx="0">
+                <a:schemeClr val="accent1"/>
+              </a:effectRef>
+              <a:fontRef idx="minor">
+                <a:schemeClr val="lt1"/>
+              </a:fontRef>
+            </p:style>
+            <p:txBody>
+              <a:bodyPr rtlCol="0" anchor="ctr"/>
+              <a:lstStyle/>
+              <a:p>
+                <a:pPr algn="ctr"/>
+                <a:endParaRPr lang="en-US"/>
+              </a:p>
+            </p:txBody>
+          </p:sp>
+          <p:sp>
+            <p:nvSpPr>
+              <p:cNvPr id="25" name="TextBox 24">
+                <a:extLst>
+                  <a:ext uri="{FF2B5EF4-FFF2-40B4-BE49-F238E27FC236}">
+                    <a16:creationId xmlns:a16="http://schemas.microsoft.com/office/drawing/2014/main" id="{B0C84A73-D74F-CD2D-5267-61998FD0E552}"/>
+                  </a:ext>
+                </a:extLst>
+              </p:cNvPr>
+              <p:cNvSpPr txBox="1"/>
+              <p:nvPr/>
+            </p:nvSpPr>
+            <p:spPr>
+              <a:xfrm>
+                <a:off x="2143724" y="3864820"/>
+                <a:ext cx="622286" cy="369332"/>
+              </a:xfrm>
+              <a:prstGeom prst="rect">
+                <a:avLst/>
+              </a:prstGeom>
+              <a:noFill/>
+            </p:spPr>
+            <p:txBody>
+              <a:bodyPr wrap="none" rtlCol="0">
+                <a:spAutoFit/>
+              </a:bodyPr>
+              <a:lstStyle/>
+              <a:p>
+                <a:r>
+                  <a:rPr lang="en-US" dirty="0"/>
+                  <a:t>BOS</a:t>
+                </a:r>
+              </a:p>
+            </p:txBody>
+          </p:sp>
+        </p:grpSp>
+        <p:grpSp>
+          <p:nvGrpSpPr>
+            <p:cNvPr id="26" name="Group 25">
+              <a:extLst>
+                <a:ext uri="{FF2B5EF4-FFF2-40B4-BE49-F238E27FC236}">
+                  <a16:creationId xmlns:a16="http://schemas.microsoft.com/office/drawing/2014/main" id="{254462AB-05EF-A12D-1381-64FC30FEEC13}"/>
+                </a:ext>
+              </a:extLst>
+            </p:cNvPr>
+            <p:cNvGrpSpPr/>
+            <p:nvPr/>
+          </p:nvGrpSpPr>
+          <p:grpSpPr>
+            <a:xfrm>
+              <a:off x="5870295" y="3818579"/>
+              <a:ext cx="991947" cy="462224"/>
+              <a:chOff x="1932123" y="3818374"/>
+              <a:chExt cx="991947" cy="462224"/>
+            </a:xfrm>
+          </p:grpSpPr>
+          <p:sp>
+            <p:nvSpPr>
+              <p:cNvPr id="27" name="Rectangle 26">
+                <a:extLst>
+                  <a:ext uri="{FF2B5EF4-FFF2-40B4-BE49-F238E27FC236}">
+                    <a16:creationId xmlns:a16="http://schemas.microsoft.com/office/drawing/2014/main" id="{2D02993B-54FE-9E40-9B59-F93A41E6531C}"/>
+                  </a:ext>
+                </a:extLst>
+              </p:cNvPr>
+              <p:cNvSpPr/>
+              <p:nvPr/>
+            </p:nvSpPr>
+            <p:spPr>
+              <a:xfrm>
+                <a:off x="1932123" y="3818374"/>
+                <a:ext cx="991947" cy="462224"/>
+              </a:xfrm>
+              <a:prstGeom prst="rect">
+                <a:avLst/>
+              </a:prstGeom>
+              <a:noFill/>
+            </p:spPr>
+            <p:style>
+              <a:lnRef idx="2">
+                <a:schemeClr val="accent1">
+                  <a:shade val="15000"/>
+                </a:schemeClr>
+              </a:lnRef>
+              <a:fillRef idx="1">
+                <a:schemeClr val="accent1"/>
+              </a:fillRef>
+              <a:effectRef idx="0">
+                <a:schemeClr val="accent1"/>
+              </a:effectRef>
+              <a:fontRef idx="minor">
+                <a:schemeClr val="lt1"/>
+              </a:fontRef>
+            </p:style>
+            <p:txBody>
+              <a:bodyPr rtlCol="0" anchor="ctr"/>
+              <a:lstStyle/>
+              <a:p>
+                <a:pPr algn="ctr"/>
+                <a:endParaRPr lang="en-US"/>
+              </a:p>
+            </p:txBody>
+          </p:sp>
+          <p:sp>
+            <p:nvSpPr>
+              <p:cNvPr id="28" name="TextBox 27">
+                <a:extLst>
+                  <a:ext uri="{FF2B5EF4-FFF2-40B4-BE49-F238E27FC236}">
+                    <a16:creationId xmlns:a16="http://schemas.microsoft.com/office/drawing/2014/main" id="{A7BF20FB-7D47-8A23-BFBE-A6E94D0278A4}"/>
+                  </a:ext>
+                </a:extLst>
+              </p:cNvPr>
+              <p:cNvSpPr txBox="1"/>
+              <p:nvPr/>
+            </p:nvSpPr>
+            <p:spPr>
+              <a:xfrm>
+                <a:off x="2143724" y="3864820"/>
+                <a:ext cx="530915" cy="369332"/>
+              </a:xfrm>
+              <a:prstGeom prst="rect">
+                <a:avLst/>
+              </a:prstGeom>
+              <a:noFill/>
+            </p:spPr>
+            <p:txBody>
+              <a:bodyPr wrap="none" rtlCol="0">
+                <a:spAutoFit/>
+              </a:bodyPr>
+              <a:lstStyle/>
+              <a:p>
+                <a:r>
+                  <a:rPr lang="en-US" dirty="0"/>
+                  <a:t>???</a:t>
+                </a:r>
+              </a:p>
+            </p:txBody>
+          </p:sp>
+        </p:grpSp>
+        <p:grpSp>
+          <p:nvGrpSpPr>
+            <p:cNvPr id="29" name="Group 28">
+              <a:extLst>
+                <a:ext uri="{FF2B5EF4-FFF2-40B4-BE49-F238E27FC236}">
+                  <a16:creationId xmlns:a16="http://schemas.microsoft.com/office/drawing/2014/main" id="{FF508A65-EF62-9AEC-4FC9-09012A00B20C}"/>
+                </a:ext>
+              </a:extLst>
+            </p:cNvPr>
+            <p:cNvGrpSpPr/>
+            <p:nvPr/>
+          </p:nvGrpSpPr>
+          <p:grpSpPr>
+            <a:xfrm>
+              <a:off x="6854838" y="3818579"/>
+              <a:ext cx="991947" cy="462224"/>
+              <a:chOff x="1932123" y="3818374"/>
+              <a:chExt cx="991947" cy="462224"/>
+            </a:xfrm>
+          </p:grpSpPr>
+          <p:sp>
+            <p:nvSpPr>
+              <p:cNvPr id="30" name="Rectangle 29">
+                <a:extLst>
+                  <a:ext uri="{FF2B5EF4-FFF2-40B4-BE49-F238E27FC236}">
+                    <a16:creationId xmlns:a16="http://schemas.microsoft.com/office/drawing/2014/main" id="{6DEA4E64-1048-AF3F-7E2C-141F8756A43B}"/>
+                  </a:ext>
+                </a:extLst>
+              </p:cNvPr>
+              <p:cNvSpPr/>
+              <p:nvPr/>
+            </p:nvSpPr>
+            <p:spPr>
+              <a:xfrm>
+                <a:off x="1932123" y="3818374"/>
+                <a:ext cx="991947" cy="462224"/>
+              </a:xfrm>
+              <a:prstGeom prst="rect">
+                <a:avLst/>
+              </a:prstGeom>
+              <a:noFill/>
+            </p:spPr>
+            <p:style>
+              <a:lnRef idx="2">
+                <a:schemeClr val="accent1">
+                  <a:shade val="15000"/>
+                </a:schemeClr>
+              </a:lnRef>
+              <a:fillRef idx="1">
+                <a:schemeClr val="accent1"/>
+              </a:fillRef>
+              <a:effectRef idx="0">
+                <a:schemeClr val="accent1"/>
+              </a:effectRef>
+              <a:fontRef idx="minor">
+                <a:schemeClr val="lt1"/>
+              </a:fontRef>
+            </p:style>
+            <p:txBody>
+              <a:bodyPr rtlCol="0" anchor="ctr"/>
+              <a:lstStyle/>
+              <a:p>
+                <a:pPr algn="ctr"/>
+                <a:endParaRPr lang="en-US"/>
+              </a:p>
+            </p:txBody>
+          </p:sp>
+          <p:sp>
+            <p:nvSpPr>
+              <p:cNvPr id="31" name="TextBox 30">
+                <a:extLst>
+                  <a:ext uri="{FF2B5EF4-FFF2-40B4-BE49-F238E27FC236}">
+                    <a16:creationId xmlns:a16="http://schemas.microsoft.com/office/drawing/2014/main" id="{6DE5031D-C30F-6E87-62D6-C0181981660C}"/>
+                  </a:ext>
+                </a:extLst>
+              </p:cNvPr>
+              <p:cNvSpPr txBox="1"/>
+              <p:nvPr/>
+            </p:nvSpPr>
+            <p:spPr>
+              <a:xfrm>
+                <a:off x="2143724" y="3864820"/>
+                <a:ext cx="530915" cy="369332"/>
+              </a:xfrm>
+              <a:prstGeom prst="rect">
+                <a:avLst/>
+              </a:prstGeom>
+              <a:noFill/>
+            </p:spPr>
+            <p:txBody>
+              <a:bodyPr wrap="none" rtlCol="0">
+                <a:spAutoFit/>
+              </a:bodyPr>
+              <a:lstStyle/>
+              <a:p>
+                <a:r>
+                  <a:rPr lang="en-US" dirty="0"/>
+                  <a:t>???</a:t>
+                </a:r>
+              </a:p>
+            </p:txBody>
+          </p:sp>
+        </p:grpSp>
+      </p:grpSp>
+      <p:sp>
+        <p:nvSpPr>
+          <p:cNvPr id="33" name="TextBox 32">
+            <a:extLst>
+              <a:ext uri="{FF2B5EF4-FFF2-40B4-BE49-F238E27FC236}">
+                <a16:creationId xmlns:a16="http://schemas.microsoft.com/office/drawing/2014/main" id="{9469B2D3-B937-3438-BC6A-D486E32139D9}"/>
+              </a:ext>
+            </a:extLst>
+          </p:cNvPr>
+          <p:cNvSpPr txBox="1"/>
+          <p:nvPr/>
+        </p:nvSpPr>
+        <p:spPr>
+          <a:xfrm>
+            <a:off x="987816" y="3296064"/>
+            <a:ext cx="461986" cy="369332"/>
+          </a:xfrm>
+          <a:prstGeom prst="rect">
+            <a:avLst/>
+          </a:prstGeom>
+          <a:noFill/>
+        </p:spPr>
+        <p:txBody>
+          <a:bodyPr wrap="none" rtlCol="0">
+            <a:spAutoFit/>
+          </a:bodyPr>
+          <a:lstStyle/>
+          <a:p>
+            <a:r>
+              <a:rPr lang="en-US" dirty="0" err="1"/>
+              <a:t>arr</a:t>
+            </a:r>
+            <a:endParaRPr lang="en-US" dirty="0"/>
+          </a:p>
+        </p:txBody>
+      </p:sp>
+      <p:sp>
+        <p:nvSpPr>
+          <p:cNvPr id="5" name="TextBox 4">
+            <a:extLst>
+              <a:ext uri="{FF2B5EF4-FFF2-40B4-BE49-F238E27FC236}">
+                <a16:creationId xmlns:a16="http://schemas.microsoft.com/office/drawing/2014/main" id="{72DD0ED5-4118-4292-B467-31C15EDB1829}"/>
+              </a:ext>
+            </a:extLst>
+          </p:cNvPr>
+          <p:cNvSpPr txBox="1"/>
+          <p:nvPr/>
+        </p:nvSpPr>
+        <p:spPr>
+          <a:xfrm>
+            <a:off x="5599575" y="2900198"/>
+            <a:ext cx="562975" cy="369332"/>
+          </a:xfrm>
+          <a:prstGeom prst="rect">
+            <a:avLst/>
+          </a:prstGeom>
+          <a:noFill/>
+        </p:spPr>
+        <p:txBody>
+          <a:bodyPr wrap="none" rtlCol="0">
+            <a:spAutoFit/>
+          </a:bodyPr>
+          <a:lstStyle/>
+          <a:p>
+            <a:r>
+              <a:rPr lang="en-US" dirty="0"/>
+              <a:t>end</a:t>
+            </a:r>
+          </a:p>
+        </p:txBody>
+      </p:sp>
+      <p:grpSp>
+        <p:nvGrpSpPr>
+          <p:cNvPr id="8" name="Group 7">
+            <a:extLst>
+              <a:ext uri="{FF2B5EF4-FFF2-40B4-BE49-F238E27FC236}">
+                <a16:creationId xmlns:a16="http://schemas.microsoft.com/office/drawing/2014/main" id="{B5B2B9B9-06D9-2B3B-D7C6-F64799C40E62}"/>
+              </a:ext>
+            </a:extLst>
+          </p:cNvPr>
+          <p:cNvGrpSpPr/>
+          <p:nvPr/>
+        </p:nvGrpSpPr>
+        <p:grpSpPr>
+          <a:xfrm>
+            <a:off x="1385575" y="4290349"/>
+            <a:ext cx="5914662" cy="462224"/>
+            <a:chOff x="1932123" y="3818579"/>
+            <a:chExt cx="5914662" cy="462224"/>
+          </a:xfrm>
+        </p:grpSpPr>
+        <p:grpSp>
+          <p:nvGrpSpPr>
+            <p:cNvPr id="9" name="Group 8">
+              <a:extLst>
+                <a:ext uri="{FF2B5EF4-FFF2-40B4-BE49-F238E27FC236}">
+                  <a16:creationId xmlns:a16="http://schemas.microsoft.com/office/drawing/2014/main" id="{DBDD44DC-A177-F9FB-6FCF-24D16435B928}"/>
+                </a:ext>
+              </a:extLst>
+            </p:cNvPr>
+            <p:cNvGrpSpPr/>
+            <p:nvPr/>
+          </p:nvGrpSpPr>
+          <p:grpSpPr>
+            <a:xfrm>
+              <a:off x="1932123" y="3818579"/>
+              <a:ext cx="991947" cy="462224"/>
+              <a:chOff x="1932123" y="3818374"/>
+              <a:chExt cx="991947" cy="462224"/>
+            </a:xfrm>
+          </p:grpSpPr>
+          <p:sp>
+            <p:nvSpPr>
+              <p:cNvPr id="47" name="Rectangle 46">
+                <a:extLst>
+                  <a:ext uri="{FF2B5EF4-FFF2-40B4-BE49-F238E27FC236}">
+                    <a16:creationId xmlns:a16="http://schemas.microsoft.com/office/drawing/2014/main" id="{3C5A56F4-E557-9A87-0CB5-CE6D8D8E10F3}"/>
+                  </a:ext>
+                </a:extLst>
+              </p:cNvPr>
+              <p:cNvSpPr/>
+              <p:nvPr/>
+            </p:nvSpPr>
+            <p:spPr>
+              <a:xfrm>
+                <a:off x="1932123" y="3818374"/>
+                <a:ext cx="991947" cy="462224"/>
+              </a:xfrm>
+              <a:prstGeom prst="rect">
+                <a:avLst/>
+              </a:prstGeom>
+              <a:noFill/>
+            </p:spPr>
+            <p:style>
+              <a:lnRef idx="2">
+                <a:schemeClr val="accent1">
+                  <a:shade val="15000"/>
+                </a:schemeClr>
+              </a:lnRef>
+              <a:fillRef idx="1">
+                <a:schemeClr val="accent1"/>
+              </a:fillRef>
+              <a:effectRef idx="0">
+                <a:schemeClr val="accent1"/>
+              </a:effectRef>
+              <a:fontRef idx="minor">
+                <a:schemeClr val="lt1"/>
+              </a:fontRef>
+            </p:style>
+            <p:txBody>
+              <a:bodyPr rtlCol="0" anchor="ctr"/>
+              <a:lstStyle/>
+              <a:p>
+                <a:pPr algn="ctr"/>
+                <a:endParaRPr lang="en-US"/>
+              </a:p>
+            </p:txBody>
+          </p:sp>
+          <p:sp>
+            <p:nvSpPr>
+              <p:cNvPr id="48" name="TextBox 47">
+                <a:extLst>
+                  <a:ext uri="{FF2B5EF4-FFF2-40B4-BE49-F238E27FC236}">
+                    <a16:creationId xmlns:a16="http://schemas.microsoft.com/office/drawing/2014/main" id="{E2D184AE-F5BB-B677-D3B7-2912D671D0B0}"/>
+                  </a:ext>
+                </a:extLst>
+              </p:cNvPr>
+              <p:cNvSpPr txBox="1"/>
+              <p:nvPr/>
+            </p:nvSpPr>
+            <p:spPr>
+              <a:xfrm>
+                <a:off x="2143724" y="3864820"/>
+                <a:ext cx="630301" cy="369332"/>
+              </a:xfrm>
+              <a:prstGeom prst="rect">
+                <a:avLst/>
+              </a:prstGeom>
+              <a:noFill/>
+            </p:spPr>
+            <p:txBody>
+              <a:bodyPr wrap="none" rtlCol="0">
+                <a:spAutoFit/>
+              </a:bodyPr>
+              <a:lstStyle/>
+              <a:p>
+                <a:r>
+                  <a:rPr lang="en-US" dirty="0">
+                    <a:solidFill>
+                      <a:srgbClr val="FF0000"/>
+                    </a:solidFill>
+                  </a:rPr>
+                  <a:t>MSP</a:t>
+                </a:r>
+              </a:p>
+            </p:txBody>
+          </p:sp>
+        </p:grpSp>
+        <p:grpSp>
+          <p:nvGrpSpPr>
+            <p:cNvPr id="10" name="Group 9">
+              <a:extLst>
+                <a:ext uri="{FF2B5EF4-FFF2-40B4-BE49-F238E27FC236}">
+                  <a16:creationId xmlns:a16="http://schemas.microsoft.com/office/drawing/2014/main" id="{D04681C2-FC7B-2E63-957E-D9000D5AA654}"/>
+                </a:ext>
+              </a:extLst>
+            </p:cNvPr>
+            <p:cNvGrpSpPr/>
+            <p:nvPr/>
+          </p:nvGrpSpPr>
+          <p:grpSpPr>
+            <a:xfrm>
+              <a:off x="2916666" y="3818579"/>
+              <a:ext cx="991947" cy="462224"/>
+              <a:chOff x="1932123" y="3818374"/>
+              <a:chExt cx="991947" cy="462224"/>
+            </a:xfrm>
+          </p:grpSpPr>
+          <p:sp>
+            <p:nvSpPr>
+              <p:cNvPr id="45" name="Rectangle 44">
+                <a:extLst>
+                  <a:ext uri="{FF2B5EF4-FFF2-40B4-BE49-F238E27FC236}">
+                    <a16:creationId xmlns:a16="http://schemas.microsoft.com/office/drawing/2014/main" id="{D4F28C61-A73D-B9E1-6676-D2560819A30D}"/>
+                  </a:ext>
+                </a:extLst>
+              </p:cNvPr>
+              <p:cNvSpPr/>
+              <p:nvPr/>
+            </p:nvSpPr>
+            <p:spPr>
+              <a:xfrm>
+                <a:off x="1932123" y="3818374"/>
+                <a:ext cx="991947" cy="462224"/>
+              </a:xfrm>
+              <a:prstGeom prst="rect">
+                <a:avLst/>
+              </a:prstGeom>
+              <a:noFill/>
+            </p:spPr>
+            <p:style>
+              <a:lnRef idx="2">
+                <a:schemeClr val="accent1">
+                  <a:shade val="15000"/>
+                </a:schemeClr>
+              </a:lnRef>
+              <a:fillRef idx="1">
+                <a:schemeClr val="accent1"/>
+              </a:fillRef>
+              <a:effectRef idx="0">
+                <a:schemeClr val="accent1"/>
+              </a:effectRef>
+              <a:fontRef idx="minor">
+                <a:schemeClr val="lt1"/>
+              </a:fontRef>
+            </p:style>
+            <p:txBody>
+              <a:bodyPr rtlCol="0" anchor="ctr"/>
+              <a:lstStyle/>
+              <a:p>
+                <a:pPr algn="ctr"/>
+                <a:endParaRPr lang="en-US"/>
+              </a:p>
+            </p:txBody>
+          </p:sp>
+          <p:sp>
+            <p:nvSpPr>
+              <p:cNvPr id="46" name="TextBox 45">
+                <a:extLst>
+                  <a:ext uri="{FF2B5EF4-FFF2-40B4-BE49-F238E27FC236}">
+                    <a16:creationId xmlns:a16="http://schemas.microsoft.com/office/drawing/2014/main" id="{8D8C7ED4-0634-C2D7-5B77-5A8D16943D66}"/>
+                  </a:ext>
+                </a:extLst>
+              </p:cNvPr>
+              <p:cNvSpPr txBox="1"/>
+              <p:nvPr/>
+            </p:nvSpPr>
+            <p:spPr>
+              <a:xfrm>
+                <a:off x="2143724" y="3864820"/>
+                <a:ext cx="536365" cy="369332"/>
+              </a:xfrm>
+              <a:prstGeom prst="rect">
+                <a:avLst/>
+              </a:prstGeom>
+              <a:noFill/>
+            </p:spPr>
+            <p:txBody>
+              <a:bodyPr wrap="none" rtlCol="0">
+                <a:spAutoFit/>
+              </a:bodyPr>
+              <a:lstStyle/>
+              <a:p>
+                <a:r>
+                  <a:rPr lang="en-US" dirty="0">
+                    <a:solidFill>
+                      <a:srgbClr val="FF0000"/>
+                    </a:solidFill>
+                  </a:rPr>
+                  <a:t>ATL</a:t>
+                </a:r>
+              </a:p>
+            </p:txBody>
+          </p:sp>
+        </p:grpSp>
+        <p:grpSp>
+          <p:nvGrpSpPr>
+            <p:cNvPr id="12" name="Group 11">
+              <a:extLst>
+                <a:ext uri="{FF2B5EF4-FFF2-40B4-BE49-F238E27FC236}">
+                  <a16:creationId xmlns:a16="http://schemas.microsoft.com/office/drawing/2014/main" id="{195639B0-38B9-FF08-7B72-128E0BFC97F1}"/>
+                </a:ext>
+              </a:extLst>
+            </p:cNvPr>
+            <p:cNvGrpSpPr/>
+            <p:nvPr/>
+          </p:nvGrpSpPr>
+          <p:grpSpPr>
+            <a:xfrm>
+              <a:off x="3901209" y="3818579"/>
+              <a:ext cx="991947" cy="462224"/>
+              <a:chOff x="1932123" y="3818374"/>
+              <a:chExt cx="991947" cy="462224"/>
+            </a:xfrm>
+          </p:grpSpPr>
+          <p:sp>
+            <p:nvSpPr>
+              <p:cNvPr id="43" name="Rectangle 42">
+                <a:extLst>
+                  <a:ext uri="{FF2B5EF4-FFF2-40B4-BE49-F238E27FC236}">
+                    <a16:creationId xmlns:a16="http://schemas.microsoft.com/office/drawing/2014/main" id="{F4DEFBB6-5530-9B35-95FB-33730B617F36}"/>
+                  </a:ext>
+                </a:extLst>
+              </p:cNvPr>
+              <p:cNvSpPr/>
+              <p:nvPr/>
+            </p:nvSpPr>
+            <p:spPr>
+              <a:xfrm>
+                <a:off x="1932123" y="3818374"/>
+                <a:ext cx="991947" cy="462224"/>
+              </a:xfrm>
+              <a:prstGeom prst="rect">
+                <a:avLst/>
+              </a:prstGeom>
+              <a:noFill/>
+            </p:spPr>
+            <p:style>
+              <a:lnRef idx="2">
+                <a:schemeClr val="accent1">
+                  <a:shade val="15000"/>
+                </a:schemeClr>
+              </a:lnRef>
+              <a:fillRef idx="1">
+                <a:schemeClr val="accent1"/>
+              </a:fillRef>
+              <a:effectRef idx="0">
+                <a:schemeClr val="accent1"/>
+              </a:effectRef>
+              <a:fontRef idx="minor">
+                <a:schemeClr val="lt1"/>
+              </a:fontRef>
+            </p:style>
+            <p:txBody>
+              <a:bodyPr rtlCol="0" anchor="ctr"/>
+              <a:lstStyle/>
+              <a:p>
+                <a:pPr algn="ctr"/>
+                <a:endParaRPr lang="en-US"/>
+              </a:p>
+            </p:txBody>
+          </p:sp>
+          <p:sp>
+            <p:nvSpPr>
+              <p:cNvPr id="44" name="TextBox 43">
+                <a:extLst>
+                  <a:ext uri="{FF2B5EF4-FFF2-40B4-BE49-F238E27FC236}">
+                    <a16:creationId xmlns:a16="http://schemas.microsoft.com/office/drawing/2014/main" id="{4ACD65DA-3A5A-A90D-6416-E70463ECF6F2}"/>
+                  </a:ext>
+                </a:extLst>
+              </p:cNvPr>
+              <p:cNvSpPr txBox="1"/>
+              <p:nvPr/>
+            </p:nvSpPr>
+            <p:spPr>
+              <a:xfrm>
+                <a:off x="2143724" y="3864820"/>
+                <a:ext cx="622286" cy="369332"/>
+              </a:xfrm>
+              <a:prstGeom prst="rect">
+                <a:avLst/>
+              </a:prstGeom>
+              <a:noFill/>
+            </p:spPr>
+            <p:txBody>
+              <a:bodyPr wrap="none" rtlCol="0">
+                <a:spAutoFit/>
+              </a:bodyPr>
+              <a:lstStyle/>
+              <a:p>
+                <a:r>
+                  <a:rPr lang="en-US" dirty="0">
+                    <a:solidFill>
+                      <a:srgbClr val="FF0000"/>
+                    </a:solidFill>
+                  </a:rPr>
+                  <a:t>BOS</a:t>
+                </a:r>
+              </a:p>
+            </p:txBody>
+          </p:sp>
+        </p:grpSp>
+        <p:grpSp>
+          <p:nvGrpSpPr>
+            <p:cNvPr id="34" name="Group 33">
+              <a:extLst>
+                <a:ext uri="{FF2B5EF4-FFF2-40B4-BE49-F238E27FC236}">
+                  <a16:creationId xmlns:a16="http://schemas.microsoft.com/office/drawing/2014/main" id="{CAA6C721-A8C9-912A-D8EA-27CD6C1266A0}"/>
+                </a:ext>
+              </a:extLst>
+            </p:cNvPr>
+            <p:cNvGrpSpPr/>
+            <p:nvPr/>
+          </p:nvGrpSpPr>
+          <p:grpSpPr>
+            <a:xfrm>
+              <a:off x="4885752" y="3818579"/>
+              <a:ext cx="991947" cy="462224"/>
+              <a:chOff x="1932123" y="3818374"/>
+              <a:chExt cx="991947" cy="462224"/>
+            </a:xfrm>
+          </p:grpSpPr>
+          <p:sp>
+            <p:nvSpPr>
+              <p:cNvPr id="41" name="Rectangle 40">
+                <a:extLst>
+                  <a:ext uri="{FF2B5EF4-FFF2-40B4-BE49-F238E27FC236}">
+                    <a16:creationId xmlns:a16="http://schemas.microsoft.com/office/drawing/2014/main" id="{9BE27E97-76DD-0DE4-401D-6EE30D69B614}"/>
+                  </a:ext>
+                </a:extLst>
+              </p:cNvPr>
+              <p:cNvSpPr/>
+              <p:nvPr/>
+            </p:nvSpPr>
+            <p:spPr>
+              <a:xfrm>
+                <a:off x="1932123" y="3818374"/>
+                <a:ext cx="991947" cy="462224"/>
+              </a:xfrm>
+              <a:prstGeom prst="rect">
+                <a:avLst/>
+              </a:prstGeom>
+              <a:noFill/>
+            </p:spPr>
+            <p:style>
+              <a:lnRef idx="2">
+                <a:schemeClr val="accent1">
+                  <a:shade val="15000"/>
+                </a:schemeClr>
+              </a:lnRef>
+              <a:fillRef idx="1">
+                <a:schemeClr val="accent1"/>
+              </a:fillRef>
+              <a:effectRef idx="0">
+                <a:schemeClr val="accent1"/>
+              </a:effectRef>
+              <a:fontRef idx="minor">
+                <a:schemeClr val="lt1"/>
+              </a:fontRef>
+            </p:style>
+            <p:txBody>
+              <a:bodyPr rtlCol="0" anchor="ctr"/>
+              <a:lstStyle/>
+              <a:p>
+                <a:pPr algn="ctr"/>
+                <a:endParaRPr lang="en-US"/>
+              </a:p>
+            </p:txBody>
+          </p:sp>
+          <p:sp>
+            <p:nvSpPr>
+              <p:cNvPr id="42" name="TextBox 41">
+                <a:extLst>
+                  <a:ext uri="{FF2B5EF4-FFF2-40B4-BE49-F238E27FC236}">
+                    <a16:creationId xmlns:a16="http://schemas.microsoft.com/office/drawing/2014/main" id="{A2AB4553-17DC-67C7-A087-28E723AEFF27}"/>
+                  </a:ext>
+                </a:extLst>
+              </p:cNvPr>
+              <p:cNvSpPr txBox="1"/>
+              <p:nvPr/>
+            </p:nvSpPr>
+            <p:spPr>
+              <a:xfrm>
+                <a:off x="2143724" y="3864820"/>
+                <a:ext cx="530915" cy="369332"/>
+              </a:xfrm>
+              <a:prstGeom prst="rect">
+                <a:avLst/>
+              </a:prstGeom>
+              <a:noFill/>
+            </p:spPr>
+            <p:txBody>
+              <a:bodyPr wrap="none" rtlCol="0">
+                <a:spAutoFit/>
+              </a:bodyPr>
+              <a:lstStyle/>
+              <a:p>
+                <a:r>
+                  <a:rPr lang="en-US" dirty="0">
+                    <a:solidFill>
+                      <a:srgbClr val="FF0000"/>
+                    </a:solidFill>
+                  </a:rPr>
+                  <a:t>???</a:t>
+                </a:r>
+              </a:p>
+            </p:txBody>
+          </p:sp>
+        </p:grpSp>
+        <p:grpSp>
+          <p:nvGrpSpPr>
+            <p:cNvPr id="35" name="Group 34">
+              <a:extLst>
+                <a:ext uri="{FF2B5EF4-FFF2-40B4-BE49-F238E27FC236}">
+                  <a16:creationId xmlns:a16="http://schemas.microsoft.com/office/drawing/2014/main" id="{3CEFE410-ADAA-A07A-7400-015AC316EDA5}"/>
+                </a:ext>
+              </a:extLst>
+            </p:cNvPr>
+            <p:cNvGrpSpPr/>
+            <p:nvPr/>
+          </p:nvGrpSpPr>
+          <p:grpSpPr>
+            <a:xfrm>
+              <a:off x="5870295" y="3818579"/>
+              <a:ext cx="991947" cy="462224"/>
+              <a:chOff x="1932123" y="3818374"/>
+              <a:chExt cx="991947" cy="462224"/>
+            </a:xfrm>
+          </p:grpSpPr>
+          <p:sp>
+            <p:nvSpPr>
+              <p:cNvPr id="39" name="Rectangle 38">
+                <a:extLst>
+                  <a:ext uri="{FF2B5EF4-FFF2-40B4-BE49-F238E27FC236}">
+                    <a16:creationId xmlns:a16="http://schemas.microsoft.com/office/drawing/2014/main" id="{30FF3D41-252D-46BF-C944-CEAC62100C11}"/>
+                  </a:ext>
+                </a:extLst>
+              </p:cNvPr>
+              <p:cNvSpPr/>
+              <p:nvPr/>
+            </p:nvSpPr>
+            <p:spPr>
+              <a:xfrm>
+                <a:off x="1932123" y="3818374"/>
+                <a:ext cx="991947" cy="462224"/>
+              </a:xfrm>
+              <a:prstGeom prst="rect">
+                <a:avLst/>
+              </a:prstGeom>
+              <a:noFill/>
+            </p:spPr>
+            <p:style>
+              <a:lnRef idx="2">
+                <a:schemeClr val="accent1">
+                  <a:shade val="15000"/>
+                </a:schemeClr>
+              </a:lnRef>
+              <a:fillRef idx="1">
+                <a:schemeClr val="accent1"/>
+              </a:fillRef>
+              <a:effectRef idx="0">
+                <a:schemeClr val="accent1"/>
+              </a:effectRef>
+              <a:fontRef idx="minor">
+                <a:schemeClr val="lt1"/>
+              </a:fontRef>
+            </p:style>
+            <p:txBody>
+              <a:bodyPr rtlCol="0" anchor="ctr"/>
+              <a:lstStyle/>
+              <a:p>
+                <a:pPr algn="ctr"/>
+                <a:endParaRPr lang="en-US"/>
+              </a:p>
+            </p:txBody>
+          </p:sp>
+          <p:sp>
+            <p:nvSpPr>
+              <p:cNvPr id="40" name="TextBox 39">
+                <a:extLst>
+                  <a:ext uri="{FF2B5EF4-FFF2-40B4-BE49-F238E27FC236}">
+                    <a16:creationId xmlns:a16="http://schemas.microsoft.com/office/drawing/2014/main" id="{F9FE1BC5-88F2-D4F7-5FDE-FD7D0106B545}"/>
+                  </a:ext>
+                </a:extLst>
+              </p:cNvPr>
+              <p:cNvSpPr txBox="1"/>
+              <p:nvPr/>
+            </p:nvSpPr>
+            <p:spPr>
+              <a:xfrm>
+                <a:off x="2143724" y="3864820"/>
+                <a:ext cx="530915" cy="369332"/>
+              </a:xfrm>
+              <a:prstGeom prst="rect">
+                <a:avLst/>
+              </a:prstGeom>
+              <a:noFill/>
+            </p:spPr>
+            <p:txBody>
+              <a:bodyPr wrap="none" rtlCol="0">
+                <a:spAutoFit/>
+              </a:bodyPr>
+              <a:lstStyle/>
+              <a:p>
+                <a:r>
+                  <a:rPr lang="en-US" dirty="0"/>
+                  <a:t>???</a:t>
+                </a:r>
+              </a:p>
+            </p:txBody>
+          </p:sp>
+        </p:grpSp>
+        <p:grpSp>
+          <p:nvGrpSpPr>
+            <p:cNvPr id="36" name="Group 35">
+              <a:extLst>
+                <a:ext uri="{FF2B5EF4-FFF2-40B4-BE49-F238E27FC236}">
+                  <a16:creationId xmlns:a16="http://schemas.microsoft.com/office/drawing/2014/main" id="{47B7C0AB-9FF3-8D5D-4DAE-D681482B35CE}"/>
+                </a:ext>
+              </a:extLst>
+            </p:cNvPr>
+            <p:cNvGrpSpPr/>
+            <p:nvPr/>
+          </p:nvGrpSpPr>
+          <p:grpSpPr>
+            <a:xfrm>
+              <a:off x="6854838" y="3818579"/>
+              <a:ext cx="991947" cy="462224"/>
+              <a:chOff x="1932123" y="3818374"/>
+              <a:chExt cx="991947" cy="462224"/>
+            </a:xfrm>
+          </p:grpSpPr>
+          <p:sp>
+            <p:nvSpPr>
+              <p:cNvPr id="37" name="Rectangle 36">
+                <a:extLst>
+                  <a:ext uri="{FF2B5EF4-FFF2-40B4-BE49-F238E27FC236}">
+                    <a16:creationId xmlns:a16="http://schemas.microsoft.com/office/drawing/2014/main" id="{F9CC9981-E531-24B5-70B0-D9C9A12D939D}"/>
+                  </a:ext>
+                </a:extLst>
+              </p:cNvPr>
+              <p:cNvSpPr/>
+              <p:nvPr/>
+            </p:nvSpPr>
+            <p:spPr>
+              <a:xfrm>
+                <a:off x="1932123" y="3818374"/>
+                <a:ext cx="991947" cy="462224"/>
+              </a:xfrm>
+              <a:prstGeom prst="rect">
+                <a:avLst/>
+              </a:prstGeom>
+              <a:noFill/>
+            </p:spPr>
+            <p:style>
+              <a:lnRef idx="2">
+                <a:schemeClr val="accent1">
+                  <a:shade val="15000"/>
+                </a:schemeClr>
+              </a:lnRef>
+              <a:fillRef idx="1">
+                <a:schemeClr val="accent1"/>
+              </a:fillRef>
+              <a:effectRef idx="0">
+                <a:schemeClr val="accent1"/>
+              </a:effectRef>
+              <a:fontRef idx="minor">
+                <a:schemeClr val="lt1"/>
+              </a:fontRef>
+            </p:style>
+            <p:txBody>
+              <a:bodyPr rtlCol="0" anchor="ctr"/>
+              <a:lstStyle/>
+              <a:p>
+                <a:pPr algn="ctr"/>
+                <a:endParaRPr lang="en-US"/>
+              </a:p>
+            </p:txBody>
+          </p:sp>
+          <p:sp>
+            <p:nvSpPr>
+              <p:cNvPr id="38" name="TextBox 37">
+                <a:extLst>
+                  <a:ext uri="{FF2B5EF4-FFF2-40B4-BE49-F238E27FC236}">
+                    <a16:creationId xmlns:a16="http://schemas.microsoft.com/office/drawing/2014/main" id="{E6093D27-EDA6-C7E4-194D-E596F5214D0D}"/>
+                  </a:ext>
+                </a:extLst>
+              </p:cNvPr>
+              <p:cNvSpPr txBox="1"/>
+              <p:nvPr/>
+            </p:nvSpPr>
+            <p:spPr>
+              <a:xfrm>
+                <a:off x="2143724" y="3864820"/>
+                <a:ext cx="530915" cy="369332"/>
+              </a:xfrm>
+              <a:prstGeom prst="rect">
+                <a:avLst/>
+              </a:prstGeom>
+              <a:noFill/>
+            </p:spPr>
+            <p:txBody>
+              <a:bodyPr wrap="none" rtlCol="0">
+                <a:spAutoFit/>
+              </a:bodyPr>
+              <a:lstStyle/>
+              <a:p>
+                <a:r>
+                  <a:rPr lang="en-US" dirty="0"/>
+                  <a:t>???</a:t>
+                </a:r>
+              </a:p>
+            </p:txBody>
+          </p:sp>
+        </p:grpSp>
+      </p:grpSp>
+      <p:sp>
+        <p:nvSpPr>
+          <p:cNvPr id="49" name="TextBox 48">
+            <a:extLst>
+              <a:ext uri="{FF2B5EF4-FFF2-40B4-BE49-F238E27FC236}">
+                <a16:creationId xmlns:a16="http://schemas.microsoft.com/office/drawing/2014/main" id="{A38E5322-A2A4-CFC7-F139-4C4DA63029AC}"/>
+              </a:ext>
+            </a:extLst>
+          </p:cNvPr>
+          <p:cNvSpPr txBox="1"/>
+          <p:nvPr/>
+        </p:nvSpPr>
+        <p:spPr>
+          <a:xfrm>
+            <a:off x="923589" y="4290349"/>
+            <a:ext cx="461986" cy="369332"/>
+          </a:xfrm>
+          <a:prstGeom prst="rect">
+            <a:avLst/>
+          </a:prstGeom>
+          <a:noFill/>
+        </p:spPr>
+        <p:txBody>
+          <a:bodyPr wrap="none" rtlCol="0">
+            <a:spAutoFit/>
+          </a:bodyPr>
+          <a:lstStyle/>
+          <a:p>
+            <a:r>
+              <a:rPr lang="en-US" dirty="0" err="1"/>
+              <a:t>arr</a:t>
+            </a:r>
+            <a:endParaRPr lang="en-US" dirty="0"/>
+          </a:p>
+        </p:txBody>
+      </p:sp>
+      <p:sp>
+        <p:nvSpPr>
+          <p:cNvPr id="50" name="TextBox 49">
+            <a:extLst>
+              <a:ext uri="{FF2B5EF4-FFF2-40B4-BE49-F238E27FC236}">
+                <a16:creationId xmlns:a16="http://schemas.microsoft.com/office/drawing/2014/main" id="{8625A488-74FF-A9FD-773F-FB57DF8BB45B}"/>
+              </a:ext>
+            </a:extLst>
+          </p:cNvPr>
+          <p:cNvSpPr txBox="1"/>
+          <p:nvPr/>
+        </p:nvSpPr>
+        <p:spPr>
+          <a:xfrm>
+            <a:off x="4528535" y="3903863"/>
+            <a:ext cx="562975" cy="369332"/>
+          </a:xfrm>
+          <a:prstGeom prst="rect">
+            <a:avLst/>
+          </a:prstGeom>
+          <a:noFill/>
+        </p:spPr>
+        <p:txBody>
+          <a:bodyPr wrap="none" rtlCol="0">
+            <a:spAutoFit/>
+          </a:bodyPr>
+          <a:lstStyle/>
+          <a:p>
+            <a:r>
+              <a:rPr lang="en-US" dirty="0">
+                <a:solidFill>
+                  <a:srgbClr val="FF0000"/>
+                </a:solidFill>
+              </a:rPr>
+              <a:t>end</a:t>
+            </a:r>
+          </a:p>
+        </p:txBody>
+      </p:sp>
+      <p:sp>
+        <p:nvSpPr>
+          <p:cNvPr id="51" name="Freeform 50">
+            <a:extLst>
+              <a:ext uri="{FF2B5EF4-FFF2-40B4-BE49-F238E27FC236}">
+                <a16:creationId xmlns:a16="http://schemas.microsoft.com/office/drawing/2014/main" id="{12386BD2-D31F-761F-9730-7C134DDA517E}"/>
+              </a:ext>
+            </a:extLst>
+          </p:cNvPr>
+          <p:cNvSpPr/>
+          <p:nvPr/>
+        </p:nvSpPr>
+        <p:spPr>
+          <a:xfrm>
+            <a:off x="3994915" y="4862216"/>
+            <a:ext cx="703385" cy="191011"/>
+          </a:xfrm>
+          <a:custGeom>
+            <a:avLst/>
+            <a:gdLst>
+              <a:gd name="csX0" fmla="*/ 703385 w 703385"/>
+              <a:gd name="csY0" fmla="*/ 20096 h 191011"/>
+              <a:gd name="csX1" fmla="*/ 301451 w 703385"/>
+              <a:gd name="csY1" fmla="*/ 190918 h 191011"/>
+              <a:gd name="csX2" fmla="*/ 0 w 703385"/>
+              <a:gd name="csY2" fmla="*/ 0 h 191011"/>
+            </a:gdLst>
+            <a:ahLst/>
+            <a:cxnLst>
+              <a:cxn ang="0">
+                <a:pos x="csX0" y="csY0"/>
+              </a:cxn>
+              <a:cxn ang="0">
+                <a:pos x="csX1" y="csY1"/>
+              </a:cxn>
+              <a:cxn ang="0">
+                <a:pos x="csX2" y="csY2"/>
+              </a:cxn>
+            </a:cxnLst>
+            <a:rect l="l" t="t" r="r" b="b"/>
+            <a:pathLst>
+              <a:path w="703385" h="191011">
+                <a:moveTo>
+                  <a:pt x="703385" y="20096"/>
+                </a:moveTo>
+                <a:cubicBezTo>
+                  <a:pt x="561033" y="107181"/>
+                  <a:pt x="418682" y="194267"/>
+                  <a:pt x="301451" y="190918"/>
+                </a:cubicBezTo>
+                <a:cubicBezTo>
+                  <a:pt x="184220" y="187569"/>
+                  <a:pt x="92110" y="93784"/>
+                  <a:pt x="0" y="0"/>
+                </a:cubicBezTo>
+              </a:path>
+            </a:pathLst>
+          </a:custGeom>
+          <a:noFill/>
+          <a:ln>
+            <a:solidFill>
+              <a:srgbClr val="FF0000"/>
+            </a:solidFill>
+            <a:headEnd type="none"/>
+            <a:tailEnd type="triangle"/>
+          </a:ln>
+        </p:spPr>
+        <p:style>
+          <a:lnRef idx="2">
+            <a:schemeClr val="accent1">
+              <a:shade val="15000"/>
+            </a:schemeClr>
+          </a:lnRef>
+          <a:fillRef idx="1">
+            <a:schemeClr val="accent1"/>
+          </a:fillRef>
+          <a:effectRef idx="0">
+            <a:schemeClr val="accent1"/>
+          </a:effectRef>
+          <a:fontRef idx="minor">
+            <a:schemeClr val="lt1"/>
+          </a:fontRef>
+        </p:style>
+        <p:txBody>
+          <a:bodyPr rtlCol="0" anchor="ctr"/>
+          <a:lstStyle/>
+          <a:p>
+            <a:pPr algn="ctr"/>
+            <a:endParaRPr lang="en-US" dirty="0"/>
+          </a:p>
+        </p:txBody>
+      </p:sp>
+      <p:sp>
+        <p:nvSpPr>
+          <p:cNvPr id="52" name="Freeform 51">
+            <a:extLst>
+              <a:ext uri="{FF2B5EF4-FFF2-40B4-BE49-F238E27FC236}">
+                <a16:creationId xmlns:a16="http://schemas.microsoft.com/office/drawing/2014/main" id="{6DAF07EA-6579-08B8-1979-AE6370D2A896}"/>
+              </a:ext>
+            </a:extLst>
+          </p:cNvPr>
+          <p:cNvSpPr/>
+          <p:nvPr/>
+        </p:nvSpPr>
+        <p:spPr>
+          <a:xfrm>
+            <a:off x="2967663" y="4862216"/>
+            <a:ext cx="703385" cy="191011"/>
+          </a:xfrm>
+          <a:custGeom>
+            <a:avLst/>
+            <a:gdLst>
+              <a:gd name="csX0" fmla="*/ 703385 w 703385"/>
+              <a:gd name="csY0" fmla="*/ 20096 h 191011"/>
+              <a:gd name="csX1" fmla="*/ 301451 w 703385"/>
+              <a:gd name="csY1" fmla="*/ 190918 h 191011"/>
+              <a:gd name="csX2" fmla="*/ 0 w 703385"/>
+              <a:gd name="csY2" fmla="*/ 0 h 191011"/>
+            </a:gdLst>
+            <a:ahLst/>
+            <a:cxnLst>
+              <a:cxn ang="0">
+                <a:pos x="csX0" y="csY0"/>
+              </a:cxn>
+              <a:cxn ang="0">
+                <a:pos x="csX1" y="csY1"/>
+              </a:cxn>
+              <a:cxn ang="0">
+                <a:pos x="csX2" y="csY2"/>
+              </a:cxn>
+            </a:cxnLst>
+            <a:rect l="l" t="t" r="r" b="b"/>
+            <a:pathLst>
+              <a:path w="703385" h="191011">
+                <a:moveTo>
+                  <a:pt x="703385" y="20096"/>
+                </a:moveTo>
+                <a:cubicBezTo>
+                  <a:pt x="561033" y="107181"/>
+                  <a:pt x="418682" y="194267"/>
+                  <a:pt x="301451" y="190918"/>
+                </a:cubicBezTo>
+                <a:cubicBezTo>
+                  <a:pt x="184220" y="187569"/>
+                  <a:pt x="92110" y="93784"/>
+                  <a:pt x="0" y="0"/>
+                </a:cubicBezTo>
+              </a:path>
+            </a:pathLst>
+          </a:custGeom>
+          <a:noFill/>
+          <a:ln>
+            <a:solidFill>
+              <a:srgbClr val="FF0000"/>
+            </a:solidFill>
+            <a:headEnd type="none"/>
+            <a:tailEnd type="triangle"/>
+          </a:ln>
+        </p:spPr>
+        <p:style>
+          <a:lnRef idx="2">
+            <a:schemeClr val="accent1">
+              <a:shade val="15000"/>
+            </a:schemeClr>
+          </a:lnRef>
+          <a:fillRef idx="1">
+            <a:schemeClr val="accent1"/>
+          </a:fillRef>
+          <a:effectRef idx="0">
+            <a:schemeClr val="accent1"/>
+          </a:effectRef>
+          <a:fontRef idx="minor">
+            <a:schemeClr val="lt1"/>
+          </a:fontRef>
+        </p:style>
+        <p:txBody>
+          <a:bodyPr rtlCol="0" anchor="ctr"/>
+          <a:lstStyle/>
+          <a:p>
+            <a:pPr algn="ctr"/>
+            <a:endParaRPr lang="en-US" dirty="0"/>
+          </a:p>
+        </p:txBody>
+      </p:sp>
+      <p:sp>
+        <p:nvSpPr>
+          <p:cNvPr id="53" name="Freeform 52">
+            <a:extLst>
+              <a:ext uri="{FF2B5EF4-FFF2-40B4-BE49-F238E27FC236}">
+                <a16:creationId xmlns:a16="http://schemas.microsoft.com/office/drawing/2014/main" id="{3205DE79-6B56-D1C4-005F-0BFDC4616B30}"/>
+              </a:ext>
+            </a:extLst>
+          </p:cNvPr>
+          <p:cNvSpPr/>
+          <p:nvPr/>
+        </p:nvSpPr>
+        <p:spPr>
+          <a:xfrm>
+            <a:off x="1940411" y="4862216"/>
+            <a:ext cx="703385" cy="191011"/>
+          </a:xfrm>
+          <a:custGeom>
+            <a:avLst/>
+            <a:gdLst>
+              <a:gd name="csX0" fmla="*/ 703385 w 703385"/>
+              <a:gd name="csY0" fmla="*/ 20096 h 191011"/>
+              <a:gd name="csX1" fmla="*/ 301451 w 703385"/>
+              <a:gd name="csY1" fmla="*/ 190918 h 191011"/>
+              <a:gd name="csX2" fmla="*/ 0 w 703385"/>
+              <a:gd name="csY2" fmla="*/ 0 h 191011"/>
+            </a:gdLst>
+            <a:ahLst/>
+            <a:cxnLst>
+              <a:cxn ang="0">
+                <a:pos x="csX0" y="csY0"/>
+              </a:cxn>
+              <a:cxn ang="0">
+                <a:pos x="csX1" y="csY1"/>
+              </a:cxn>
+              <a:cxn ang="0">
+                <a:pos x="csX2" y="csY2"/>
+              </a:cxn>
+            </a:cxnLst>
+            <a:rect l="l" t="t" r="r" b="b"/>
+            <a:pathLst>
+              <a:path w="703385" h="191011">
+                <a:moveTo>
+                  <a:pt x="703385" y="20096"/>
+                </a:moveTo>
+                <a:cubicBezTo>
+                  <a:pt x="561033" y="107181"/>
+                  <a:pt x="418682" y="194267"/>
+                  <a:pt x="301451" y="190918"/>
+                </a:cubicBezTo>
+                <a:cubicBezTo>
+                  <a:pt x="184220" y="187569"/>
+                  <a:pt x="92110" y="93784"/>
+                  <a:pt x="0" y="0"/>
+                </a:cubicBezTo>
+              </a:path>
+            </a:pathLst>
+          </a:custGeom>
+          <a:noFill/>
+          <a:ln>
+            <a:solidFill>
+              <a:srgbClr val="FF0000"/>
+            </a:solidFill>
+            <a:headEnd type="none"/>
+            <a:tailEnd type="triangle"/>
+          </a:ln>
+        </p:spPr>
+        <p:style>
+          <a:lnRef idx="2">
+            <a:schemeClr val="accent1">
+              <a:shade val="15000"/>
+            </a:schemeClr>
+          </a:lnRef>
+          <a:fillRef idx="1">
+            <a:schemeClr val="accent1"/>
+          </a:fillRef>
+          <a:effectRef idx="0">
+            <a:schemeClr val="accent1"/>
+          </a:effectRef>
+          <a:fontRef idx="minor">
+            <a:schemeClr val="lt1"/>
+          </a:fontRef>
+        </p:style>
+        <p:txBody>
+          <a:bodyPr rtlCol="0" anchor="ctr"/>
+          <a:lstStyle/>
+          <a:p>
+            <a:pPr algn="ctr"/>
+            <a:endParaRPr lang="en-US" dirty="0"/>
+          </a:p>
+        </p:txBody>
+      </p:sp>
+      <p:grpSp>
+        <p:nvGrpSpPr>
+          <p:cNvPr id="54" name="Group 53">
+            <a:extLst>
+              <a:ext uri="{FF2B5EF4-FFF2-40B4-BE49-F238E27FC236}">
+                <a16:creationId xmlns:a16="http://schemas.microsoft.com/office/drawing/2014/main" id="{0E98146C-B5AA-3FF9-957E-0BCC21F9476A}"/>
+              </a:ext>
+            </a:extLst>
+          </p:cNvPr>
+          <p:cNvGrpSpPr/>
+          <p:nvPr/>
+        </p:nvGrpSpPr>
+        <p:grpSpPr>
+          <a:xfrm>
+            <a:off x="1307161" y="3037608"/>
+            <a:ext cx="1106160" cy="886243"/>
+            <a:chOff x="1838085" y="5759006"/>
+            <a:chExt cx="743578" cy="876660"/>
+          </a:xfrm>
+        </p:grpSpPr>
+        <p:cxnSp>
+          <p:nvCxnSpPr>
+            <p:cNvPr id="55" name="Straight Connector 54">
+              <a:extLst>
+                <a:ext uri="{FF2B5EF4-FFF2-40B4-BE49-F238E27FC236}">
+                  <a16:creationId xmlns:a16="http://schemas.microsoft.com/office/drawing/2014/main" id="{926ABFD3-7FB7-0C69-53C6-072C6C8FF63A}"/>
+                </a:ext>
+              </a:extLst>
+            </p:cNvPr>
+            <p:cNvCxnSpPr/>
+            <p:nvPr/>
+          </p:nvCxnSpPr>
+          <p:spPr>
+            <a:xfrm flipV="1">
+              <a:off x="1838085" y="5841846"/>
+              <a:ext cx="743578" cy="793820"/>
+            </a:xfrm>
+            <a:prstGeom prst="line">
+              <a:avLst/>
+            </a:prstGeom>
+            <a:ln>
+              <a:solidFill>
+                <a:srgbClr val="FF0000"/>
+              </a:solidFill>
+            </a:ln>
+          </p:spPr>
+          <p:style>
+            <a:lnRef idx="2">
+              <a:schemeClr val="accent1"/>
+            </a:lnRef>
+            <a:fillRef idx="0">
+              <a:schemeClr val="accent1"/>
+            </a:fillRef>
+            <a:effectRef idx="1">
+              <a:schemeClr val="accent1"/>
+            </a:effectRef>
+            <a:fontRef idx="minor">
+              <a:schemeClr val="tx1"/>
+            </a:fontRef>
+          </p:style>
+        </p:cxnSp>
+        <p:cxnSp>
+          <p:nvCxnSpPr>
+            <p:cNvPr id="56" name="Straight Connector 55">
+              <a:extLst>
+                <a:ext uri="{FF2B5EF4-FFF2-40B4-BE49-F238E27FC236}">
+                  <a16:creationId xmlns:a16="http://schemas.microsoft.com/office/drawing/2014/main" id="{D316A3C5-88A0-44C3-F137-8B390878F628}"/>
+                </a:ext>
+              </a:extLst>
+            </p:cNvPr>
+            <p:cNvCxnSpPr>
+              <a:cxnSpLocks/>
+            </p:cNvCxnSpPr>
+            <p:nvPr/>
+          </p:nvCxnSpPr>
+          <p:spPr>
+            <a:xfrm flipH="1" flipV="1">
+              <a:off x="2096168" y="5759006"/>
+              <a:ext cx="485495" cy="834827"/>
+            </a:xfrm>
+            <a:prstGeom prst="line">
+              <a:avLst/>
+            </a:prstGeom>
+            <a:ln>
+              <a:solidFill>
+                <a:srgbClr val="FF0000"/>
+              </a:solidFill>
+            </a:ln>
+          </p:spPr>
+          <p:style>
+            <a:lnRef idx="2">
+              <a:schemeClr val="accent1"/>
+            </a:lnRef>
+            <a:fillRef idx="0">
+              <a:schemeClr val="accent1"/>
+            </a:fillRef>
+            <a:effectRef idx="1">
+              <a:schemeClr val="accent1"/>
+            </a:effectRef>
+            <a:fontRef idx="minor">
+              <a:schemeClr val="tx1"/>
+            </a:fontRef>
+          </p:style>
+        </p:cxnSp>
+      </p:grpSp>
+    </p:spTree>
+    <p:extLst>
+      <p:ext uri="{BB962C8B-B14F-4D97-AF65-F5344CB8AC3E}">
+        <p14:creationId xmlns:p14="http://schemas.microsoft.com/office/powerpoint/2010/main" val="1785195770"/>
+      </p:ext>
+    </p:extLst>
+  </p:cSld>
+  <p:clrMapOvr>
+    <a:masterClrMapping/>
+  </p:clrMapOvr>
+</p:sld>
+</file>
+
+<file path=ppt/slides/slide9.xml><?xml version="1.0" encoding="utf-8"?>
+<p:sld xmlns:a="http://schemas.openxmlformats.org/drawingml/2006/main" xmlns:r="http://schemas.openxmlformats.org/officeDocument/2006/relationships" xmlns:p="http://schemas.openxmlformats.org/presentationml/2006/main">
+  <p:cSld>
+    <p:spTree>
+      <p:nvGrpSpPr>
+        <p:cNvPr id="1" name="">
+          <a:extLst>
+            <a:ext uri="{FF2B5EF4-FFF2-40B4-BE49-F238E27FC236}">
               <a16:creationId xmlns:a16="http://schemas.microsoft.com/office/drawing/2014/main" id="{0A9C0E4C-6990-68E8-EDC5-BD2653072C9B}"/>
             </a:ext>
           </a:extLst>
@@ -4390,111 +10416,61 @@
           </a:p>
         </p:txBody>
       </p:sp>
+      <mc:AlternateContent xmlns:mc="http://schemas.openxmlformats.org/markup-compatibility/2006">
+        <mc:Choice xmlns:p14="http://schemas.microsoft.com/office/powerpoint/2010/main" Requires="p14">
+          <p:contentPart p14:bwMode="auto" r:id="rId3">
+            <p14:nvContentPartPr>
+              <p14:cNvPr id="2" name="Ink 1">
+                <a:extLst>
+                  <a:ext uri="{FF2B5EF4-FFF2-40B4-BE49-F238E27FC236}">
+                    <a16:creationId xmlns:a16="http://schemas.microsoft.com/office/drawing/2014/main" id="{96DA8BE1-1606-94F7-13AA-2815E86A51D7}"/>
+                  </a:ext>
+                </a:extLst>
+              </p14:cNvPr>
+              <p14:cNvContentPartPr/>
+              <p14:nvPr/>
+            </p14:nvContentPartPr>
+            <p14:xfrm>
+              <a:off x="1847880" y="723960"/>
+              <a:ext cx="6604200" cy="3461400"/>
+            </p14:xfrm>
+          </p:contentPart>
+        </mc:Choice>
+        <mc:Fallback>
+          <p:pic>
+            <p:nvPicPr>
+              <p:cNvPr id="2" name="Ink 1">
+                <a:extLst>
+                  <a:ext uri="{FF2B5EF4-FFF2-40B4-BE49-F238E27FC236}">
+                    <a16:creationId xmlns:a16="http://schemas.microsoft.com/office/drawing/2014/main" id="{96DA8BE1-1606-94F7-13AA-2815E86A51D7}"/>
+                  </a:ext>
+                </a:extLst>
+              </p:cNvPr>
+              <p:cNvPicPr/>
+              <p:nvPr/>
+            </p:nvPicPr>
+            <p:blipFill>
+              <a:blip r:embed="rId4"/>
+              <a:stretch>
+                <a:fillRect/>
+              </a:stretch>
+            </p:blipFill>
+            <p:spPr>
+              <a:xfrm>
+                <a:off x="1838520" y="714600"/>
+                <a:ext cx="6622920" cy="3480120"/>
+              </a:xfrm>
+              <a:prstGeom prst="rect">
+                <a:avLst/>
+              </a:prstGeom>
+            </p:spPr>
+          </p:pic>
+        </mc:Fallback>
+      </mc:AlternateContent>
     </p:spTree>
     <p:extLst>
       <p:ext uri="{BB962C8B-B14F-4D97-AF65-F5344CB8AC3E}">
         <p14:creationId xmlns:p14="http://schemas.microsoft.com/office/powerpoint/2010/main" val="1505878644"/>
-      </p:ext>
-    </p:extLst>
-  </p:cSld>
-  <p:clrMapOvr>
-    <a:masterClrMapping/>
-  </p:clrMapOvr>
-</p:sld>
-</file>
-
-<file path=ppt/slides/slide6.xml><?xml version="1.0" encoding="utf-8"?>
-<p:sld xmlns:a="http://schemas.openxmlformats.org/drawingml/2006/main" xmlns:r="http://schemas.openxmlformats.org/officeDocument/2006/relationships" xmlns:p="http://schemas.openxmlformats.org/presentationml/2006/main">
-  <p:cSld>
-    <p:spTree>
-      <p:nvGrpSpPr>
-        <p:cNvPr id="1" name=""/>
-        <p:cNvGrpSpPr/>
-        <p:nvPr/>
-      </p:nvGrpSpPr>
-      <p:grpSpPr>
-        <a:xfrm>
-          <a:off x="0" y="0"/>
-          <a:ext cx="0" cy="0"/>
-          <a:chOff x="0" y="0"/>
-          <a:chExt cx="0" cy="0"/>
-        </a:xfrm>
-      </p:grpSpPr>
-      <p:sp>
-        <p:nvSpPr>
-          <p:cNvPr id="2" name="Title 1">
-            <a:extLst>
-              <a:ext uri="{FF2B5EF4-FFF2-40B4-BE49-F238E27FC236}">
-                <a16:creationId xmlns:a16="http://schemas.microsoft.com/office/drawing/2014/main" id="{04DC1A5B-080A-CA27-D4B7-969D821EAE6B}"/>
-              </a:ext>
-            </a:extLst>
-          </p:cNvPr>
-          <p:cNvSpPr>
-            <a:spLocks noGrp="1"/>
-          </p:cNvSpPr>
-          <p:nvPr>
-            <p:ph type="title"/>
-          </p:nvPr>
-        </p:nvSpPr>
-        <p:spPr/>
-        <p:txBody>
-          <a:bodyPr/>
-          <a:lstStyle/>
-          <a:p>
-            <a:r>
-              <a:rPr lang="en-US" dirty="0"/>
-              <a:t>Practice Problem</a:t>
-            </a:r>
-          </a:p>
-        </p:txBody>
-      </p:sp>
-      <p:sp>
-        <p:nvSpPr>
-          <p:cNvPr id="3" name="Content Placeholder 2">
-            <a:extLst>
-              <a:ext uri="{FF2B5EF4-FFF2-40B4-BE49-F238E27FC236}">
-                <a16:creationId xmlns:a16="http://schemas.microsoft.com/office/drawing/2014/main" id="{F3E806F1-3EF6-4191-AC82-5B78869AA53C}"/>
-              </a:ext>
-            </a:extLst>
-          </p:cNvPr>
-          <p:cNvSpPr>
-            <a:spLocks noGrp="1"/>
-          </p:cNvSpPr>
-          <p:nvPr>
-            <p:ph idx="1"/>
-          </p:nvPr>
-        </p:nvSpPr>
-        <p:spPr/>
-        <p:txBody>
-          <a:bodyPr/>
-          <a:lstStyle/>
-          <a:p>
-            <a:pPr marL="0" indent="0">
-              <a:buNone/>
-            </a:pPr>
-            <a:r>
-              <a:rPr lang="en-US"/>
-              <a:t>In C++, </a:t>
-            </a:r>
-            <a:r>
-              <a:rPr lang="en-US" dirty="0"/>
-              <a:t>c</a:t>
-            </a:r>
-            <a:r>
-              <a:rPr lang="en-US"/>
-              <a:t>reate </a:t>
-            </a:r>
-            <a:r>
-              <a:rPr lang="en-US" dirty="0"/>
-              <a:t>the list in the previous slide …</a:t>
-            </a:r>
-          </a:p>
-        </p:txBody>
-      </p:sp>
-    </p:spTree>
-    <p:extLst>
-      <p:ext uri="{BB962C8B-B14F-4D97-AF65-F5344CB8AC3E}">
-        <p14:creationId xmlns:p14="http://schemas.microsoft.com/office/powerpoint/2010/main" val="1400040307"/>
       </p:ext>
     </p:extLst>
   </p:cSld>
